--- a/entrega/CadeiraBeni_pitch.pptx
+++ b/entrega/CadeiraBeni_pitch.pptx
@@ -2725,7 +2725,7 @@
                 <a:ea typeface="IBM Plex Mono" pitchFamily="34" charset="-122"/>
                 <a:cs typeface="IBM Plex Mono" pitchFamily="34" charset="-120"/>
               </a:rPr>
-              <a:t>3 · PROCESSO PRODUTIVO — ERROS E ACERTOS</a:t>
+              <a:t>3 · PROCESSO PRODUTIVO — TESTES DE BANCADA, ERROS E ACERTOS</a:t>
             </a:r>
             <a:endParaRPr lang="en-US" sz="1050" dirty="0"/>
           </a:p>
@@ -2783,13 +2783,13 @@
         </p:nvPicPr>
         <p:blipFill>
           <a:blip r:embed="rId1"/>
-          <a:srcRect l="0" r="0" t="181" b="181"/>
+          <a:srcRect l="0" r="0" t="0" b="0"/>
           <a:stretch/>
         </p:blipFill>
         <p:spPr>
           <a:xfrm>
-            <a:off x="411480" y="1554480"/>
-            <a:ext cx="2103120" cy="2011680"/>
+            <a:off x="411480" y="1572768"/>
+            <a:ext cx="1828800" cy="2148840"/>
           </a:xfrm>
           <a:prstGeom prst="rect">
             <a:avLst/>
@@ -2804,8 +2804,8 @@
         </p:nvSpPr>
         <p:spPr>
           <a:xfrm rot="-360000">
-            <a:off x="502920" y="1700784"/>
-            <a:ext cx="1463040" cy="310896"/>
+            <a:off x="475488" y="1700784"/>
+            <a:ext cx="1371600" cy="292608"/>
           </a:xfrm>
           <a:prstGeom prst="rect">
             <a:avLst/>
@@ -2825,7 +2825,7 @@
               <a:buNone/>
             </a:pPr>
             <a:r>
-              <a:rPr lang="en-US" sz="1100" spc="200" kern="0" dirty="0">
+              <a:rPr lang="en-US" sz="1050" spc="200" kern="0" dirty="0">
                 <a:solidFill>
                   <a:srgbClr val="D65A2B"/>
                 </a:solidFill>
@@ -2835,7 +2835,7 @@
               </a:rPr>
               <a:t>NÃO FECHOU</a:t>
             </a:r>
-            <a:endParaRPr lang="en-US" sz="1100" dirty="0"/>
+            <a:endParaRPr lang="en-US" sz="1050" dirty="0"/>
           </a:p>
         </p:txBody>
       </p:sp>
@@ -2847,8 +2847,8 @@
         </p:nvSpPr>
         <p:spPr>
           <a:xfrm>
-            <a:off x="411480" y="3657600"/>
-            <a:ext cx="2286000" cy="219456"/>
+            <a:off x="411480" y="3767328"/>
+            <a:ext cx="2011680" cy="329184"/>
           </a:xfrm>
           <a:prstGeom prst="rect">
             <a:avLst/>
@@ -2864,7 +2864,7 @@
               <a:buNone/>
             </a:pPr>
             <a:r>
-              <a:rPr lang="en-US" sz="850" spc="100" kern="0" dirty="0">
+              <a:rPr lang="en-US" sz="800" spc="100" kern="0" dirty="0">
                 <a:solidFill>
                   <a:srgbClr val="8A7B60"/>
                 </a:solidFill>
@@ -2874,7 +2874,7 @@
               </a:rPr>
               <a:t>V1 · PÉS E BRAÇOS EM MARCHETARIA</a:t>
             </a:r>
-            <a:endParaRPr lang="en-US" sz="850" dirty="0"/>
+            <a:endParaRPr lang="en-US" sz="800" dirty="0"/>
           </a:p>
         </p:txBody>
       </p:sp>
@@ -2886,8 +2886,8 @@
         </p:nvSpPr>
         <p:spPr>
           <a:xfrm>
-            <a:off x="2697480" y="1627632"/>
-            <a:ext cx="2834640" cy="2194560"/>
+            <a:off x="2395728" y="1609344"/>
+            <a:ext cx="2148840" cy="2377440"/>
           </a:xfrm>
           <a:prstGeom prst="rect">
             <a:avLst/>
@@ -2901,13 +2901,13 @@
           <a:p>
             <a:pPr marL="342900" indent="-342900">
               <a:lnSpc>
-                <a:spcPct val="125000"/>
+                <a:spcPct val="122000"/>
               </a:lnSpc>
               <a:buSzPct val="100000"/>
               <a:buChar char="•"/>
             </a:pPr>
             <a:r>
-              <a:rPr lang="en-US" sz="1100" dirty="0">
+              <a:rPr lang="en-US" sz="1050" dirty="0">
                 <a:solidFill>
                   <a:srgbClr val="3A362E"/>
                 </a:solidFill>
@@ -2915,20 +2915,20 @@
                 <a:ea typeface="IBM Plex Sans" pitchFamily="34" charset="-122"/>
                 <a:cs typeface="IBM Plex Sans" pitchFamily="34" charset="-120"/>
               </a:rPr>
-              <a:t>Densidade variável: cada pé saía diferente.</a:t>
-            </a:r>
-            <a:endParaRPr lang="en-US" sz="1100" dirty="0"/>
+              <a:t>Densidade variável: cada pé saía diferente na bancada.</a:t>
+            </a:r>
+            <a:endParaRPr lang="en-US" sz="1050" dirty="0"/>
           </a:p>
           <a:p>
             <a:pPr marL="342900" indent="-342900">
               <a:lnSpc>
-                <a:spcPct val="125000"/>
+                <a:spcPct val="122000"/>
               </a:lnSpc>
               <a:buSzPct val="100000"/>
               <a:buChar char="•"/>
             </a:pPr>
             <a:r>
-              <a:rPr lang="en-US" sz="1100" dirty="0">
+              <a:rPr lang="en-US" sz="1050" dirty="0">
                 <a:solidFill>
                   <a:srgbClr val="3A362E"/>
                 </a:solidFill>
@@ -2936,20 +2936,20 @@
                 <a:ea typeface="IBM Plex Sans" pitchFamily="34" charset="-122"/>
                 <a:cs typeface="IBM Plex Sans" pitchFamily="34" charset="-120"/>
               </a:rPr>
-              <a:t>Exigia precisão que a madeira de reuso não dá.</a:t>
-            </a:r>
-            <a:endParaRPr lang="en-US" sz="1100" dirty="0"/>
+              <a:t>Marchetaria exigia precisão que a madeira de reuso não dá.</a:t>
+            </a:r>
+            <a:endParaRPr lang="en-US" sz="1050" dirty="0"/>
           </a:p>
           <a:p>
             <a:pPr marL="342900" indent="-342900">
               <a:lnSpc>
-                <a:spcPct val="125000"/>
+                <a:spcPct val="122000"/>
               </a:lnSpc>
               <a:buSzPct val="100000"/>
               <a:buChar char="•"/>
             </a:pPr>
             <a:r>
-              <a:rPr lang="en-US" sz="1100" dirty="0">
+              <a:rPr lang="en-US" sz="1050" dirty="0">
                 <a:solidFill>
                   <a:srgbClr val="3A362E"/>
                 </a:solidFill>
@@ -2957,9 +2957,30 @@
                 <a:ea typeface="IBM Plex Sans" pitchFamily="34" charset="-122"/>
                 <a:cs typeface="IBM Plex Sans" pitchFamily="34" charset="-120"/>
               </a:rPr>
-              <a:t>Estética colada: quebrou uma parte, perdeu a peça. E ficou pesada.</a:t>
-            </a:r>
-            <a:endParaRPr lang="en-US" sz="1100" dirty="0"/>
+              <a:t>Estética colada: quebrou uma parte, perdeu a peça.</a:t>
+            </a:r>
+            <a:endParaRPr lang="en-US" sz="1050" dirty="0"/>
+          </a:p>
+          <a:p>
+            <a:pPr marL="342900" indent="-342900">
+              <a:lnSpc>
+                <a:spcPct val="122000"/>
+              </a:lnSpc>
+              <a:buSzPct val="100000"/>
+              <a:buChar char="•"/>
+            </a:pPr>
+            <a:r>
+              <a:rPr lang="en-US" sz="1050" dirty="0">
+                <a:solidFill>
+                  <a:srgbClr val="3A362E"/>
+                </a:solidFill>
+                <a:latin typeface="IBM Plex Sans" pitchFamily="34" charset="0"/>
+                <a:ea typeface="IBM Plex Sans" pitchFamily="34" charset="-122"/>
+                <a:cs typeface="IBM Plex Sans" pitchFamily="34" charset="-120"/>
+              </a:rPr>
+              <a:t>E ficou pesada de mover e limpar.</a:t>
+            </a:r>
+            <a:endParaRPr lang="en-US" sz="1050" dirty="0"/>
           </a:p>
         </p:txBody>
       </p:sp>
@@ -2978,8 +2999,8 @@
         </p:blipFill>
         <p:spPr>
           <a:xfrm>
-            <a:off x="5806440" y="1554480"/>
-            <a:ext cx="2011680" cy="2011680"/>
+            <a:off x="4709160" y="1572768"/>
+            <a:ext cx="1828800" cy="2148840"/>
           </a:xfrm>
           <a:prstGeom prst="rect">
             <a:avLst/>
@@ -2994,8 +3015,8 @@
         </p:nvSpPr>
         <p:spPr>
           <a:xfrm rot="-360000">
-            <a:off x="5897880" y="1700784"/>
-            <a:ext cx="1737360" cy="310896"/>
+            <a:off x="4754880" y="1700784"/>
+            <a:ext cx="1600200" cy="292608"/>
           </a:xfrm>
           <a:prstGeom prst="rect">
             <a:avLst/>
@@ -3015,7 +3036,7 @@
               <a:buNone/>
             </a:pPr>
             <a:r>
-              <a:rPr lang="en-US" sz="1100" spc="200" kern="0" dirty="0">
+              <a:rPr lang="en-US" sz="1000" spc="200" kern="0" dirty="0">
                 <a:solidFill>
                   <a:srgbClr val="243D2C"/>
                 </a:solidFill>
@@ -3025,7 +3046,7 @@
               </a:rPr>
               <a:t>MAIS REPARÁVEL</a:t>
             </a:r>
-            <a:endParaRPr lang="en-US" sz="1100" dirty="0"/>
+            <a:endParaRPr lang="en-US" sz="1000" dirty="0"/>
           </a:p>
         </p:txBody>
       </p:sp>
@@ -3037,8 +3058,8 @@
         </p:nvSpPr>
         <p:spPr>
           <a:xfrm>
-            <a:off x="5806440" y="3657600"/>
-            <a:ext cx="2286000" cy="219456"/>
+            <a:off x="4709160" y="3767328"/>
+            <a:ext cx="2011680" cy="329184"/>
           </a:xfrm>
           <a:prstGeom prst="rect">
             <a:avLst/>
@@ -3054,7 +3075,7 @@
               <a:buNone/>
             </a:pPr>
             <a:r>
-              <a:rPr lang="en-US" sz="850" spc="100" kern="0" dirty="0">
+              <a:rPr lang="en-US" sz="800" spc="100" kern="0" dirty="0">
                 <a:solidFill>
                   <a:srgbClr val="8A7B60"/>
                 </a:solidFill>
@@ -3064,7 +3085,7 @@
               </a:rPr>
               <a:t>V2 · ESTACAS DE BAMBU</a:t>
             </a:r>
-            <a:endParaRPr lang="en-US" sz="850" dirty="0"/>
+            <a:endParaRPr lang="en-US" sz="800" dirty="0"/>
           </a:p>
         </p:txBody>
       </p:sp>
@@ -3076,8 +3097,8 @@
         </p:nvSpPr>
         <p:spPr>
           <a:xfrm>
-            <a:off x="7955280" y="1627632"/>
-            <a:ext cx="1143000" cy="2377440"/>
+            <a:off x="6693408" y="1609344"/>
+            <a:ext cx="2148840" cy="2377440"/>
           </a:xfrm>
           <a:prstGeom prst="rect">
             <a:avLst/>
@@ -3091,13 +3112,13 @@
           <a:p>
             <a:pPr marL="342900" indent="-342900">
               <a:lnSpc>
-                <a:spcPct val="120000"/>
+                <a:spcPct val="122000"/>
               </a:lnSpc>
               <a:buSzPct val="100000"/>
               <a:buChar char="•"/>
             </a:pPr>
             <a:r>
-              <a:rPr lang="en-US" sz="950" dirty="0">
+              <a:rPr lang="en-US" sz="1050" dirty="0">
                 <a:solidFill>
                   <a:srgbClr val="3A362E"/>
                 </a:solidFill>
@@ -3107,18 +3128,18 @@
               </a:rPr>
               <a:t>Estrutura e pernas viraram partes independentes.</a:t>
             </a:r>
-            <a:endParaRPr lang="en-US" sz="950" dirty="0"/>
+            <a:endParaRPr lang="en-US" sz="1050" dirty="0"/>
           </a:p>
           <a:p>
             <a:pPr marL="342900" indent="-342900">
               <a:lnSpc>
-                <a:spcPct val="120000"/>
+                <a:spcPct val="122000"/>
               </a:lnSpc>
               <a:buSzPct val="100000"/>
               <a:buChar char="•"/>
             </a:pPr>
             <a:r>
-              <a:rPr lang="en-US" sz="950" dirty="0">
+              <a:rPr lang="en-US" sz="1050" dirty="0">
                 <a:solidFill>
                   <a:srgbClr val="3A362E"/>
                 </a:solidFill>
@@ -3128,18 +3149,18 @@
               </a:rPr>
               <a:t>Estaca padronizada: sai uma, entra outra.</a:t>
             </a:r>
-            <a:endParaRPr lang="en-US" sz="950" dirty="0"/>
+            <a:endParaRPr lang="en-US" sz="1050" dirty="0"/>
           </a:p>
           <a:p>
             <a:pPr marL="342900" indent="-342900">
               <a:lnSpc>
-                <a:spcPct val="120000"/>
+                <a:spcPct val="122000"/>
               </a:lnSpc>
               <a:buSzPct val="100000"/>
               <a:buChar char="•"/>
             </a:pPr>
             <a:r>
-              <a:rPr lang="en-US" sz="950" dirty="0">
+              <a:rPr lang="en-US" sz="1050" dirty="0">
                 <a:solidFill>
                   <a:srgbClr val="3A362E"/>
                 </a:solidFill>
@@ -3147,9 +3168,30 @@
                 <a:ea typeface="IBM Plex Sans" pitchFamily="34" charset="-122"/>
                 <a:cs typeface="IBM Plex Sans" pitchFamily="34" charset="-120"/>
               </a:rPr>
-              <a:t>Menos madeira na base — mais leve de mover e limpar.</a:t>
-            </a:r>
-            <a:endParaRPr lang="en-US" sz="950" dirty="0"/>
+              <a:t>Menos madeira na base — mais leve.</a:t>
+            </a:r>
+            <a:endParaRPr lang="en-US" sz="1050" dirty="0"/>
+          </a:p>
+          <a:p>
+            <a:pPr marL="342900" indent="-342900">
+              <a:lnSpc>
+                <a:spcPct val="122000"/>
+              </a:lnSpc>
+              <a:buSzPct val="100000"/>
+              <a:buChar char="•"/>
+            </a:pPr>
+            <a:r>
+              <a:rPr lang="en-US" sz="1050" dirty="0">
+                <a:solidFill>
+                  <a:srgbClr val="3A362E"/>
+                </a:solidFill>
+                <a:latin typeface="IBM Plex Sans" pitchFamily="34" charset="0"/>
+                <a:ea typeface="IBM Plex Sans" pitchFamily="34" charset="-122"/>
+                <a:cs typeface="IBM Plex Sans" pitchFamily="34" charset="-120"/>
+              </a:rPr>
+              <a:t>Verniz + vinil no acabamento: resiste a unha, xixi e mordida.</a:t>
+            </a:r>
+            <a:endParaRPr lang="en-US" sz="1050" dirty="0"/>
           </a:p>
         </p:txBody>
       </p:sp>

--- a/entrega/CadeiraBeni_pitch.pptx
+++ b/entrega/CadeiraBeni_pitch.pptx
@@ -2269,8 +2269,8 @@
         </p:nvSpPr>
         <p:spPr>
           <a:xfrm>
-            <a:off x="4023360" y="384048"/>
-            <a:ext cx="4709160" cy="228600"/>
+            <a:off x="3840480" y="411480"/>
+            <a:ext cx="4892040" cy="228600"/>
           </a:xfrm>
           <a:prstGeom prst="rect">
             <a:avLst/>
@@ -2294,7 +2294,7 @@
                 <a:ea typeface="IBM Plex Mono" pitchFamily="34" charset="-122"/>
                 <a:cs typeface="IBM Plex Mono" pitchFamily="34" charset="-120"/>
               </a:rPr>
-              <a:t>MARCENARIA EM MADEIRA DE REUSO · PARA CÃES PEQUENOS</a:t>
+              <a:t>MÓVEL PET EM MADEIRA DE REUSO · PROTÓTIPO V2</a:t>
             </a:r>
             <a:endParaRPr lang="en-US" sz="950" dirty="0"/>
           </a:p>
@@ -2308,46 +2308,7 @@
         </p:nvSpPr>
         <p:spPr>
           <a:xfrm>
-            <a:off x="4023360" y="621792"/>
-            <a:ext cx="4709160" cy="228600"/>
-          </a:xfrm>
-          <a:prstGeom prst="rect">
-            <a:avLst/>
-          </a:prstGeom>
-          <a:noFill/>
-          <a:ln/>
-        </p:spPr>
-        <p:txBody>
-          <a:bodyPr wrap="square" rtlCol="0" anchor="ctr"/>
-          <a:lstStyle/>
-          <a:p>
-            <a:pPr algn="r" indent="0" marL="0">
-              <a:buNone/>
-            </a:pPr>
-            <a:r>
-              <a:rPr lang="en-US" sz="950" spc="300" kern="0" dirty="0">
-                <a:solidFill>
-                  <a:srgbClr val="D65A2B"/>
-                </a:solidFill>
-                <a:latin typeface="IBM Plex Mono" pitchFamily="34" charset="0"/>
-                <a:ea typeface="IBM Plex Mono" pitchFamily="34" charset="-122"/>
-                <a:cs typeface="IBM Plex Mono" pitchFamily="34" charset="-120"/>
-              </a:rPr>
-              <a:t>PROTÓTIPO V2</a:t>
-            </a:r>
-            <a:endParaRPr lang="en-US" sz="950" dirty="0"/>
-          </a:p>
-        </p:txBody>
-      </p:sp>
-      <p:sp>
-        <p:nvSpPr>
-          <p:cNvPr id="19" name="Text 17"/>
-          <p:cNvSpPr/>
-          <p:nvPr/>
-        </p:nvSpPr>
-        <p:spPr>
-          <a:xfrm>
-            <a:off x="365760" y="1207008"/>
+            <a:off x="365760" y="1234440"/>
             <a:ext cx="4937760" cy="2834640"/>
           </a:xfrm>
           <a:prstGeom prst="rect">
@@ -2360,14 +2321,14 @@
           <a:bodyPr wrap="square" rtlCol="0" anchor="t"/>
           <a:lstStyle/>
           <a:p>
-            <a:pPr algn="l" indent="0" marL="0">
+            <a:pPr indent="0" marL="0">
               <a:lnSpc>
-                <a:spcPts val="10000"/>
+                <a:spcPts val="10300"/>
               </a:lnSpc>
               <a:buNone/>
             </a:pPr>
             <a:r>
-              <a:rPr lang="en-US" sz="12000" dirty="0">
+              <a:rPr lang="en-US" sz="12400" dirty="0">
                 <a:solidFill>
                   <a:srgbClr val="EFE7D6"/>
                 </a:solidFill>
@@ -2378,14 +2339,14 @@
               <a:t>CADEIRA
 </a:t>
             </a:r>
-            <a:pPr algn="l" indent="0" marL="0">
+            <a:pPr indent="0" marL="0">
               <a:lnSpc>
-                <a:spcPts val="10000"/>
+                <a:spcPts val="10300"/>
               </a:lnSpc>
               <a:buNone/>
             </a:pPr>
             <a:r>
-              <a:rPr lang="en-US" sz="12000" dirty="0">
+              <a:rPr lang="en-US" sz="12400" dirty="0">
                 <a:solidFill>
                   <a:srgbClr val="D65A2B"/>
                 </a:solidFill>
@@ -2395,20 +2356,20 @@
               </a:rPr>
               <a:t>BENI</a:t>
             </a:r>
-            <a:endParaRPr lang="en-US" sz="12000" dirty="0"/>
-          </a:p>
-        </p:txBody>
-      </p:sp>
-      <p:sp>
-        <p:nvSpPr>
-          <p:cNvPr id="20" name="Text 18"/>
-          <p:cNvSpPr/>
-          <p:nvPr/>
-        </p:nvSpPr>
-        <p:spPr>
-          <a:xfrm>
-            <a:off x="429768" y="3822192"/>
-            <a:ext cx="4480560" cy="365760"/>
+            <a:endParaRPr lang="en-US" sz="12400" dirty="0"/>
+          </a:p>
+        </p:txBody>
+      </p:sp>
+      <p:sp>
+        <p:nvSpPr>
+          <p:cNvPr id="19" name="Text 17"/>
+          <p:cNvSpPr/>
+          <p:nvPr/>
+        </p:nvSpPr>
+        <p:spPr>
+          <a:xfrm>
+            <a:off x="429768" y="3977640"/>
+            <a:ext cx="4480560" cy="384048"/>
           </a:xfrm>
           <a:prstGeom prst="rect">
             <a:avLst/>
@@ -2424,7 +2385,7 @@
               <a:buNone/>
             </a:pPr>
             <a:r>
-              <a:rPr lang="en-US" sz="1700" i="1" dirty="0">
+              <a:rPr lang="en-US" sz="1800" i="1" dirty="0">
                 <a:solidFill>
                   <a:srgbClr val="EFE7D6"/>
                 </a:solidFill>
@@ -2434,52 +2395,13 @@
               </a:rPr>
               <a:t>A caminha saiu do canto. Virou mobiliário.</a:t>
             </a:r>
-            <a:endParaRPr lang="en-US" sz="1700" dirty="0"/>
-          </a:p>
-        </p:txBody>
-      </p:sp>
-      <p:sp>
-        <p:nvSpPr>
-          <p:cNvPr id="21" name="Text 19"/>
-          <p:cNvSpPr/>
-          <p:nvPr/>
-        </p:nvSpPr>
-        <p:spPr>
-          <a:xfrm>
-            <a:off x="429768" y="4261104"/>
-            <a:ext cx="4663440" cy="274320"/>
-          </a:xfrm>
-          <a:prstGeom prst="rect">
-            <a:avLst/>
-          </a:prstGeom>
-          <a:noFill/>
-          <a:ln/>
-        </p:spPr>
-        <p:txBody>
-          <a:bodyPr wrap="square" rtlCol="0" anchor="ctr"/>
-          <a:lstStyle/>
-          <a:p>
-            <a:pPr indent="0" marL="0">
-              <a:buNone/>
-            </a:pPr>
-            <a:r>
-              <a:rPr lang="en-US" sz="950" spc="200" kern="0" dirty="0">
-                <a:solidFill>
-                  <a:srgbClr val="C89B48"/>
-                </a:solidFill>
-                <a:latin typeface="IBM Plex Mono" pitchFamily="34" charset="0"/>
-                <a:ea typeface="IBM Plex Mono" pitchFamily="34" charset="-122"/>
-                <a:cs typeface="IBM Plex Mono" pitchFamily="34" charset="-120"/>
-              </a:rPr>
-              <a:t>MADEIRA REAPROVEITADA  ·  BAMBU SUBSTITUÍVEL  ·  TECIDOS EM BREVE</a:t>
-            </a:r>
-            <a:endParaRPr lang="en-US" sz="950" dirty="0"/>
+            <a:endParaRPr lang="en-US" sz="1800" dirty="0"/>
           </a:p>
         </p:txBody>
       </p:sp>
       <p:pic>
         <p:nvPicPr>
-          <p:cNvPr id="22" name="Image 0" descr="site/assets/product-hero.png">    </p:cNvPr>
+          <p:cNvPr id="20" name="Image 0" descr="site/assets/product-hero.png">    </p:cNvPr>
           <p:cNvPicPr>
             <a:picLocks noChangeAspect="1"/>
           </p:cNvPicPr>
@@ -2503,14 +2425,14 @@
       </p:pic>
       <p:sp>
         <p:nvSpPr>
-          <p:cNvPr id="23" name="Text 20"/>
-          <p:cNvSpPr/>
-          <p:nvPr/>
-        </p:nvSpPr>
-        <p:spPr>
-          <a:xfrm>
-            <a:off x="411480" y="4809744"/>
-            <a:ext cx="8321040" cy="274320"/>
+          <p:cNvPr id="21" name="Text 18"/>
+          <p:cNvSpPr/>
+          <p:nvPr/>
+        </p:nvSpPr>
+        <p:spPr>
+          <a:xfrm>
+            <a:off x="411480" y="4828032"/>
+            <a:ext cx="8321040" cy="256032"/>
           </a:xfrm>
           <a:prstGeom prst="rect">
             <a:avLst/>
@@ -2526,7 +2448,7 @@
               <a:buNone/>
             </a:pPr>
             <a:r>
-              <a:rPr lang="en-US" sz="850" spc="200" kern="0" dirty="0">
+              <a:rPr lang="en-US" sz="800" spc="200" kern="0" dirty="0">
                 <a:solidFill>
                   <a:srgbClr val="BFB49E"/>
                 </a:solidFill>
@@ -2536,7 +2458,7 @@
               </a:rPr>
               <a:t>Luiza Britto · Design Thinking e Prototipagem · Insper · 02 jul 2026</a:t>
             </a:r>
-            <a:endParaRPr lang="en-US" sz="850" dirty="0"/>
+            <a:endParaRPr lang="en-US" sz="800" dirty="0"/>
           </a:p>
         </p:txBody>
       </p:sp>
@@ -2700,8 +2622,8 @@
         </p:nvSpPr>
         <p:spPr>
           <a:xfrm>
-            <a:off x="411480" y="310896"/>
-            <a:ext cx="7315200" cy="274320"/>
+            <a:off x="411480" y="329184"/>
+            <a:ext cx="8229600" cy="274320"/>
           </a:xfrm>
           <a:prstGeom prst="rect">
             <a:avLst/>
@@ -2713,7 +2635,7 @@
           <a:bodyPr wrap="square" rtlCol="0" anchor="ctr"/>
           <a:lstStyle/>
           <a:p>
-            <a:pPr algn="l" indent="0" marL="0">
+            <a:pPr indent="0" marL="0">
               <a:buNone/>
             </a:pPr>
             <a:r>
@@ -2725,7 +2647,7 @@
                 <a:ea typeface="IBM Plex Mono" pitchFamily="34" charset="-122"/>
                 <a:cs typeface="IBM Plex Mono" pitchFamily="34" charset="-120"/>
               </a:rPr>
-              <a:t>3 · PROCESSO PRODUTIVO — TESTES DE BANCADA, ERROS E ACERTOS</a:t>
+              <a:t>PROCESSO PRODUTIVO · ERROS E ACERTOS</a:t>
             </a:r>
             <a:endParaRPr lang="en-US" sz="1050" dirty="0"/>
           </a:p>
@@ -2739,8 +2661,8 @@
         </p:nvSpPr>
         <p:spPr>
           <a:xfrm>
-            <a:off x="384048" y="603504"/>
-            <a:ext cx="8229600" cy="658368"/>
+            <a:off x="384048" y="658368"/>
+            <a:ext cx="8229600" cy="795130"/>
           </a:xfrm>
           <a:prstGeom prst="rect">
             <a:avLst/>
@@ -2752,14 +2674,14 @@
           <a:bodyPr wrap="square" rtlCol="0" anchor="t"/>
           <a:lstStyle/>
           <a:p>
-            <a:pPr algn="l" indent="0" marL="0">
+            <a:pPr indent="0" marL="0">
               <a:lnSpc>
-                <a:spcPts val="3096"/>
+                <a:spcPts val="3440"/>
               </a:lnSpc>
               <a:buNone/>
             </a:pPr>
             <a:r>
-              <a:rPr lang="en-US" sz="3600" dirty="0">
+              <a:rPr lang="en-US" sz="4000" dirty="0">
                 <a:solidFill>
                   <a:srgbClr val="11100D"/>
                 </a:solidFill>
@@ -2769,7 +2691,7 @@
               </a:rPr>
               <a:t>O ERRO TAMBÉM É MATERIAL.</a:t>
             </a:r>
-            <a:endParaRPr lang="en-US" sz="3600" dirty="0"/>
+            <a:endParaRPr lang="en-US" sz="4000" dirty="0"/>
           </a:p>
         </p:txBody>
       </p:sp>
@@ -2788,8 +2710,8 @@
         </p:blipFill>
         <p:spPr>
           <a:xfrm>
-            <a:off x="411480" y="1572768"/>
-            <a:ext cx="1828800" cy="2148840"/>
+            <a:off x="411480" y="1691640"/>
+            <a:ext cx="1920240" cy="2286000"/>
           </a:xfrm>
           <a:prstGeom prst="rect">
             <a:avLst/>
@@ -2804,8 +2726,8 @@
         </p:nvSpPr>
         <p:spPr>
           <a:xfrm rot="-360000">
-            <a:off x="475488" y="1700784"/>
-            <a:ext cx="1371600" cy="292608"/>
+            <a:off x="475488" y="1828800"/>
+            <a:ext cx="1417320" cy="292608"/>
           </a:xfrm>
           <a:prstGeom prst="rect">
             <a:avLst/>
@@ -2847,8 +2769,8 @@
         </p:nvSpPr>
         <p:spPr>
           <a:xfrm>
-            <a:off x="411480" y="3767328"/>
-            <a:ext cx="2011680" cy="329184"/>
+            <a:off x="411480" y="4041648"/>
+            <a:ext cx="2011680" cy="219456"/>
           </a:xfrm>
           <a:prstGeom prst="rect">
             <a:avLst/>
@@ -2864,7 +2786,7 @@
               <a:buNone/>
             </a:pPr>
             <a:r>
-              <a:rPr lang="en-US" sz="800" spc="100" kern="0" dirty="0">
+              <a:rPr lang="en-US" sz="850" spc="100" kern="0" dirty="0">
                 <a:solidFill>
                   <a:srgbClr val="8A7B60"/>
                 </a:solidFill>
@@ -2872,9 +2794,9 @@
                 <a:ea typeface="IBM Plex Mono" pitchFamily="34" charset="-122"/>
                 <a:cs typeface="IBM Plex Mono" pitchFamily="34" charset="-120"/>
               </a:rPr>
-              <a:t>V1 · PÉS E BRAÇOS EM MARCHETARIA</a:t>
-            </a:r>
-            <a:endParaRPr lang="en-US" sz="800" dirty="0"/>
+              <a:t>V1 · MARCHETARIA</a:t>
+            </a:r>
+            <a:endParaRPr lang="en-US" sz="850" dirty="0"/>
           </a:p>
         </p:txBody>
       </p:sp>
@@ -2886,8 +2808,8 @@
         </p:nvSpPr>
         <p:spPr>
           <a:xfrm>
-            <a:off x="2395728" y="1609344"/>
-            <a:ext cx="2148840" cy="2377440"/>
+            <a:off x="2514600" y="1783080"/>
+            <a:ext cx="1965960" cy="2011680"/>
           </a:xfrm>
           <a:prstGeom prst="rect">
             <a:avLst/>
@@ -2901,13 +2823,13 @@
           <a:p>
             <a:pPr marL="342900" indent="-342900">
               <a:lnSpc>
-                <a:spcPct val="122000"/>
+                <a:spcPct val="130000"/>
               </a:lnSpc>
               <a:buSzPct val="100000"/>
               <a:buChar char="•"/>
             </a:pPr>
             <a:r>
-              <a:rPr lang="en-US" sz="1050" dirty="0">
+              <a:rPr lang="en-US" sz="1200" dirty="0">
                 <a:solidFill>
                   <a:srgbClr val="3A362E"/>
                 </a:solidFill>
@@ -2915,20 +2837,20 @@
                 <a:ea typeface="IBM Plex Sans" pitchFamily="34" charset="-122"/>
                 <a:cs typeface="IBM Plex Sans" pitchFamily="34" charset="-120"/>
               </a:rPr>
-              <a:t>Densidade variável: cada pé saía diferente na bancada.</a:t>
-            </a:r>
-            <a:endParaRPr lang="en-US" sz="1050" dirty="0"/>
+              <a:t>Cada pé saía diferente — precisão que o reuso não dá.</a:t>
+            </a:r>
+            <a:endParaRPr lang="en-US" sz="1200" dirty="0"/>
           </a:p>
           <a:p>
             <a:pPr marL="342900" indent="-342900">
               <a:lnSpc>
-                <a:spcPct val="122000"/>
+                <a:spcPct val="130000"/>
               </a:lnSpc>
               <a:buSzPct val="100000"/>
               <a:buChar char="•"/>
             </a:pPr>
             <a:r>
-              <a:rPr lang="en-US" sz="1050" dirty="0">
+              <a:rPr lang="en-US" sz="1200" dirty="0">
                 <a:solidFill>
                   <a:srgbClr val="3A362E"/>
                 </a:solidFill>
@@ -2936,51 +2858,9 @@
                 <a:ea typeface="IBM Plex Sans" pitchFamily="34" charset="-122"/>
                 <a:cs typeface="IBM Plex Sans" pitchFamily="34" charset="-120"/>
               </a:rPr>
-              <a:t>Marchetaria exigia precisão que a madeira de reuso não dá.</a:t>
-            </a:r>
-            <a:endParaRPr lang="en-US" sz="1050" dirty="0"/>
-          </a:p>
-          <a:p>
-            <a:pPr marL="342900" indent="-342900">
-              <a:lnSpc>
-                <a:spcPct val="122000"/>
-              </a:lnSpc>
-              <a:buSzPct val="100000"/>
-              <a:buChar char="•"/>
-            </a:pPr>
-            <a:r>
-              <a:rPr lang="en-US" sz="1050" dirty="0">
-                <a:solidFill>
-                  <a:srgbClr val="3A362E"/>
-                </a:solidFill>
-                <a:latin typeface="IBM Plex Sans" pitchFamily="34" charset="0"/>
-                <a:ea typeface="IBM Plex Sans" pitchFamily="34" charset="-122"/>
-                <a:cs typeface="IBM Plex Sans" pitchFamily="34" charset="-120"/>
-              </a:rPr>
-              <a:t>Estética colada: quebrou uma parte, perdeu a peça.</a:t>
-            </a:r>
-            <a:endParaRPr lang="en-US" sz="1050" dirty="0"/>
-          </a:p>
-          <a:p>
-            <a:pPr marL="342900" indent="-342900">
-              <a:lnSpc>
-                <a:spcPct val="122000"/>
-              </a:lnSpc>
-              <a:buSzPct val="100000"/>
-              <a:buChar char="•"/>
-            </a:pPr>
-            <a:r>
-              <a:rPr lang="en-US" sz="1050" dirty="0">
-                <a:solidFill>
-                  <a:srgbClr val="3A362E"/>
-                </a:solidFill>
-                <a:latin typeface="IBM Plex Sans" pitchFamily="34" charset="0"/>
-                <a:ea typeface="IBM Plex Sans" pitchFamily="34" charset="-122"/>
-                <a:cs typeface="IBM Plex Sans" pitchFamily="34" charset="-120"/>
-              </a:rPr>
-              <a:t>E ficou pesada de mover e limpar.</a:t>
-            </a:r>
-            <a:endParaRPr lang="en-US" sz="1050" dirty="0"/>
+              <a:t>Quebrou uma parte, perdeu a peça.</a:t>
+            </a:r>
+            <a:endParaRPr lang="en-US" sz="1200" dirty="0"/>
           </a:p>
         </p:txBody>
       </p:sp>
@@ -2999,8 +2879,8 @@
         </p:blipFill>
         <p:spPr>
           <a:xfrm>
-            <a:off x="4709160" y="1572768"/>
-            <a:ext cx="1828800" cy="2148840"/>
+            <a:off x="4709160" y="1691640"/>
+            <a:ext cx="1920240" cy="2286000"/>
           </a:xfrm>
           <a:prstGeom prst="rect">
             <a:avLst/>
@@ -3015,8 +2895,8 @@
         </p:nvSpPr>
         <p:spPr>
           <a:xfrm rot="-360000">
-            <a:off x="4754880" y="1700784"/>
-            <a:ext cx="1600200" cy="292608"/>
+            <a:off x="4754880" y="1828800"/>
+            <a:ext cx="1645920" cy="292608"/>
           </a:xfrm>
           <a:prstGeom prst="rect">
             <a:avLst/>
@@ -3058,8 +2938,8 @@
         </p:nvSpPr>
         <p:spPr>
           <a:xfrm>
-            <a:off x="4709160" y="3767328"/>
-            <a:ext cx="2011680" cy="329184"/>
+            <a:off x="4709160" y="4041648"/>
+            <a:ext cx="2011680" cy="219456"/>
           </a:xfrm>
           <a:prstGeom prst="rect">
             <a:avLst/>
@@ -3075,7 +2955,7 @@
               <a:buNone/>
             </a:pPr>
             <a:r>
-              <a:rPr lang="en-US" sz="800" spc="100" kern="0" dirty="0">
+              <a:rPr lang="en-US" sz="850" spc="100" kern="0" dirty="0">
                 <a:solidFill>
                   <a:srgbClr val="8A7B60"/>
                 </a:solidFill>
@@ -3083,9 +2963,9 @@
                 <a:ea typeface="IBM Plex Mono" pitchFamily="34" charset="-122"/>
                 <a:cs typeface="IBM Plex Mono" pitchFamily="34" charset="-120"/>
               </a:rPr>
-              <a:t>V2 · ESTACAS DE BAMBU</a:t>
-            </a:r>
-            <a:endParaRPr lang="en-US" sz="800" dirty="0"/>
+              <a:t>V2 · BAMBU</a:t>
+            </a:r>
+            <a:endParaRPr lang="en-US" sz="850" dirty="0"/>
           </a:p>
         </p:txBody>
       </p:sp>
@@ -3097,8 +2977,8 @@
         </p:nvSpPr>
         <p:spPr>
           <a:xfrm>
-            <a:off x="6693408" y="1609344"/>
-            <a:ext cx="2148840" cy="2377440"/>
+            <a:off x="6812280" y="1783080"/>
+            <a:ext cx="2011680" cy="2011680"/>
           </a:xfrm>
           <a:prstGeom prst="rect">
             <a:avLst/>
@@ -3112,13 +2992,13 @@
           <a:p>
             <a:pPr marL="342900" indent="-342900">
               <a:lnSpc>
-                <a:spcPct val="122000"/>
+                <a:spcPct val="130000"/>
               </a:lnSpc>
               <a:buSzPct val="100000"/>
               <a:buChar char="•"/>
             </a:pPr>
             <a:r>
-              <a:rPr lang="en-US" sz="1050" dirty="0">
+              <a:rPr lang="en-US" sz="1200" dirty="0">
                 <a:solidFill>
                   <a:srgbClr val="3A362E"/>
                 </a:solidFill>
@@ -3126,20 +3006,20 @@
                 <a:ea typeface="IBM Plex Sans" pitchFamily="34" charset="-122"/>
                 <a:cs typeface="IBM Plex Sans" pitchFamily="34" charset="-120"/>
               </a:rPr>
-              <a:t>Estrutura e pernas viraram partes independentes.</a:t>
-            </a:r>
-            <a:endParaRPr lang="en-US" sz="1050" dirty="0"/>
+              <a:t>Partes independentes: estaca sai, estaca entra.</a:t>
+            </a:r>
+            <a:endParaRPr lang="en-US" sz="1200" dirty="0"/>
           </a:p>
           <a:p>
             <a:pPr marL="342900" indent="-342900">
               <a:lnSpc>
-                <a:spcPct val="122000"/>
+                <a:spcPct val="130000"/>
               </a:lnSpc>
               <a:buSzPct val="100000"/>
               <a:buChar char="•"/>
             </a:pPr>
             <a:r>
-              <a:rPr lang="en-US" sz="1050" dirty="0">
+              <a:rPr lang="en-US" sz="1200" dirty="0">
                 <a:solidFill>
                   <a:srgbClr val="3A362E"/>
                 </a:solidFill>
@@ -3147,51 +3027,9 @@
                 <a:ea typeface="IBM Plex Sans" pitchFamily="34" charset="-122"/>
                 <a:cs typeface="IBM Plex Sans" pitchFamily="34" charset="-120"/>
               </a:rPr>
-              <a:t>Estaca padronizada: sai uma, entra outra.</a:t>
-            </a:r>
-            <a:endParaRPr lang="en-US" sz="1050" dirty="0"/>
-          </a:p>
-          <a:p>
-            <a:pPr marL="342900" indent="-342900">
-              <a:lnSpc>
-                <a:spcPct val="122000"/>
-              </a:lnSpc>
-              <a:buSzPct val="100000"/>
-              <a:buChar char="•"/>
-            </a:pPr>
-            <a:r>
-              <a:rPr lang="en-US" sz="1050" dirty="0">
-                <a:solidFill>
-                  <a:srgbClr val="3A362E"/>
-                </a:solidFill>
-                <a:latin typeface="IBM Plex Sans" pitchFamily="34" charset="0"/>
-                <a:ea typeface="IBM Plex Sans" pitchFamily="34" charset="-122"/>
-                <a:cs typeface="IBM Plex Sans" pitchFamily="34" charset="-120"/>
-              </a:rPr>
-              <a:t>Menos madeira na base — mais leve.</a:t>
-            </a:r>
-            <a:endParaRPr lang="en-US" sz="1050" dirty="0"/>
-          </a:p>
-          <a:p>
-            <a:pPr marL="342900" indent="-342900">
-              <a:lnSpc>
-                <a:spcPct val="122000"/>
-              </a:lnSpc>
-              <a:buSzPct val="100000"/>
-              <a:buChar char="•"/>
-            </a:pPr>
-            <a:r>
-              <a:rPr lang="en-US" sz="1050" dirty="0">
-                <a:solidFill>
-                  <a:srgbClr val="3A362E"/>
-                </a:solidFill>
-                <a:latin typeface="IBM Plex Sans" pitchFamily="34" charset="0"/>
-                <a:ea typeface="IBM Plex Sans" pitchFamily="34" charset="-122"/>
-                <a:cs typeface="IBM Plex Sans" pitchFamily="34" charset="-120"/>
-              </a:rPr>
-              <a:t>Verniz + vinil no acabamento: resiste a unha, xixi e mordida.</a:t>
-            </a:r>
-            <a:endParaRPr lang="en-US" sz="1050" dirty="0"/>
+              <a:t>Menos madeira. Mais leve.</a:t>
+            </a:r>
+            <a:endParaRPr lang="en-US" sz="1200" dirty="0"/>
           </a:p>
         </p:txBody>
       </p:sp>
@@ -3203,8 +3041,8 @@
         </p:nvSpPr>
         <p:spPr>
           <a:xfrm>
-            <a:off x="411480" y="4160520"/>
-            <a:ext cx="8321040" cy="512064"/>
+            <a:off x="411480" y="4370832"/>
+            <a:ext cx="8321040" cy="457200"/>
           </a:xfrm>
           <a:prstGeom prst="rect">
             <a:avLst/>
@@ -3223,8 +3061,8 @@
         </p:nvSpPr>
         <p:spPr>
           <a:xfrm>
-            <a:off x="594360" y="4187952"/>
-            <a:ext cx="8046720" cy="457200"/>
+            <a:off x="594360" y="4389120"/>
+            <a:ext cx="8046720" cy="420624"/>
           </a:xfrm>
           <a:prstGeom prst="rect">
             <a:avLst/>
@@ -3240,7 +3078,7 @@
               <a:buNone/>
             </a:pPr>
             <a:r>
-              <a:rPr lang="en-US" sz="900" spc="100" kern="0" dirty="0">
+              <a:rPr lang="en-US" sz="1000" spc="200" kern="0" dirty="0">
                 <a:solidFill>
                   <a:srgbClr val="EFE7D6"/>
                 </a:solidFill>
@@ -3248,9 +3086,9 @@
                 <a:ea typeface="IBM Plex Mono" pitchFamily="34" charset="-122"/>
                 <a:cs typeface="IBM Plex Mono" pitchFamily="34" charset="-120"/>
               </a:rPr>
-              <a:t>TENSÕES:   USUÁRIO (conforto + altura + higiene)   ×   MATERIAL (variação do reuso)   ×   LABORATÓRIO (tempo e ferramentas)</a:t>
-            </a:r>
-            <a:endParaRPr lang="en-US" sz="900" dirty="0"/>
+              <a:t>TENSÕES:  USUÁRIO  ×  MATERIAL  ×  LABORATÓRIO</a:t>
+            </a:r>
+            <a:endParaRPr lang="en-US" sz="1000" dirty="0"/>
           </a:p>
         </p:txBody>
       </p:sp>
@@ -3262,8 +3100,8 @@
         </p:nvSpPr>
         <p:spPr>
           <a:xfrm>
-            <a:off x="411480" y="4809744"/>
-            <a:ext cx="8321040" cy="274320"/>
+            <a:off x="411480" y="4828032"/>
+            <a:ext cx="8321040" cy="256032"/>
           </a:xfrm>
           <a:prstGeom prst="rect">
             <a:avLst/>
@@ -3279,7 +3117,7 @@
               <a:buNone/>
             </a:pPr>
             <a:r>
-              <a:rPr lang="en-US" sz="850" spc="200" kern="0" dirty="0">
+              <a:rPr lang="en-US" sz="800" spc="200" kern="0" dirty="0">
                 <a:solidFill>
                   <a:srgbClr val="8A7B60"/>
                 </a:solidFill>
@@ -3289,7 +3127,7 @@
               </a:rPr>
               <a:t>Luiza Britto · Design Thinking e Prototipagem · Insper · 02 jul 2026</a:t>
             </a:r>
-            <a:endParaRPr lang="en-US" sz="850" dirty="0"/>
+            <a:endParaRPr lang="en-US" sz="800" dirty="0"/>
           </a:p>
         </p:txBody>
       </p:sp>
@@ -3453,8 +3291,8 @@
         </p:nvSpPr>
         <p:spPr>
           <a:xfrm>
-            <a:off x="411480" y="310896"/>
-            <a:ext cx="7315200" cy="274320"/>
+            <a:off x="411480" y="329184"/>
+            <a:ext cx="8229600" cy="274320"/>
           </a:xfrm>
           <a:prstGeom prst="rect">
             <a:avLst/>
@@ -3466,7 +3304,7 @@
           <a:bodyPr wrap="square" rtlCol="0" anchor="ctr"/>
           <a:lstStyle/>
           <a:p>
-            <a:pPr algn="l" indent="0" marL="0">
+            <a:pPr indent="0" marL="0">
               <a:buNone/>
             </a:pPr>
             <a:r>
@@ -3478,7 +3316,7 @@
                 <a:ea typeface="IBM Plex Mono" pitchFamily="34" charset="-122"/>
                 <a:cs typeface="IBM Plex Mono" pitchFamily="34" charset="-120"/>
               </a:rPr>
-              <a:t>VIABILIDADE SISTÊMICA — SÍNTESE</a:t>
+              <a:t>VIABILIDADE SISTÊMICA</a:t>
             </a:r>
             <a:endParaRPr lang="en-US" sz="1050" dirty="0"/>
           </a:p>
@@ -3492,8 +3330,8 @@
         </p:nvSpPr>
         <p:spPr>
           <a:xfrm>
-            <a:off x="384048" y="603504"/>
-            <a:ext cx="8412480" cy="621792"/>
+            <a:off x="384048" y="658368"/>
+            <a:ext cx="8412480" cy="795130"/>
           </a:xfrm>
           <a:prstGeom prst="rect">
             <a:avLst/>
@@ -3505,14 +3343,14 @@
           <a:bodyPr wrap="square" rtlCol="0" anchor="t"/>
           <a:lstStyle/>
           <a:p>
-            <a:pPr algn="l" indent="0" marL="0">
+            <a:pPr indent="0" marL="0">
               <a:lnSpc>
-                <a:spcPts val="2924"/>
+                <a:spcPts val="3440"/>
               </a:lnSpc>
               <a:buNone/>
             </a:pPr>
             <a:r>
-              <a:rPr lang="en-US" sz="3400" dirty="0">
+              <a:rPr lang="en-US" sz="4000" dirty="0">
                 <a:solidFill>
                   <a:srgbClr val="11100D"/>
                 </a:solidFill>
@@ -3520,9 +3358,29 @@
                 <a:ea typeface="League Gothic" pitchFamily="34" charset="-122"/>
                 <a:cs typeface="League Gothic" pitchFamily="34" charset="-120"/>
               </a:rPr>
-              <a:t>CINCO PROVAS PARA A CADEIRA EXISTIR.</a:t>
-            </a:r>
-            <a:endParaRPr lang="en-US" sz="3400" dirty="0"/>
+              <a:t>CINCO PROVAS PARA</a:t>
+            </a:r>
+            <a:endParaRPr lang="en-US" sz="4000" dirty="0"/>
+          </a:p>
+          <a:p>
+            <a:pPr indent="0" marL="0">
+              <a:lnSpc>
+                <a:spcPts val="3440"/>
+              </a:lnSpc>
+              <a:buNone/>
+            </a:pPr>
+            <a:r>
+              <a:rPr lang="en-US" sz="4000" dirty="0">
+                <a:solidFill>
+                  <a:srgbClr val="11100D"/>
+                </a:solidFill>
+                <a:latin typeface="League Gothic" pitchFamily="34" charset="0"/>
+                <a:ea typeface="League Gothic" pitchFamily="34" charset="-122"/>
+                <a:cs typeface="League Gothic" pitchFamily="34" charset="-120"/>
+              </a:rPr>
+              <a:t>A CADEIRA EXISTIR.</a:t>
+            </a:r>
+            <a:endParaRPr lang="en-US" sz="4000" dirty="0"/>
           </a:p>
         </p:txBody>
       </p:sp>
@@ -3534,8 +3392,8 @@
         </p:nvSpPr>
         <p:spPr>
           <a:xfrm>
-            <a:off x="411480" y="1627632"/>
-            <a:ext cx="1554480" cy="512064"/>
+            <a:off x="411480" y="2304288"/>
+            <a:ext cx="1508760" cy="402336"/>
           </a:xfrm>
           <a:prstGeom prst="rect">
             <a:avLst/>
@@ -3554,8 +3412,8 @@
         </p:nvSpPr>
         <p:spPr>
           <a:xfrm>
-            <a:off x="411480" y="1627632"/>
-            <a:ext cx="1554480" cy="512064"/>
+            <a:off x="411480" y="2304288"/>
+            <a:ext cx="1508760" cy="402336"/>
           </a:xfrm>
           <a:prstGeom prst="rect">
             <a:avLst/>
@@ -3593,8 +3451,8 @@
         </p:nvSpPr>
         <p:spPr>
           <a:xfrm>
-            <a:off x="2148840" y="1655064"/>
-            <a:ext cx="6583680" cy="502920"/>
+            <a:off x="2148840" y="2322576"/>
+            <a:ext cx="6583680" cy="384048"/>
           </a:xfrm>
           <a:prstGeom prst="rect">
             <a:avLst/>
@@ -3610,7 +3468,7 @@
               <a:buNone/>
             </a:pPr>
             <a:r>
-              <a:rPr lang="en-US" sz="1250" dirty="0">
+              <a:rPr lang="en-US" sz="1400" dirty="0">
                 <a:solidFill>
                   <a:srgbClr val="3A362E"/>
                 </a:solidFill>
@@ -3618,9 +3476,9 @@
                 <a:ea typeface="IBM Plex Sans" pitchFamily="34" charset="-122"/>
                 <a:cs typeface="IBM Plex Sans" pitchFamily="34" charset="-120"/>
               </a:rPr>
-              <a:t>Cabe na sala sem parecer caminha — linguagem de móvel, presença discreta.</a:t>
-            </a:r>
-            <a:endParaRPr lang="en-US" sz="1250" dirty="0"/>
+              <a:t>Fica na sala sem parecer caminha.</a:t>
+            </a:r>
+            <a:endParaRPr lang="en-US" sz="1400" dirty="0"/>
           </a:p>
         </p:txBody>
       </p:sp>
@@ -3632,28 +3490,8 @@
         </p:nvSpPr>
         <p:spPr>
           <a:xfrm>
-            <a:off x="2148840" y="2139696"/>
-            <a:ext cx="6583680" cy="9144"/>
-          </a:xfrm>
-          <a:prstGeom prst="rect">
-            <a:avLst/>
-          </a:prstGeom>
-          <a:solidFill>
-            <a:srgbClr val="3A362E"/>
-          </a:solidFill>
-          <a:ln/>
-        </p:spPr>
-      </p:sp>
-      <p:sp>
-        <p:nvSpPr>
-          <p:cNvPr id="14" name="Shape 12"/>
-          <p:cNvSpPr/>
-          <p:nvPr/>
-        </p:nvSpPr>
-        <p:spPr>
-          <a:xfrm>
-            <a:off x="411480" y="2249424"/>
-            <a:ext cx="1554480" cy="512064"/>
+            <a:off x="411480" y="2798064"/>
+            <a:ext cx="1508760" cy="402336"/>
           </a:xfrm>
           <a:prstGeom prst="rect">
             <a:avLst/>
@@ -3666,14 +3504,14 @@
       </p:sp>
       <p:sp>
         <p:nvSpPr>
-          <p:cNvPr id="15" name="Text 13"/>
-          <p:cNvSpPr/>
-          <p:nvPr/>
-        </p:nvSpPr>
-        <p:spPr>
-          <a:xfrm>
-            <a:off x="411480" y="2249424"/>
-            <a:ext cx="1554480" cy="512064"/>
+          <p:cNvPr id="14" name="Text 12"/>
+          <p:cNvSpPr/>
+          <p:nvPr/>
+        </p:nvSpPr>
+        <p:spPr>
+          <a:xfrm>
+            <a:off x="411480" y="2798064"/>
+            <a:ext cx="1508760" cy="402336"/>
           </a:xfrm>
           <a:prstGeom prst="rect">
             <a:avLst/>
@@ -3705,14 +3543,14 @@
       </p:sp>
       <p:sp>
         <p:nvSpPr>
-          <p:cNvPr id="16" name="Text 14"/>
-          <p:cNvSpPr/>
-          <p:nvPr/>
-        </p:nvSpPr>
-        <p:spPr>
-          <a:xfrm>
-            <a:off x="2148840" y="2276856"/>
-            <a:ext cx="6583680" cy="502920"/>
+          <p:cNvPr id="15" name="Text 13"/>
+          <p:cNvSpPr/>
+          <p:nvPr/>
+        </p:nvSpPr>
+        <p:spPr>
+          <a:xfrm>
+            <a:off x="2148840" y="2816352"/>
+            <a:ext cx="6583680" cy="384048"/>
           </a:xfrm>
           <a:prstGeom prst="rect">
             <a:avLst/>
@@ -3728,7 +3566,7 @@
               <a:buNone/>
             </a:pPr>
             <a:r>
-              <a:rPr lang="en-US" sz="1250" dirty="0">
+              <a:rPr lang="en-US" sz="1400" dirty="0">
                 <a:solidFill>
                   <a:srgbClr val="3A362E"/>
                 </a:solidFill>
@@ -3736,42 +3574,22 @@
                 <a:ea typeface="IBM Plex Sans" pitchFamily="34" charset="-122"/>
                 <a:cs typeface="IBM Plex Sans" pitchFamily="34" charset="-120"/>
               </a:rPr>
-              <a:t>Altura baixa pra subir sozinho; plataforma firme e ventilada.</a:t>
-            </a:r>
-            <a:endParaRPr lang="en-US" sz="1250" dirty="0"/>
-          </a:p>
-        </p:txBody>
-      </p:sp>
-      <p:sp>
-        <p:nvSpPr>
-          <p:cNvPr id="17" name="Shape 15"/>
-          <p:cNvSpPr/>
-          <p:nvPr/>
-        </p:nvSpPr>
-        <p:spPr>
-          <a:xfrm>
-            <a:off x="2148840" y="2761488"/>
-            <a:ext cx="6583680" cy="9144"/>
-          </a:xfrm>
-          <a:prstGeom prst="rect">
-            <a:avLst/>
-          </a:prstGeom>
-          <a:solidFill>
-            <a:srgbClr val="3A362E"/>
-          </a:solidFill>
-          <a:ln/>
-        </p:spPr>
-      </p:sp>
-      <p:sp>
-        <p:nvSpPr>
-          <p:cNvPr id="18" name="Shape 16"/>
-          <p:cNvSpPr/>
-          <p:nvPr/>
-        </p:nvSpPr>
-        <p:spPr>
-          <a:xfrm>
-            <a:off x="411480" y="2871216"/>
-            <a:ext cx="1554480" cy="512064"/>
+              <a:t>Sobe sozinho; plataforma firme e ventilada.</a:t>
+            </a:r>
+            <a:endParaRPr lang="en-US" sz="1400" dirty="0"/>
+          </a:p>
+        </p:txBody>
+      </p:sp>
+      <p:sp>
+        <p:nvSpPr>
+          <p:cNvPr id="16" name="Shape 14"/>
+          <p:cNvSpPr/>
+          <p:nvPr/>
+        </p:nvSpPr>
+        <p:spPr>
+          <a:xfrm>
+            <a:off x="411480" y="3291840"/>
+            <a:ext cx="1508760" cy="402336"/>
           </a:xfrm>
           <a:prstGeom prst="rect">
             <a:avLst/>
@@ -3784,14 +3602,14 @@
       </p:sp>
       <p:sp>
         <p:nvSpPr>
-          <p:cNvPr id="19" name="Text 17"/>
-          <p:cNvSpPr/>
-          <p:nvPr/>
-        </p:nvSpPr>
-        <p:spPr>
-          <a:xfrm>
-            <a:off x="411480" y="2871216"/>
-            <a:ext cx="1554480" cy="512064"/>
+          <p:cNvPr id="17" name="Text 15"/>
+          <p:cNvSpPr/>
+          <p:nvPr/>
+        </p:nvSpPr>
+        <p:spPr>
+          <a:xfrm>
+            <a:off x="411480" y="3291840"/>
+            <a:ext cx="1508760" cy="402336"/>
           </a:xfrm>
           <a:prstGeom prst="rect">
             <a:avLst/>
@@ -3823,14 +3641,14 @@
       </p:sp>
       <p:sp>
         <p:nvSpPr>
-          <p:cNvPr id="20" name="Text 18"/>
-          <p:cNvSpPr/>
-          <p:nvPr/>
-        </p:nvSpPr>
-        <p:spPr>
-          <a:xfrm>
-            <a:off x="2148840" y="2898648"/>
-            <a:ext cx="6583680" cy="502920"/>
+          <p:cNvPr id="18" name="Text 16"/>
+          <p:cNvSpPr/>
+          <p:nvPr/>
+        </p:nvSpPr>
+        <p:spPr>
+          <a:xfrm>
+            <a:off x="2148840" y="3310128"/>
+            <a:ext cx="6583680" cy="384048"/>
           </a:xfrm>
           <a:prstGeom prst="rect">
             <a:avLst/>
@@ -3846,7 +3664,7 @@
               <a:buNone/>
             </a:pPr>
             <a:r>
-              <a:rPr lang="en-US" sz="1250" dirty="0">
+              <a:rPr lang="en-US" sz="1400" dirty="0">
                 <a:solidFill>
                   <a:srgbClr val="3A362E"/>
                 </a:solidFill>
@@ -3854,42 +3672,22 @@
                 <a:ea typeface="IBM Plex Sans" pitchFamily="34" charset="-122"/>
                 <a:cs typeface="IBM Plex Sans" pitchFamily="34" charset="-120"/>
               </a:rPr>
-              <a:t>Cortes retos e encaixes simples — marcenaria de baixa complexidade reproduz.</a:t>
-            </a:r>
-            <a:endParaRPr lang="en-US" sz="1250" dirty="0"/>
-          </a:p>
-        </p:txBody>
-      </p:sp>
-      <p:sp>
-        <p:nvSpPr>
-          <p:cNvPr id="21" name="Shape 19"/>
-          <p:cNvSpPr/>
-          <p:nvPr/>
-        </p:nvSpPr>
-        <p:spPr>
-          <a:xfrm>
-            <a:off x="2148840" y="3383280"/>
-            <a:ext cx="6583680" cy="9144"/>
-          </a:xfrm>
-          <a:prstGeom prst="rect">
-            <a:avLst/>
-          </a:prstGeom>
-          <a:solidFill>
-            <a:srgbClr val="3A362E"/>
-          </a:solidFill>
-          <a:ln/>
-        </p:spPr>
-      </p:sp>
-      <p:sp>
-        <p:nvSpPr>
-          <p:cNvPr id="22" name="Shape 20"/>
-          <p:cNvSpPr/>
-          <p:nvPr/>
-        </p:nvSpPr>
-        <p:spPr>
-          <a:xfrm>
-            <a:off x="411480" y="3493008"/>
-            <a:ext cx="1554480" cy="512064"/>
+              <a:t>Cortes retos — qualquer marcenaria reproduz.</a:t>
+            </a:r>
+            <a:endParaRPr lang="en-US" sz="1400" dirty="0"/>
+          </a:p>
+        </p:txBody>
+      </p:sp>
+      <p:sp>
+        <p:nvSpPr>
+          <p:cNvPr id="19" name="Shape 17"/>
+          <p:cNvSpPr/>
+          <p:nvPr/>
+        </p:nvSpPr>
+        <p:spPr>
+          <a:xfrm>
+            <a:off x="411480" y="3785616"/>
+            <a:ext cx="1508760" cy="402336"/>
           </a:xfrm>
           <a:prstGeom prst="rect">
             <a:avLst/>
@@ -3902,14 +3700,14 @@
       </p:sp>
       <p:sp>
         <p:nvSpPr>
-          <p:cNvPr id="23" name="Text 21"/>
-          <p:cNvSpPr/>
-          <p:nvPr/>
-        </p:nvSpPr>
-        <p:spPr>
-          <a:xfrm>
-            <a:off x="411480" y="3493008"/>
-            <a:ext cx="1554480" cy="512064"/>
+          <p:cNvPr id="20" name="Text 18"/>
+          <p:cNvSpPr/>
+          <p:nvPr/>
+        </p:nvSpPr>
+        <p:spPr>
+          <a:xfrm>
+            <a:off x="411480" y="3785616"/>
+            <a:ext cx="1508760" cy="402336"/>
           </a:xfrm>
           <a:prstGeom prst="rect">
             <a:avLst/>
@@ -3941,14 +3739,14 @@
       </p:sp>
       <p:sp>
         <p:nvSpPr>
-          <p:cNvPr id="24" name="Text 22"/>
-          <p:cNvSpPr/>
-          <p:nvPr/>
-        </p:nvSpPr>
-        <p:spPr>
-          <a:xfrm>
-            <a:off x="2148840" y="3520440"/>
-            <a:ext cx="6583680" cy="502920"/>
+          <p:cNvPr id="21" name="Text 19"/>
+          <p:cNvSpPr/>
+          <p:nvPr/>
+        </p:nvSpPr>
+        <p:spPr>
+          <a:xfrm>
+            <a:off x="2148840" y="3803904"/>
+            <a:ext cx="6583680" cy="384048"/>
           </a:xfrm>
           <a:prstGeom prst="rect">
             <a:avLst/>
@@ -3964,7 +3762,7 @@
               <a:buNone/>
             </a:pPr>
             <a:r>
-              <a:rPr lang="en-US" sz="1250" dirty="0">
+              <a:rPr lang="en-US" sz="1400" dirty="0">
                 <a:solidFill>
                   <a:srgbClr val="3A362E"/>
                 </a:solidFill>
@@ -3972,42 +3770,22 @@
                 <a:ea typeface="IBM Plex Sans" pitchFamily="34" charset="-122"/>
                 <a:cs typeface="IBM Plex Sans" pitchFamily="34" charset="-120"/>
               </a:rPr>
-              <a:t>Aproveita sobras rígidas que virariam descarte volumoso urbano.</a:t>
-            </a:r>
-            <a:endParaRPr lang="en-US" sz="1250" dirty="0"/>
-          </a:p>
-        </p:txBody>
-      </p:sp>
-      <p:sp>
-        <p:nvSpPr>
-          <p:cNvPr id="25" name="Shape 23"/>
-          <p:cNvSpPr/>
-          <p:nvPr/>
-        </p:nvSpPr>
-        <p:spPr>
-          <a:xfrm>
-            <a:off x="2148840" y="4005072"/>
-            <a:ext cx="6583680" cy="9144"/>
-          </a:xfrm>
-          <a:prstGeom prst="rect">
-            <a:avLst/>
-          </a:prstGeom>
-          <a:solidFill>
-            <a:srgbClr val="3A362E"/>
-          </a:solidFill>
-          <a:ln/>
-        </p:spPr>
-      </p:sp>
-      <p:sp>
-        <p:nvSpPr>
-          <p:cNvPr id="26" name="Shape 24"/>
-          <p:cNvSpPr/>
-          <p:nvPr/>
-        </p:nvSpPr>
-        <p:spPr>
-          <a:xfrm>
-            <a:off x="411480" y="4114800"/>
-            <a:ext cx="1554480" cy="512064"/>
+              <a:t>Aproveita descarte volumoso urbano.</a:t>
+            </a:r>
+            <a:endParaRPr lang="en-US" sz="1400" dirty="0"/>
+          </a:p>
+        </p:txBody>
+      </p:sp>
+      <p:sp>
+        <p:nvSpPr>
+          <p:cNvPr id="22" name="Shape 20"/>
+          <p:cNvSpPr/>
+          <p:nvPr/>
+        </p:nvSpPr>
+        <p:spPr>
+          <a:xfrm>
+            <a:off x="411480" y="4279392"/>
+            <a:ext cx="1508760" cy="402336"/>
           </a:xfrm>
           <a:prstGeom prst="rect">
             <a:avLst/>
@@ -4020,14 +3798,14 @@
       </p:sp>
       <p:sp>
         <p:nvSpPr>
-          <p:cNvPr id="27" name="Text 25"/>
-          <p:cNvSpPr/>
-          <p:nvPr/>
-        </p:nvSpPr>
-        <p:spPr>
-          <a:xfrm>
-            <a:off x="411480" y="4114800"/>
-            <a:ext cx="1554480" cy="512064"/>
+          <p:cNvPr id="23" name="Text 21"/>
+          <p:cNvSpPr/>
+          <p:nvPr/>
+        </p:nvSpPr>
+        <p:spPr>
+          <a:xfrm>
+            <a:off x="411480" y="4279392"/>
+            <a:ext cx="1508760" cy="402336"/>
           </a:xfrm>
           <a:prstGeom prst="rect">
             <a:avLst/>
@@ -4059,14 +3837,14 @@
       </p:sp>
       <p:sp>
         <p:nvSpPr>
-          <p:cNvPr id="28" name="Text 26"/>
-          <p:cNvSpPr/>
-          <p:nvPr/>
-        </p:nvSpPr>
-        <p:spPr>
-          <a:xfrm>
-            <a:off x="2148840" y="4142232"/>
-            <a:ext cx="6583680" cy="502920"/>
+          <p:cNvPr id="24" name="Text 22"/>
+          <p:cNvSpPr/>
+          <p:nvPr/>
+        </p:nvSpPr>
+        <p:spPr>
+          <a:xfrm>
+            <a:off x="2148840" y="4297680"/>
+            <a:ext cx="6583680" cy="384048"/>
           </a:xfrm>
           <a:prstGeom prst="rect">
             <a:avLst/>
@@ -4082,7 +3860,7 @@
               <a:buNone/>
             </a:pPr>
             <a:r>
-              <a:rPr lang="en-US" sz="1250" dirty="0">
+              <a:rPr lang="en-US" sz="1400" dirty="0">
                 <a:solidFill>
                   <a:srgbClr val="3A362E"/>
                 </a:solidFill>
@@ -4090,42 +3868,22 @@
                 <a:ea typeface="IBM Plex Sans" pitchFamily="34" charset="-122"/>
                 <a:cs typeface="IBM Plex Sans" pitchFamily="34" charset="-120"/>
               </a:rPr>
-              <a:t>A peça dura; a reposição circula — perna vendida como componente.</a:t>
-            </a:r>
-            <a:endParaRPr lang="en-US" sz="1250" dirty="0"/>
-          </a:p>
-        </p:txBody>
-      </p:sp>
-      <p:sp>
-        <p:nvSpPr>
-          <p:cNvPr id="29" name="Shape 27"/>
-          <p:cNvSpPr/>
-          <p:nvPr/>
-        </p:nvSpPr>
-        <p:spPr>
-          <a:xfrm>
-            <a:off x="2148840" y="4626864"/>
-            <a:ext cx="6583680" cy="9144"/>
-          </a:xfrm>
-          <a:prstGeom prst="rect">
-            <a:avLst/>
-          </a:prstGeom>
-          <a:solidFill>
-            <a:srgbClr val="3A362E"/>
-          </a:solidFill>
-          <a:ln/>
-        </p:spPr>
-      </p:sp>
-      <p:sp>
-        <p:nvSpPr>
-          <p:cNvPr id="30" name="Text 28"/>
-          <p:cNvSpPr/>
-          <p:nvPr/>
-        </p:nvSpPr>
-        <p:spPr>
-          <a:xfrm>
-            <a:off x="411480" y="4809744"/>
-            <a:ext cx="8321040" cy="274320"/>
+              <a:t>A peça dura; a reposição circula.</a:t>
+            </a:r>
+            <a:endParaRPr lang="en-US" sz="1400" dirty="0"/>
+          </a:p>
+        </p:txBody>
+      </p:sp>
+      <p:sp>
+        <p:nvSpPr>
+          <p:cNvPr id="25" name="Text 23"/>
+          <p:cNvSpPr/>
+          <p:nvPr/>
+        </p:nvSpPr>
+        <p:spPr>
+          <a:xfrm>
+            <a:off x="411480" y="4828032"/>
+            <a:ext cx="8321040" cy="256032"/>
           </a:xfrm>
           <a:prstGeom prst="rect">
             <a:avLst/>
@@ -4141,7 +3899,7 @@
               <a:buNone/>
             </a:pPr>
             <a:r>
-              <a:rPr lang="en-US" sz="850" spc="200" kern="0" dirty="0">
+              <a:rPr lang="en-US" sz="800" spc="200" kern="0" dirty="0">
                 <a:solidFill>
                   <a:srgbClr val="8A7B60"/>
                 </a:solidFill>
@@ -4151,7 +3909,7 @@
               </a:rPr>
               <a:t>Luiza Britto · Design Thinking e Prototipagem · Insper · 02 jul 2026</a:t>
             </a:r>
-            <a:endParaRPr lang="en-US" sz="850" dirty="0"/>
+            <a:endParaRPr lang="en-US" sz="800" dirty="0"/>
           </a:p>
         </p:txBody>
       </p:sp>
@@ -4513,7 +4271,7 @@
         </p:nvSpPr>
         <p:spPr>
           <a:xfrm>
-            <a:off x="365760" y="1600200"/>
+            <a:off x="365760" y="1645920"/>
             <a:ext cx="8412480" cy="1463040"/>
           </a:xfrm>
           <a:prstGeom prst="rect">
@@ -4526,7 +4284,7 @@
           <a:bodyPr wrap="square" rtlCol="0" anchor="ctr"/>
           <a:lstStyle/>
           <a:p>
-            <a:pPr algn="l" indent="0" marL="0">
+            <a:pPr indent="0" marL="0">
               <a:buNone/>
             </a:pPr>
             <a:r>
@@ -4540,7 +4298,7 @@
               </a:rPr>
               <a:t>CADEIRA </a:t>
             </a:r>
-            <a:pPr algn="l" indent="0" marL="0">
+            <a:pPr indent="0" marL="0">
               <a:buNone/>
             </a:pPr>
             <a:r>
@@ -4566,7 +4324,7 @@
         </p:nvSpPr>
         <p:spPr>
           <a:xfrm>
-            <a:off x="429768" y="3127248"/>
+            <a:off x="429768" y="3200400"/>
             <a:ext cx="5486400" cy="384048"/>
           </a:xfrm>
           <a:prstGeom prst="rect">
@@ -4605,7 +4363,7 @@
         </p:nvSpPr>
         <p:spPr>
           <a:xfrm>
-            <a:off x="429768" y="3703320"/>
+            <a:off x="429768" y="3767328"/>
             <a:ext cx="3657600" cy="274320"/>
           </a:xfrm>
           <a:prstGeom prst="rect">
@@ -4636,48 +4394,9 @@
           </a:p>
         </p:txBody>
       </p:sp>
-      <p:sp>
-        <p:nvSpPr>
-          <p:cNvPr id="20" name="Text 18"/>
-          <p:cNvSpPr/>
-          <p:nvPr/>
-        </p:nvSpPr>
-        <p:spPr>
-          <a:xfrm>
-            <a:off x="429768" y="4023360"/>
-            <a:ext cx="5486400" cy="274320"/>
-          </a:xfrm>
-          <a:prstGeom prst="rect">
-            <a:avLst/>
-          </a:prstGeom>
-          <a:noFill/>
-          <a:ln/>
-        </p:spPr>
-        <p:txBody>
-          <a:bodyPr wrap="square" rtlCol="0" anchor="ctr"/>
-          <a:lstStyle/>
-          <a:p>
-            <a:pPr indent="0" marL="0">
-              <a:buNone/>
-            </a:pPr>
-            <a:r>
-              <a:rPr lang="en-US" sz="950" spc="100" kern="0" dirty="0">
-                <a:solidFill>
-                  <a:srgbClr val="BFB49E"/>
-                </a:solidFill>
-                <a:latin typeface="IBM Plex Mono" pitchFamily="34" charset="0"/>
-                <a:ea typeface="IBM Plex Mono" pitchFamily="34" charset="-122"/>
-                <a:cs typeface="IBM Plex Mono" pitchFamily="34" charset="-120"/>
-              </a:rPr>
-              <a:t>Documentação digital entregue em HTML + PDF · luizambritto@gmail.com</a:t>
-            </a:r>
-            <a:endParaRPr lang="en-US" sz="950" dirty="0"/>
-          </a:p>
-        </p:txBody>
-      </p:sp>
       <p:pic>
         <p:nvPicPr>
-          <p:cNvPr id="21" name="Image 0" descr="site/assets/dog-face.jpg">    </p:cNvPr>
+          <p:cNvPr id="20" name="Image 0" descr="site/assets/dog-face.jpg">    </p:cNvPr>
           <p:cNvPicPr>
             <a:picLocks noChangeAspect="1"/>
           </p:cNvPicPr>
@@ -4700,7 +4419,7 @@
       </p:pic>
       <p:sp>
         <p:nvSpPr>
-          <p:cNvPr id="22" name="Text 19"/>
+          <p:cNvPr id="21" name="Text 18"/>
           <p:cNvSpPr/>
           <p:nvPr/>
         </p:nvSpPr>
@@ -4739,14 +4458,14 @@
       </p:sp>
       <p:sp>
         <p:nvSpPr>
-          <p:cNvPr id="23" name="Text 20"/>
-          <p:cNvSpPr/>
-          <p:nvPr/>
-        </p:nvSpPr>
-        <p:spPr>
-          <a:xfrm>
-            <a:off x="411480" y="4809744"/>
-            <a:ext cx="8321040" cy="274320"/>
+          <p:cNvPr id="22" name="Text 19"/>
+          <p:cNvSpPr/>
+          <p:nvPr/>
+        </p:nvSpPr>
+        <p:spPr>
+          <a:xfrm>
+            <a:off x="411480" y="4828032"/>
+            <a:ext cx="8321040" cy="256032"/>
           </a:xfrm>
           <a:prstGeom prst="rect">
             <a:avLst/>
@@ -4762,7 +4481,7 @@
               <a:buNone/>
             </a:pPr>
             <a:r>
-              <a:rPr lang="en-US" sz="850" spc="200" kern="0" dirty="0">
+              <a:rPr lang="en-US" sz="800" spc="200" kern="0" dirty="0">
                 <a:solidFill>
                   <a:srgbClr val="BFB49E"/>
                 </a:solidFill>
@@ -4772,7 +4491,7 @@
               </a:rPr>
               <a:t>Luiza Britto · Design Thinking e Prototipagem · Insper · 02 jul 2026</a:t>
             </a:r>
-            <a:endParaRPr lang="en-US" sz="850" dirty="0"/>
+            <a:endParaRPr lang="en-US" sz="800" dirty="0"/>
           </a:p>
         </p:txBody>
       </p:sp>
@@ -4936,8 +4655,8 @@
         </p:nvSpPr>
         <p:spPr>
           <a:xfrm>
-            <a:off x="411480" y="310896"/>
-            <a:ext cx="7315200" cy="274320"/>
+            <a:off x="411480" y="329184"/>
+            <a:ext cx="8229600" cy="274320"/>
           </a:xfrm>
           <a:prstGeom prst="rect">
             <a:avLst/>
@@ -4949,7 +4668,7 @@
           <a:bodyPr wrap="square" rtlCol="0" anchor="ctr"/>
           <a:lstStyle/>
           <a:p>
-            <a:pPr algn="l" indent="0" marL="0">
+            <a:pPr indent="0" marL="0">
               <a:buNone/>
             </a:pPr>
             <a:r>
@@ -4961,7 +4680,7 @@
                 <a:ea typeface="IBM Plex Mono" pitchFamily="34" charset="-122"/>
                 <a:cs typeface="IBM Plex Mono" pitchFamily="34" charset="-120"/>
               </a:rPr>
-              <a:t>APÊNDICE — O QUE AINDA FALTA (HONESTO)</a:t>
+              <a:t>APÊNDICE · PRÓXIMO PROTÓTIPO</a:t>
             </a:r>
             <a:endParaRPr lang="en-US" sz="1050" dirty="0"/>
           </a:p>
@@ -4975,8 +4694,8 @@
         </p:nvSpPr>
         <p:spPr>
           <a:xfrm>
-            <a:off x="384048" y="603504"/>
-            <a:ext cx="6400800" cy="658368"/>
+            <a:off x="384048" y="658368"/>
+            <a:ext cx="6400800" cy="795130"/>
           </a:xfrm>
           <a:prstGeom prst="rect">
             <a:avLst/>
@@ -4988,14 +4707,14 @@
           <a:bodyPr wrap="square" rtlCol="0" anchor="t"/>
           <a:lstStyle/>
           <a:p>
-            <a:pPr algn="l" indent="0" marL="0">
+            <a:pPr indent="0" marL="0">
               <a:lnSpc>
-                <a:spcPts val="3096"/>
+                <a:spcPts val="3440"/>
               </a:lnSpc>
               <a:buNone/>
             </a:pPr>
             <a:r>
-              <a:rPr lang="en-US" sz="3600" dirty="0">
+              <a:rPr lang="en-US" sz="4000" dirty="0">
                 <a:solidFill>
                   <a:srgbClr val="11100D"/>
                 </a:solidFill>
@@ -5003,9 +4722,9 @@
                 <a:ea typeface="League Gothic" pitchFamily="34" charset="-122"/>
                 <a:cs typeface="League Gothic" pitchFamily="34" charset="-120"/>
               </a:rPr>
-              <a:t>PRÓXIMO PROTÓTIPO.</a:t>
-            </a:r>
-            <a:endParaRPr lang="en-US" sz="3600" dirty="0"/>
+              <a:t>O QUE AINDA FALTA.</a:t>
+            </a:r>
+            <a:endParaRPr lang="en-US" sz="4000" dirty="0"/>
           </a:p>
         </p:txBody>
       </p:sp>
@@ -5017,7 +4736,7 @@
         </p:nvSpPr>
         <p:spPr>
           <a:xfrm>
-            <a:off x="411480" y="1645920"/>
+            <a:off x="411480" y="2148840"/>
             <a:ext cx="6035040" cy="365760"/>
           </a:xfrm>
           <a:prstGeom prst="rect">
@@ -5034,7 +4753,7 @@
               <a:buNone/>
             </a:pPr>
             <a:r>
-              <a:rPr lang="en-US" sz="1450" dirty="0">
+              <a:rPr lang="en-US" sz="1500" dirty="0">
                 <a:solidFill>
                   <a:srgbClr val="11100D"/>
                 </a:solidFill>
@@ -5044,7 +4763,7 @@
               </a:rPr>
               <a:t>Capa de tecido removível e lavável</a:t>
             </a:r>
-            <a:endParaRPr lang="en-US" sz="1450" dirty="0"/>
+            <a:endParaRPr lang="en-US" sz="1500" dirty="0"/>
           </a:p>
         </p:txBody>
       </p:sp>
@@ -5056,7 +4775,7 @@
         </p:nvSpPr>
         <p:spPr>
           <a:xfrm>
-            <a:off x="6675120" y="1682496"/>
+            <a:off x="6675120" y="2194560"/>
             <a:ext cx="1371600" cy="237744"/>
           </a:xfrm>
           <a:prstGeom prst="rect">
@@ -5099,7 +4818,7 @@
         </p:nvSpPr>
         <p:spPr>
           <a:xfrm>
-            <a:off x="411480" y="2029968"/>
+            <a:off x="411480" y="2532888"/>
             <a:ext cx="7635240" cy="9144"/>
           </a:xfrm>
           <a:prstGeom prst="rect">
@@ -5119,7 +4838,7 @@
         </p:nvSpPr>
         <p:spPr>
           <a:xfrm>
-            <a:off x="411480" y="2121408"/>
+            <a:off x="411480" y="2606040"/>
             <a:ext cx="6035040" cy="365760"/>
           </a:xfrm>
           <a:prstGeom prst="rect">
@@ -5136,7 +4855,7 @@
               <a:buNone/>
             </a:pPr>
             <a:r>
-              <a:rPr lang="en-US" sz="1450" dirty="0">
+              <a:rPr lang="en-US" sz="1500" dirty="0">
                 <a:solidFill>
                   <a:srgbClr val="11100D"/>
                 </a:solidFill>
@@ -5146,7 +4865,7 @@
               </a:rPr>
               <a:t>Padronizar medidas P e M a partir do lote</a:t>
             </a:r>
-            <a:endParaRPr lang="en-US" sz="1450" dirty="0"/>
+            <a:endParaRPr lang="en-US" sz="1500" dirty="0"/>
           </a:p>
         </p:txBody>
       </p:sp>
@@ -5158,7 +4877,7 @@
         </p:nvSpPr>
         <p:spPr>
           <a:xfrm>
-            <a:off x="6675120" y="2157984"/>
+            <a:off x="6675120" y="2651760"/>
             <a:ext cx="1371600" cy="237744"/>
           </a:xfrm>
           <a:prstGeom prst="rect">
@@ -5201,7 +4920,7 @@
         </p:nvSpPr>
         <p:spPr>
           <a:xfrm>
-            <a:off x="411480" y="2505456"/>
+            <a:off x="411480" y="2990088"/>
             <a:ext cx="7635240" cy="9144"/>
           </a:xfrm>
           <a:prstGeom prst="rect">
@@ -5221,7 +4940,7 @@
         </p:nvSpPr>
         <p:spPr>
           <a:xfrm>
-            <a:off x="411480" y="2596896"/>
+            <a:off x="411480" y="3063240"/>
             <a:ext cx="6035040" cy="365760"/>
           </a:xfrm>
           <a:prstGeom prst="rect">
@@ -5238,7 +4957,7 @@
               <a:buNone/>
             </a:pPr>
             <a:r>
-              <a:rPr lang="en-US" sz="1450" dirty="0">
+              <a:rPr lang="en-US" sz="1500" dirty="0">
                 <a:solidFill>
                   <a:srgbClr val="11100D"/>
                 </a:solidFill>
@@ -5248,7 +4967,7 @@
               </a:rPr>
               <a:t>Protocolo de sanitização da madeira</a:t>
             </a:r>
-            <a:endParaRPr lang="en-US" sz="1450" dirty="0"/>
+            <a:endParaRPr lang="en-US" sz="1500" dirty="0"/>
           </a:p>
         </p:txBody>
       </p:sp>
@@ -5260,7 +4979,7 @@
         </p:nvSpPr>
         <p:spPr>
           <a:xfrm>
-            <a:off x="6675120" y="2633472"/>
+            <a:off x="6675120" y="3108960"/>
             <a:ext cx="1371600" cy="237744"/>
           </a:xfrm>
           <a:prstGeom prst="rect">
@@ -5303,7 +5022,7 @@
         </p:nvSpPr>
         <p:spPr>
           <a:xfrm>
-            <a:off x="411480" y="2980944"/>
+            <a:off x="411480" y="3447288"/>
             <a:ext cx="7635240" cy="9144"/>
           </a:xfrm>
           <a:prstGeom prst="rect">
@@ -5323,7 +5042,7 @@
         </p:nvSpPr>
         <p:spPr>
           <a:xfrm>
-            <a:off x="411480" y="3072384"/>
+            <a:off x="411480" y="3520440"/>
             <a:ext cx="6035040" cy="365760"/>
           </a:xfrm>
           <a:prstGeom prst="rect">
@@ -5340,7 +5059,7 @@
               <a:buNone/>
             </a:pPr>
             <a:r>
-              <a:rPr lang="en-US" sz="1450" dirty="0">
+              <a:rPr lang="en-US" sz="1500" dirty="0">
                 <a:solidFill>
                   <a:srgbClr val="11100D"/>
                 </a:solidFill>
@@ -5348,9 +5067,9 @@
                 <a:ea typeface="Instrument Serif" pitchFamily="34" charset="-122"/>
                 <a:cs typeface="Instrument Serif" pitchFamily="34" charset="-120"/>
               </a:rPr>
-              <a:t>Testes com mais cães, casas e semanas de uso</a:t>
-            </a:r>
-            <a:endParaRPr lang="en-US" sz="1450" dirty="0"/>
+              <a:t>Testes com mais cães, casas e semanas</a:t>
+            </a:r>
+            <a:endParaRPr lang="en-US" sz="1500" dirty="0"/>
           </a:p>
         </p:txBody>
       </p:sp>
@@ -5362,7 +5081,7 @@
         </p:nvSpPr>
         <p:spPr>
           <a:xfrm>
-            <a:off x="6675120" y="3108960"/>
+            <a:off x="6675120" y="3566160"/>
             <a:ext cx="1371600" cy="237744"/>
           </a:xfrm>
           <a:prstGeom prst="rect">
@@ -5405,7 +5124,7 @@
         </p:nvSpPr>
         <p:spPr>
           <a:xfrm>
-            <a:off x="411480" y="3456432"/>
+            <a:off x="411480" y="3904488"/>
             <a:ext cx="7635240" cy="9144"/>
           </a:xfrm>
           <a:prstGeom prst="rect">
@@ -5425,7 +5144,7 @@
         </p:nvSpPr>
         <p:spPr>
           <a:xfrm>
-            <a:off x="411480" y="3547872"/>
+            <a:off x="411480" y="3977640"/>
             <a:ext cx="6035040" cy="365760"/>
           </a:xfrm>
           <a:prstGeom prst="rect">
@@ -5442,7 +5161,7 @@
               <a:buNone/>
             </a:pPr>
             <a:r>
-              <a:rPr lang="en-US" sz="1450" dirty="0">
+              <a:rPr lang="en-US" sz="1500" dirty="0">
                 <a:solidFill>
                   <a:srgbClr val="11100D"/>
                 </a:solidFill>
@@ -5452,7 +5171,7 @@
               </a:rPr>
               <a:t>Rota de retorno da madeira (take-back)</a:t>
             </a:r>
-            <a:endParaRPr lang="en-US" sz="1450" dirty="0"/>
+            <a:endParaRPr lang="en-US" sz="1500" dirty="0"/>
           </a:p>
         </p:txBody>
       </p:sp>
@@ -5464,7 +5183,7 @@
         </p:nvSpPr>
         <p:spPr>
           <a:xfrm>
-            <a:off x="6675120" y="3584448"/>
+            <a:off x="6675120" y="4023360"/>
             <a:ext cx="1371600" cy="237744"/>
           </a:xfrm>
           <a:prstGeom prst="rect">
@@ -5507,7 +5226,7 @@
         </p:nvSpPr>
         <p:spPr>
           <a:xfrm>
-            <a:off x="411480" y="3931920"/>
+            <a:off x="411480" y="4361688"/>
             <a:ext cx="7635240" cy="9144"/>
           </a:xfrm>
           <a:prstGeom prst="rect">
@@ -5527,8 +5246,8 @@
         </p:nvSpPr>
         <p:spPr>
           <a:xfrm>
-            <a:off x="411480" y="4160520"/>
-            <a:ext cx="8229600" cy="457200"/>
+            <a:off x="411480" y="4526280"/>
+            <a:ext cx="8229600" cy="320040"/>
           </a:xfrm>
           <a:prstGeom prst="rect">
             <a:avLst/>
@@ -5544,46 +5263,7 @@
               <a:buNone/>
             </a:pPr>
             <a:r>
-              <a:rPr lang="en-US" sz="1150" dirty="0">
-                <a:solidFill>
-                  <a:srgbClr val="3A362E"/>
-                </a:solidFill>
-                <a:latin typeface="IBM Plex Sans" pitchFamily="34" charset="0"/>
-                <a:ea typeface="IBM Plex Sans" pitchFamily="34" charset="-122"/>
-                <a:cs typeface="IBM Plex Sans" pitchFamily="34" charset="-120"/>
-              </a:rPr>
-              <a:t>Próxima leva sob encomenda: cada peça muda conforme a madeira disponível. Reposição: perna de bambu avulsa.</a:t>
-            </a:r>
-            <a:endParaRPr lang="en-US" sz="1150" dirty="0"/>
-          </a:p>
-        </p:txBody>
-      </p:sp>
-      <p:sp>
-        <p:nvSpPr>
-          <p:cNvPr id="26" name="Text 24"/>
-          <p:cNvSpPr/>
-          <p:nvPr/>
-        </p:nvSpPr>
-        <p:spPr>
-          <a:xfrm>
-            <a:off x="411480" y="4809744"/>
-            <a:ext cx="8321040" cy="274320"/>
-          </a:xfrm>
-          <a:prstGeom prst="rect">
-            <a:avLst/>
-          </a:prstGeom>
-          <a:noFill/>
-          <a:ln/>
-        </p:spPr>
-        <p:txBody>
-          <a:bodyPr wrap="square" rtlCol="0" anchor="ctr"/>
-          <a:lstStyle/>
-          <a:p>
-            <a:pPr indent="0" marL="0">
-              <a:buNone/>
-            </a:pPr>
-            <a:r>
-              <a:rPr lang="en-US" sz="850" spc="200" kern="0" dirty="0">
+              <a:rPr lang="en-US" sz="950" spc="100" kern="0" dirty="0">
                 <a:solidFill>
                   <a:srgbClr val="8A7B60"/>
                 </a:solidFill>
@@ -5591,9 +5271,9 @@
                 <a:ea typeface="IBM Plex Mono" pitchFamily="34" charset="-122"/>
                 <a:cs typeface="IBM Plex Mono" pitchFamily="34" charset="-120"/>
               </a:rPr>
-              <a:t>Luiza Britto · Design Thinking e Prototipagem · Insper · 02 jul 2026</a:t>
-            </a:r>
-            <a:endParaRPr lang="en-US" sz="850" dirty="0"/>
+              <a:t>Próxima leva sob encomenda · reposição: perna avulsa · luizambritto@gmail.com</a:t>
+            </a:r>
+            <a:endParaRPr lang="en-US" sz="950" dirty="0"/>
           </a:p>
         </p:txBody>
       </p:sp>
@@ -5757,8 +5437,8 @@
         </p:nvSpPr>
         <p:spPr>
           <a:xfrm>
-            <a:off x="411480" y="310896"/>
-            <a:ext cx="7315200" cy="274320"/>
+            <a:off x="411480" y="329184"/>
+            <a:ext cx="8229600" cy="274320"/>
           </a:xfrm>
           <a:prstGeom prst="rect">
             <a:avLst/>
@@ -5770,7 +5450,7 @@
           <a:bodyPr wrap="square" rtlCol="0" anchor="ctr"/>
           <a:lstStyle/>
           <a:p>
-            <a:pPr algn="l" indent="0" marL="0">
+            <a:pPr indent="0" marL="0">
               <a:buNone/>
             </a:pPr>
             <a:r>
@@ -5782,7 +5462,7 @@
                 <a:ea typeface="IBM Plex Mono" pitchFamily="34" charset="-122"/>
                 <a:cs typeface="IBM Plex Mono" pitchFamily="34" charset="-120"/>
               </a:rPr>
-              <a:t>1 · VIABILIDADE SISTÊMICA — O PROBLEMA</a:t>
+              <a:t>O PROBLEMA SISTÊMICO</a:t>
             </a:r>
             <a:endParaRPr lang="en-US" sz="1050" dirty="0"/>
           </a:p>
@@ -5796,8 +5476,8 @@
         </p:nvSpPr>
         <p:spPr>
           <a:xfrm>
-            <a:off x="384048" y="603504"/>
-            <a:ext cx="8412480" cy="731520"/>
+            <a:off x="384048" y="658368"/>
+            <a:ext cx="8412480" cy="874643"/>
           </a:xfrm>
           <a:prstGeom prst="rect">
             <a:avLst/>
@@ -5809,14 +5489,14 @@
           <a:bodyPr wrap="square" rtlCol="0" anchor="t"/>
           <a:lstStyle/>
           <a:p>
-            <a:pPr algn="l" indent="0" marL="0">
+            <a:pPr indent="0" marL="0">
               <a:lnSpc>
-                <a:spcPts val="3440"/>
+                <a:spcPts val="3784"/>
               </a:lnSpc>
               <a:buNone/>
             </a:pPr>
             <a:r>
-              <a:rPr lang="en-US" sz="4000" dirty="0">
+              <a:rPr lang="en-US" sz="4400" dirty="0">
                 <a:solidFill>
                   <a:srgbClr val="11100D"/>
                 </a:solidFill>
@@ -5826,17 +5506,17 @@
               </a:rPr>
               <a:t>O PET FICOU DEFINITIVO.</a:t>
             </a:r>
-            <a:endParaRPr lang="en-US" sz="4000" dirty="0"/>
-          </a:p>
-          <a:p>
-            <a:pPr algn="l" indent="0" marL="0">
+            <a:endParaRPr lang="en-US" sz="4400" dirty="0"/>
+          </a:p>
+          <a:p>
+            <a:pPr indent="0" marL="0">
               <a:lnSpc>
-                <a:spcPts val="3440"/>
+                <a:spcPts val="3784"/>
               </a:lnSpc>
               <a:buNone/>
             </a:pPr>
             <a:r>
-              <a:rPr lang="en-US" sz="4000" dirty="0">
+              <a:rPr lang="en-US" sz="4400" dirty="0">
                 <a:solidFill>
                   <a:srgbClr val="11100D"/>
                 </a:solidFill>
@@ -5846,7 +5526,7 @@
               </a:rPr>
               <a:t>O PRODUTO PET, NÃO.</a:t>
             </a:r>
-            <a:endParaRPr lang="en-US" sz="4000" dirty="0"/>
+            <a:endParaRPr lang="en-US" sz="4400" dirty="0"/>
           </a:p>
         </p:txBody>
       </p:sp>
@@ -5858,8 +5538,8 @@
         </p:nvSpPr>
         <p:spPr>
           <a:xfrm>
-            <a:off x="411480" y="1956816"/>
-            <a:ext cx="3931920" cy="274320"/>
+            <a:off x="429768" y="2286000"/>
+            <a:ext cx="1828800" cy="237744"/>
           </a:xfrm>
           <a:prstGeom prst="rect">
             <a:avLst/>
@@ -5883,7 +5563,7 @@
                 <a:ea typeface="IBM Plex Mono" pitchFamily="34" charset="-122"/>
                 <a:cs typeface="IBM Plex Mono" pitchFamily="34" charset="-120"/>
               </a:rPr>
-              <a:t>PELA ÓTICA DO CLIENTE</a:t>
+              <a:t>CLIENTE</a:t>
             </a:r>
             <a:endParaRPr lang="en-US" sz="1000" dirty="0"/>
           </a:p>
@@ -5897,28 +5577,27 @@
         </p:nvSpPr>
         <p:spPr>
           <a:xfrm>
-            <a:off x="411480" y="2249424"/>
-            <a:ext cx="3977640" cy="1737360"/>
-          </a:xfrm>
-          <a:prstGeom prst="rect">
-            <a:avLst/>
-          </a:prstGeom>
-          <a:noFill/>
-          <a:ln/>
-        </p:spPr>
-        <p:txBody>
-          <a:bodyPr wrap="square" rtlCol="0" anchor="t"/>
-          <a:lstStyle/>
-          <a:p>
-            <a:pPr marL="342900" indent="-342900">
+            <a:off x="411480" y="2542032"/>
+            <a:ext cx="3931920" cy="777240"/>
+          </a:xfrm>
+          <a:prstGeom prst="rect">
+            <a:avLst/>
+          </a:prstGeom>
+          <a:noFill/>
+          <a:ln/>
+        </p:spPr>
+        <p:txBody>
+          <a:bodyPr wrap="square" rtlCol="0" anchor="ctr"/>
+          <a:lstStyle/>
+          <a:p>
+            <a:pPr indent="0" marL="0">
               <a:lnSpc>
-                <a:spcPct val="118000"/>
+                <a:spcPct val="115000"/>
               </a:lnSpc>
-              <a:buSzPct val="100000"/>
-              <a:buChar char="•"/>
-            </a:pPr>
-            <a:r>
-              <a:rPr lang="en-US" sz="1250" dirty="0">
+              <a:buNone/>
+            </a:pPr>
+            <a:r>
+              <a:rPr lang="en-US" sz="1400" dirty="0">
                 <a:solidFill>
                   <a:srgbClr val="3A362E"/>
                 </a:solidFill>
@@ -5926,20 +5605,80 @@
                 <a:ea typeface="IBM Plex Sans" pitchFamily="34" charset="-122"/>
                 <a:cs typeface="IBM Plex Sans" pitchFamily="34" charset="-120"/>
               </a:rPr>
-              <a:t>A caminha de espuma deforma, não aguenta lavagem e vai inteira pro lixo.</a:t>
-            </a:r>
-            <a:endParaRPr lang="en-US" sz="1250" dirty="0"/>
-          </a:p>
-          <a:p>
-            <a:pPr marL="342900" indent="-342900">
+              <a:t>A caminha deforma, não lava e vai inteira pro lixo — escondida no canto da sala.</a:t>
+            </a:r>
+            <a:endParaRPr lang="en-US" sz="1400" dirty="0"/>
+          </a:p>
+        </p:txBody>
+      </p:sp>
+      <p:sp>
+        <p:nvSpPr>
+          <p:cNvPr id="12" name="Text 10"/>
+          <p:cNvSpPr/>
+          <p:nvPr/>
+        </p:nvSpPr>
+        <p:spPr>
+          <a:xfrm>
+            <a:off x="4754880" y="2286000"/>
+            <a:ext cx="2286000" cy="237744"/>
+          </a:xfrm>
+          <a:prstGeom prst="rect">
+            <a:avLst/>
+          </a:prstGeom>
+          <a:noFill/>
+          <a:ln/>
+        </p:spPr>
+        <p:txBody>
+          <a:bodyPr wrap="square" rtlCol="0" anchor="ctr"/>
+          <a:lstStyle/>
+          <a:p>
+            <a:pPr indent="0" marL="0">
+              <a:buNone/>
+            </a:pPr>
+            <a:r>
+              <a:rPr lang="en-US" sz="1000" spc="300" kern="0" dirty="0">
+                <a:solidFill>
+                  <a:srgbClr val="243D2C"/>
+                </a:solidFill>
+                <a:latin typeface="IBM Plex Mono" pitchFamily="34" charset="0"/>
+                <a:ea typeface="IBM Plex Mono" pitchFamily="34" charset="-122"/>
+                <a:cs typeface="IBM Plex Mono" pitchFamily="34" charset="-120"/>
+              </a:rPr>
+              <a:t>ECOSSISTEMA</a:t>
+            </a:r>
+            <a:endParaRPr lang="en-US" sz="1000" dirty="0"/>
+          </a:p>
+        </p:txBody>
+      </p:sp>
+      <p:sp>
+        <p:nvSpPr>
+          <p:cNvPr id="13" name="Text 11"/>
+          <p:cNvSpPr/>
+          <p:nvPr/>
+        </p:nvSpPr>
+        <p:spPr>
+          <a:xfrm>
+            <a:off x="4736592" y="2542032"/>
+            <a:ext cx="3977640" cy="777240"/>
+          </a:xfrm>
+          <a:prstGeom prst="rect">
+            <a:avLst/>
+          </a:prstGeom>
+          <a:noFill/>
+          <a:ln/>
+        </p:spPr>
+        <p:txBody>
+          <a:bodyPr wrap="square" rtlCol="0" anchor="ctr"/>
+          <a:lstStyle/>
+          <a:p>
+            <a:pPr indent="0" marL="0">
               <a:lnSpc>
-                <a:spcPct val="118000"/>
+                <a:spcPct val="115000"/>
               </a:lnSpc>
-              <a:buSzPct val="100000"/>
-              <a:buChar char="•"/>
-            </a:pPr>
-            <a:r>
-              <a:rPr lang="en-US" sz="1250" dirty="0">
+              <a:buNone/>
+            </a:pPr>
+            <a:r>
+              <a:rPr lang="en-US" sz="1400" dirty="0">
                 <a:solidFill>
                   <a:srgbClr val="3A362E"/>
                 </a:solidFill>
@@ -5947,43 +5686,22 @@
                 <a:ea typeface="IBM Plex Sans" pitchFamily="34" charset="-122"/>
                 <a:cs typeface="IBM Plex Sans" pitchFamily="34" charset="-120"/>
               </a:rPr>
-              <a:t>Esteticamente, é um objeto que a casa esconde no canto.</a:t>
-            </a:r>
-            <a:endParaRPr lang="en-US" sz="1250" dirty="0"/>
-          </a:p>
-          <a:p>
-            <a:pPr marL="342900" indent="-342900">
-              <a:lnSpc>
-                <a:spcPct val="118000"/>
-              </a:lnSpc>
-              <a:buSzPct val="100000"/>
-              <a:buChar char="•"/>
-            </a:pPr>
-            <a:r>
-              <a:rPr lang="en-US" sz="1250" dirty="0">
-                <a:solidFill>
-                  <a:srgbClr val="3A362E"/>
-                </a:solidFill>
-                <a:latin typeface="IBM Plex Sans" pitchFamily="34" charset="0"/>
-                <a:ea typeface="IBM Plex Sans" pitchFamily="34" charset="-122"/>
-                <a:cs typeface="IBM Plex Sans" pitchFamily="34" charset="-120"/>
-              </a:rPr>
-              <a:t>Sem reparo possível: estragou uma parte, perdeu tudo.</a:t>
-            </a:r>
-            <a:endParaRPr lang="en-US" sz="1250" dirty="0"/>
-          </a:p>
-        </p:txBody>
-      </p:sp>
-      <p:sp>
-        <p:nvSpPr>
-          <p:cNvPr id="12" name="Text 10"/>
-          <p:cNvSpPr/>
-          <p:nvPr/>
-        </p:nvSpPr>
-        <p:spPr>
-          <a:xfrm>
-            <a:off x="4754880" y="1956816"/>
-            <a:ext cx="3931920" cy="274320"/>
+              <a:t>Madeira urbana de qualidade vira descarte volumoso; o setor roda em espuma e plástico virgem.</a:t>
+            </a:r>
+            <a:endParaRPr lang="en-US" sz="1400" dirty="0"/>
+          </a:p>
+        </p:txBody>
+      </p:sp>
+      <p:sp>
+        <p:nvSpPr>
+          <p:cNvPr id="14" name="Text 12"/>
+          <p:cNvSpPr/>
+          <p:nvPr/>
+        </p:nvSpPr>
+        <p:spPr>
+          <a:xfrm>
+            <a:off x="411480" y="3566160"/>
+            <a:ext cx="2743200" cy="658368"/>
           </a:xfrm>
           <a:prstGeom prst="rect">
             <a:avLst/>
@@ -5999,135 +5717,69 @@
               <a:buNone/>
             </a:pPr>
             <a:r>
-              <a:rPr lang="en-US" sz="1000" spc="300" kern="0" dirty="0">
-                <a:solidFill>
-                  <a:srgbClr val="243D2C"/>
+              <a:rPr lang="en-US" sz="4400" dirty="0">
+                <a:solidFill>
+                  <a:srgbClr val="11100D"/>
+                </a:solidFill>
+                <a:latin typeface="League Gothic" pitchFamily="34" charset="0"/>
+                <a:ea typeface="League Gothic" pitchFamily="34" charset="-122"/>
+                <a:cs typeface="League Gothic" pitchFamily="34" charset="-120"/>
+              </a:rPr>
+              <a:t>R$ 76 BI</a:t>
+            </a:r>
+            <a:endParaRPr lang="en-US" sz="4400" dirty="0"/>
+          </a:p>
+        </p:txBody>
+      </p:sp>
+      <p:sp>
+        <p:nvSpPr>
+          <p:cNvPr id="15" name="Text 13"/>
+          <p:cNvSpPr/>
+          <p:nvPr/>
+        </p:nvSpPr>
+        <p:spPr>
+          <a:xfrm>
+            <a:off x="438912" y="4224528"/>
+            <a:ext cx="2743200" cy="237744"/>
+          </a:xfrm>
+          <a:prstGeom prst="rect">
+            <a:avLst/>
+          </a:prstGeom>
+          <a:noFill/>
+          <a:ln/>
+        </p:spPr>
+        <p:txBody>
+          <a:bodyPr wrap="square" rtlCol="0" anchor="ctr"/>
+          <a:lstStyle/>
+          <a:p>
+            <a:pPr indent="0" marL="0">
+              <a:buNone/>
+            </a:pPr>
+            <a:r>
+              <a:rPr lang="en-US" sz="900" spc="200" kern="0" dirty="0">
+                <a:solidFill>
+                  <a:srgbClr val="8A7B60"/>
                 </a:solidFill>
                 <a:latin typeface="IBM Plex Mono" pitchFamily="34" charset="0"/>
                 <a:ea typeface="IBM Plex Mono" pitchFamily="34" charset="-122"/>
                 <a:cs typeface="IBM Plex Mono" pitchFamily="34" charset="-120"/>
               </a:rPr>
-              <a:t>PELA ÓTICA DO ECOSSISTEMA</a:t>
-            </a:r>
-            <a:endParaRPr lang="en-US" sz="1000" dirty="0"/>
-          </a:p>
-        </p:txBody>
-      </p:sp>
-      <p:sp>
-        <p:nvSpPr>
-          <p:cNvPr id="13" name="Text 11"/>
-          <p:cNvSpPr/>
-          <p:nvPr/>
-        </p:nvSpPr>
-        <p:spPr>
-          <a:xfrm>
-            <a:off x="4754880" y="2249424"/>
-            <a:ext cx="3977640" cy="1737360"/>
-          </a:xfrm>
-          <a:prstGeom prst="rect">
-            <a:avLst/>
-          </a:prstGeom>
-          <a:noFill/>
-          <a:ln/>
-        </p:spPr>
-        <p:txBody>
-          <a:bodyPr wrap="square" rtlCol="0" anchor="t"/>
-          <a:lstStyle/>
-          <a:p>
-            <a:pPr marL="342900" indent="-342900">
-              <a:lnSpc>
-                <a:spcPct val="118000"/>
-              </a:lnSpc>
-              <a:buSzPct val="100000"/>
-              <a:buChar char="•"/>
-            </a:pPr>
-            <a:r>
-              <a:rPr lang="en-US" sz="1250" dirty="0">
-                <a:solidFill>
-                  <a:srgbClr val="3A362E"/>
-                </a:solidFill>
-                <a:latin typeface="IBM Plex Sans" pitchFamily="34" charset="0"/>
-                <a:ea typeface="IBM Plex Sans" pitchFamily="34" charset="-122"/>
-                <a:cs typeface="IBM Plex Sans" pitchFamily="34" charset="-120"/>
-              </a:rPr>
-              <a:t>Madeira urbana de boa qualidade vira descarte volumoso, sem rota de reuso.</a:t>
-            </a:r>
-            <a:endParaRPr lang="en-US" sz="1250" dirty="0"/>
-          </a:p>
-          <a:p>
-            <a:pPr marL="342900" indent="-342900">
-              <a:lnSpc>
-                <a:spcPct val="118000"/>
-              </a:lnSpc>
-              <a:buSzPct val="100000"/>
-              <a:buChar char="•"/>
-            </a:pPr>
-            <a:r>
-              <a:rPr lang="en-US" sz="1250" dirty="0">
-                <a:solidFill>
-                  <a:srgbClr val="3A362E"/>
-                </a:solidFill>
-                <a:latin typeface="IBM Plex Sans" pitchFamily="34" charset="0"/>
-                <a:ea typeface="IBM Plex Sans" pitchFamily="34" charset="-122"/>
-                <a:cs typeface="IBM Plex Sans" pitchFamily="34" charset="-120"/>
-              </a:rPr>
-              <a:t>O padrão do setor é espuma + plástico virgem, sem peça de reposição.</a:t>
-            </a:r>
-            <a:endParaRPr lang="en-US" sz="1250" dirty="0"/>
-          </a:p>
-          <a:p>
-            <a:pPr marL="342900" indent="-342900">
-              <a:lnSpc>
-                <a:spcPct val="118000"/>
-              </a:lnSpc>
-              <a:buSzPct val="100000"/>
-              <a:buChar char="•"/>
-            </a:pPr>
-            <a:r>
-              <a:rPr lang="en-US" sz="1250" dirty="0">
-                <a:solidFill>
-                  <a:srgbClr val="3A362E"/>
-                </a:solidFill>
-                <a:latin typeface="IBM Plex Sans" pitchFamily="34" charset="0"/>
-                <a:ea typeface="IBM Plex Sans" pitchFamily="34" charset="-122"/>
-                <a:cs typeface="IBM Plex Sans" pitchFamily="34" charset="-120"/>
-              </a:rPr>
-              <a:t>Fim de vida não é pensado no design — é problema do aterro.</a:t>
-            </a:r>
-            <a:endParaRPr lang="en-US" sz="1250" dirty="0"/>
-          </a:p>
-        </p:txBody>
-      </p:sp>
-      <p:sp>
-        <p:nvSpPr>
-          <p:cNvPr id="14" name="Shape 12"/>
-          <p:cNvSpPr/>
-          <p:nvPr/>
-        </p:nvSpPr>
-        <p:spPr>
-          <a:xfrm>
-            <a:off x="411480" y="4133088"/>
-            <a:ext cx="8321040" cy="566928"/>
-          </a:xfrm>
-          <a:prstGeom prst="rect">
-            <a:avLst/>
-          </a:prstGeom>
-          <a:solidFill>
-            <a:srgbClr val="11100D"/>
-          </a:solidFill>
-          <a:ln/>
-        </p:spPr>
-      </p:sp>
-      <p:sp>
-        <p:nvSpPr>
-          <p:cNvPr id="15" name="Text 13"/>
-          <p:cNvSpPr/>
-          <p:nvPr/>
-        </p:nvSpPr>
-        <p:spPr>
-          <a:xfrm>
-            <a:off x="594360" y="4160520"/>
-            <a:ext cx="8001000" cy="512064"/>
+              <a:t>MERCADO PET BR · 2º DO MUNDO</a:t>
+            </a:r>
+            <a:endParaRPr lang="en-US" sz="900" dirty="0"/>
+          </a:p>
+        </p:txBody>
+      </p:sp>
+      <p:sp>
+        <p:nvSpPr>
+          <p:cNvPr id="16" name="Text 14"/>
+          <p:cNvSpPr/>
+          <p:nvPr/>
+        </p:nvSpPr>
+        <p:spPr>
+          <a:xfrm>
+            <a:off x="3429000" y="3566160"/>
+            <a:ext cx="2743200" cy="658368"/>
           </a:xfrm>
           <a:prstGeom prst="rect">
             <a:avLst/>
@@ -6143,30 +5795,69 @@
               <a:buNone/>
             </a:pPr>
             <a:r>
-              <a:rPr lang="en-US" sz="950" spc="100" kern="0" dirty="0">
-                <a:solidFill>
-                  <a:srgbClr val="EFE7D6"/>
+              <a:rPr lang="en-US" sz="4400" dirty="0">
+                <a:solidFill>
+                  <a:srgbClr val="11100D"/>
+                </a:solidFill>
+                <a:latin typeface="League Gothic" pitchFamily="34" charset="0"/>
+                <a:ea typeface="League Gothic" pitchFamily="34" charset="-122"/>
+                <a:cs typeface="League Gothic" pitchFamily="34" charset="-120"/>
+              </a:rPr>
+              <a:t>12–16 H</a:t>
+            </a:r>
+            <a:endParaRPr lang="en-US" sz="4400" dirty="0"/>
+          </a:p>
+        </p:txBody>
+      </p:sp>
+      <p:sp>
+        <p:nvSpPr>
+          <p:cNvPr id="17" name="Text 15"/>
+          <p:cNvSpPr/>
+          <p:nvPr/>
+        </p:nvSpPr>
+        <p:spPr>
+          <a:xfrm>
+            <a:off x="3456432" y="4224528"/>
+            <a:ext cx="2743200" cy="237744"/>
+          </a:xfrm>
+          <a:prstGeom prst="rect">
+            <a:avLst/>
+          </a:prstGeom>
+          <a:noFill/>
+          <a:ln/>
+        </p:spPr>
+        <p:txBody>
+          <a:bodyPr wrap="square" rtlCol="0" anchor="ctr"/>
+          <a:lstStyle/>
+          <a:p>
+            <a:pPr indent="0" marL="0">
+              <a:buNone/>
+            </a:pPr>
+            <a:r>
+              <a:rPr lang="en-US" sz="900" spc="200" kern="0" dirty="0">
+                <a:solidFill>
+                  <a:srgbClr val="8A7B60"/>
                 </a:solidFill>
                 <a:latin typeface="IBM Plex Mono" pitchFamily="34" charset="0"/>
                 <a:ea typeface="IBM Plex Mono" pitchFamily="34" charset="-122"/>
                 <a:cs typeface="IBM Plex Mono" pitchFamily="34" charset="-120"/>
               </a:rPr>
-              <a:t>MERCADO PET BR: 2º MAIOR DO MUNDO, ~R$ 76 BI/ANO   ·   PETS DESCANSAM 12–16 H/DIA   ·   CAMINHAS DURAM EM MÉDIA 12–24 MESES</a:t>
-            </a:r>
-            <a:endParaRPr lang="en-US" sz="950" dirty="0"/>
-          </a:p>
-        </p:txBody>
-      </p:sp>
-      <p:sp>
-        <p:nvSpPr>
-          <p:cNvPr id="16" name="Text 14"/>
-          <p:cNvSpPr/>
-          <p:nvPr/>
-        </p:nvSpPr>
-        <p:spPr>
-          <a:xfrm>
-            <a:off x="411480" y="4809744"/>
-            <a:ext cx="8321040" cy="274320"/>
+              <a:t>DE DESCANSO POR DIA</a:t>
+            </a:r>
+            <a:endParaRPr lang="en-US" sz="900" dirty="0"/>
+          </a:p>
+        </p:txBody>
+      </p:sp>
+      <p:sp>
+        <p:nvSpPr>
+          <p:cNvPr id="18" name="Text 16"/>
+          <p:cNvSpPr/>
+          <p:nvPr/>
+        </p:nvSpPr>
+        <p:spPr>
+          <a:xfrm>
+            <a:off x="6446520" y="3566160"/>
+            <a:ext cx="2743200" cy="658368"/>
           </a:xfrm>
           <a:prstGeom prst="rect">
             <a:avLst/>
@@ -6182,7 +5873,46 @@
               <a:buNone/>
             </a:pPr>
             <a:r>
-              <a:rPr lang="en-US" sz="850" spc="200" kern="0" dirty="0">
+              <a:rPr lang="en-US" sz="4400" dirty="0">
+                <a:solidFill>
+                  <a:srgbClr val="11100D"/>
+                </a:solidFill>
+                <a:latin typeface="League Gothic" pitchFamily="34" charset="0"/>
+                <a:ea typeface="League Gothic" pitchFamily="34" charset="-122"/>
+                <a:cs typeface="League Gothic" pitchFamily="34" charset="-120"/>
+              </a:rPr>
+              <a:t>12–24 MESES</a:t>
+            </a:r>
+            <a:endParaRPr lang="en-US" sz="4400" dirty="0"/>
+          </a:p>
+        </p:txBody>
+      </p:sp>
+      <p:sp>
+        <p:nvSpPr>
+          <p:cNvPr id="19" name="Text 17"/>
+          <p:cNvSpPr/>
+          <p:nvPr/>
+        </p:nvSpPr>
+        <p:spPr>
+          <a:xfrm>
+            <a:off x="6473952" y="4224528"/>
+            <a:ext cx="2743200" cy="237744"/>
+          </a:xfrm>
+          <a:prstGeom prst="rect">
+            <a:avLst/>
+          </a:prstGeom>
+          <a:noFill/>
+          <a:ln/>
+        </p:spPr>
+        <p:txBody>
+          <a:bodyPr wrap="square" rtlCol="0" anchor="ctr"/>
+          <a:lstStyle/>
+          <a:p>
+            <a:pPr indent="0" marL="0">
+              <a:buNone/>
+            </a:pPr>
+            <a:r>
+              <a:rPr lang="en-US" sz="900" spc="200" kern="0" dirty="0">
                 <a:solidFill>
                   <a:srgbClr val="8A7B60"/>
                 </a:solidFill>
@@ -6190,9 +5920,48 @@
                 <a:ea typeface="IBM Plex Mono" pitchFamily="34" charset="-122"/>
                 <a:cs typeface="IBM Plex Mono" pitchFamily="34" charset="-120"/>
               </a:rPr>
+              <a:t>VIDA ÚTIL DE UMA CAMINHA</a:t>
+            </a:r>
+            <a:endParaRPr lang="en-US" sz="900" dirty="0"/>
+          </a:p>
+        </p:txBody>
+      </p:sp>
+      <p:sp>
+        <p:nvSpPr>
+          <p:cNvPr id="20" name="Text 18"/>
+          <p:cNvSpPr/>
+          <p:nvPr/>
+        </p:nvSpPr>
+        <p:spPr>
+          <a:xfrm>
+            <a:off x="411480" y="4828032"/>
+            <a:ext cx="8321040" cy="256032"/>
+          </a:xfrm>
+          <a:prstGeom prst="rect">
+            <a:avLst/>
+          </a:prstGeom>
+          <a:noFill/>
+          <a:ln/>
+        </p:spPr>
+        <p:txBody>
+          <a:bodyPr wrap="square" rtlCol="0" anchor="ctr"/>
+          <a:lstStyle/>
+          <a:p>
+            <a:pPr indent="0" marL="0">
+              <a:buNone/>
+            </a:pPr>
+            <a:r>
+              <a:rPr lang="en-US" sz="800" spc="200" kern="0" dirty="0">
+                <a:solidFill>
+                  <a:srgbClr val="8A7B60"/>
+                </a:solidFill>
+                <a:latin typeface="IBM Plex Mono" pitchFamily="34" charset="0"/>
+                <a:ea typeface="IBM Plex Mono" pitchFamily="34" charset="-122"/>
+                <a:cs typeface="IBM Plex Mono" pitchFamily="34" charset="-120"/>
+              </a:rPr>
               <a:t>Luiza Britto · Design Thinking e Prototipagem · Insper · 02 jul 2026</a:t>
             </a:r>
-            <a:endParaRPr lang="en-US" sz="850" dirty="0"/>
+            <a:endParaRPr lang="en-US" sz="800" dirty="0"/>
           </a:p>
         </p:txBody>
       </p:sp>
@@ -6356,8 +6125,8 @@
         </p:nvSpPr>
         <p:spPr>
           <a:xfrm>
-            <a:off x="411480" y="310896"/>
-            <a:ext cx="7315200" cy="274320"/>
+            <a:off x="411480" y="329184"/>
+            <a:ext cx="8229600" cy="274320"/>
           </a:xfrm>
           <a:prstGeom prst="rect">
             <a:avLst/>
@@ -6369,7 +6138,7 @@
           <a:bodyPr wrap="square" rtlCol="0" anchor="ctr"/>
           <a:lstStyle/>
           <a:p>
-            <a:pPr algn="l" indent="0" marL="0">
+            <a:pPr indent="0" marL="0">
               <a:buNone/>
             </a:pPr>
             <a:r>
@@ -6381,7 +6150,7 @@
                 <a:ea typeface="IBM Plex Mono" pitchFamily="34" charset="-122"/>
                 <a:cs typeface="IBM Plex Mono" pitchFamily="34" charset="-120"/>
               </a:rPr>
-              <a:t>1 · VIABILIDADE — PÚBLICO-ALVO</a:t>
+              <a:t>PÚBLICO-ALVO</a:t>
             </a:r>
             <a:endParaRPr lang="en-US" sz="1050" dirty="0"/>
           </a:p>
@@ -6395,8 +6164,8 @@
         </p:nvSpPr>
         <p:spPr>
           <a:xfrm>
-            <a:off x="384048" y="603504"/>
-            <a:ext cx="5486400" cy="731520"/>
+            <a:off x="384048" y="658368"/>
+            <a:ext cx="5303520" cy="834887"/>
           </a:xfrm>
           <a:prstGeom prst="rect">
             <a:avLst/>
@@ -6408,14 +6177,14 @@
           <a:bodyPr wrap="square" rtlCol="0" anchor="t"/>
           <a:lstStyle/>
           <a:p>
-            <a:pPr algn="l" indent="0" marL="0">
+            <a:pPr indent="0" marL="0">
               <a:lnSpc>
-                <a:spcPts val="3440"/>
+                <a:spcPts val="3612"/>
               </a:lnSpc>
               <a:buNone/>
             </a:pPr>
             <a:r>
-              <a:rPr lang="en-US" sz="4000" dirty="0">
+              <a:rPr lang="en-US" sz="4200" dirty="0">
                 <a:solidFill>
                   <a:srgbClr val="11100D"/>
                 </a:solidFill>
@@ -6425,17 +6194,17 @@
               </a:rPr>
               <a:t>PARA CASAS ONDE</a:t>
             </a:r>
-            <a:endParaRPr lang="en-US" sz="4000" dirty="0"/>
-          </a:p>
-          <a:p>
-            <a:pPr algn="l" indent="0" marL="0">
+            <a:endParaRPr lang="en-US" sz="4200" dirty="0"/>
+          </a:p>
+          <a:p>
+            <a:pPr indent="0" marL="0">
               <a:lnSpc>
-                <a:spcPts val="3440"/>
+                <a:spcPts val="3612"/>
               </a:lnSpc>
               <a:buNone/>
             </a:pPr>
             <a:r>
-              <a:rPr lang="en-US" sz="4000" dirty="0">
+              <a:rPr lang="en-US" sz="4200" dirty="0">
                 <a:solidFill>
                   <a:srgbClr val="11100D"/>
                 </a:solidFill>
@@ -6445,7 +6214,7 @@
               </a:rPr>
               <a:t>O PET TAMBÉM MORA.</a:t>
             </a:r>
-            <a:endParaRPr lang="en-US" sz="4000" dirty="0"/>
+            <a:endParaRPr lang="en-US" sz="4200" dirty="0"/>
           </a:p>
         </p:txBody>
       </p:sp>
@@ -6457,8 +6226,8 @@
         </p:nvSpPr>
         <p:spPr>
           <a:xfrm>
-            <a:off x="429768" y="2011680"/>
-            <a:ext cx="2743200" cy="237744"/>
+            <a:off x="411480" y="2395728"/>
+            <a:ext cx="4937760" cy="365760"/>
           </a:xfrm>
           <a:prstGeom prst="rect">
             <a:avLst/>
@@ -6474,15 +6243,54 @@
               <a:buNone/>
             </a:pPr>
             <a:r>
-              <a:rPr lang="en-US" sz="1000" spc="300" kern="0" dirty="0">
-                <a:solidFill>
-                  <a:srgbClr val="D65A2B"/>
+              <a:rPr lang="en-US" sz="1700" b="1" dirty="0">
+                <a:solidFill>
+                  <a:srgbClr val="11100D"/>
+                </a:solidFill>
+                <a:latin typeface="IBM Plex Sans" pitchFamily="34" charset="0"/>
+                <a:ea typeface="IBM Plex Sans" pitchFamily="34" charset="-122"/>
+                <a:cs typeface="IBM Plex Sans" pitchFamily="34" charset="-120"/>
+              </a:rPr>
+              <a:t>Tutor urbano consciente</a:t>
+            </a:r>
+            <a:endParaRPr lang="en-US" sz="1700" dirty="0"/>
+          </a:p>
+        </p:txBody>
+      </p:sp>
+      <p:sp>
+        <p:nvSpPr>
+          <p:cNvPr id="11" name="Text 9"/>
+          <p:cNvSpPr/>
+          <p:nvPr/>
+        </p:nvSpPr>
+        <p:spPr>
+          <a:xfrm>
+            <a:off x="411480" y="2743200"/>
+            <a:ext cx="4937760" cy="274320"/>
+          </a:xfrm>
+          <a:prstGeom prst="rect">
+            <a:avLst/>
+          </a:prstGeom>
+          <a:noFill/>
+          <a:ln/>
+        </p:spPr>
+        <p:txBody>
+          <a:bodyPr wrap="square" rtlCol="0" anchor="ctr"/>
+          <a:lstStyle/>
+          <a:p>
+            <a:pPr indent="0" marL="0">
+              <a:buNone/>
+            </a:pPr>
+            <a:r>
+              <a:rPr lang="en-US" sz="1000" spc="100" kern="0" dirty="0">
+                <a:solidFill>
+                  <a:srgbClr val="8A7B60"/>
                 </a:solidFill>
                 <a:latin typeface="IBM Plex Mono" pitchFamily="34" charset="0"/>
                 <a:ea typeface="IBM Plex Mono" pitchFamily="34" charset="-122"/>
                 <a:cs typeface="IBM Plex Mono" pitchFamily="34" charset="-120"/>
               </a:rPr>
-              <a:t>PERSONA</a:t>
+              <a:t>28–50 · capitais · apartamento · cão pequeno</a:t>
             </a:r>
             <a:endParaRPr lang="en-US" sz="1000" dirty="0"/>
           </a:p>
@@ -6490,14 +6298,14 @@
       </p:sp>
       <p:sp>
         <p:nvSpPr>
-          <p:cNvPr id="11" name="Text 9"/>
-          <p:cNvSpPr/>
-          <p:nvPr/>
-        </p:nvSpPr>
-        <p:spPr>
-          <a:xfrm>
-            <a:off x="411480" y="2267712"/>
-            <a:ext cx="5120640" cy="365760"/>
+          <p:cNvPr id="12" name="Text 10"/>
+          <p:cNvSpPr/>
+          <p:nvPr/>
+        </p:nvSpPr>
+        <p:spPr>
+          <a:xfrm>
+            <a:off x="411480" y="3127248"/>
+            <a:ext cx="4754880" cy="1097280"/>
           </a:xfrm>
           <a:prstGeom prst="rect">
             <a:avLst/>
@@ -6509,93 +6317,36 @@
           <a:bodyPr wrap="square" rtlCol="0" anchor="ctr"/>
           <a:lstStyle/>
           <a:p>
-            <a:pPr indent="0" marL="0">
-              <a:buNone/>
-            </a:pPr>
-            <a:r>
-              <a:rPr lang="en-US" sz="1700" b="1" dirty="0">
-                <a:solidFill>
-                  <a:srgbClr val="11100D"/>
+            <a:pPr marL="342900" indent="-342900">
+              <a:lnSpc>
+                <a:spcPct val="135000"/>
+              </a:lnSpc>
+              <a:buSzPct val="100000"/>
+              <a:buChar char="•"/>
+            </a:pPr>
+            <a:r>
+              <a:rPr lang="en-US" sz="1400" dirty="0">
+                <a:solidFill>
+                  <a:srgbClr val="3A362E"/>
                 </a:solidFill>
                 <a:latin typeface="IBM Plex Sans" pitchFamily="34" charset="0"/>
                 <a:ea typeface="IBM Plex Sans" pitchFamily="34" charset="-122"/>
                 <a:cs typeface="IBM Plex Sans" pitchFamily="34" charset="-120"/>
               </a:rPr>
-              <a:t>Tutor urbano consciente</a:t>
-            </a:r>
-            <a:endParaRPr lang="en-US" sz="1700" dirty="0"/>
-          </a:p>
-        </p:txBody>
-      </p:sp>
-      <p:sp>
-        <p:nvSpPr>
-          <p:cNvPr id="12" name="Text 10"/>
-          <p:cNvSpPr/>
-          <p:nvPr/>
-        </p:nvSpPr>
-        <p:spPr>
-          <a:xfrm>
-            <a:off x="411480" y="2615184"/>
-            <a:ext cx="5120640" cy="274320"/>
-          </a:xfrm>
-          <a:prstGeom prst="rect">
-            <a:avLst/>
-          </a:prstGeom>
-          <a:noFill/>
-          <a:ln/>
-        </p:spPr>
-        <p:txBody>
-          <a:bodyPr wrap="square" rtlCol="0" anchor="ctr"/>
-          <a:lstStyle/>
-          <a:p>
-            <a:pPr indent="0" marL="0">
-              <a:buNone/>
-            </a:pPr>
-            <a:r>
-              <a:rPr lang="en-US" sz="1000" spc="100" kern="0" dirty="0">
-                <a:solidFill>
-                  <a:srgbClr val="8A7B60"/>
-                </a:solidFill>
-                <a:latin typeface="IBM Plex Mono" pitchFamily="34" charset="0"/>
-                <a:ea typeface="IBM Plex Mono" pitchFamily="34" charset="-122"/>
-                <a:cs typeface="IBM Plex Mono" pitchFamily="34" charset="-120"/>
-              </a:rPr>
-              <a:t>28–50 anos · capitais · apartamento · cão pequeno</a:t>
-            </a:r>
-            <a:endParaRPr lang="en-US" sz="1000" dirty="0"/>
-          </a:p>
-        </p:txBody>
-      </p:sp>
-      <p:sp>
-        <p:nvSpPr>
-          <p:cNvPr id="13" name="Text 11"/>
-          <p:cNvSpPr/>
-          <p:nvPr/>
-        </p:nvSpPr>
-        <p:spPr>
-          <a:xfrm>
-            <a:off x="411480" y="2944368"/>
-            <a:ext cx="5029200" cy="1051560"/>
-          </a:xfrm>
-          <a:prstGeom prst="rect">
-            <a:avLst/>
-          </a:prstGeom>
-          <a:noFill/>
-          <a:ln/>
-        </p:spPr>
-        <p:txBody>
-          <a:bodyPr wrap="square" rtlCol="0" anchor="ctr"/>
-          <a:lstStyle/>
+              <a:t>Quer móvel que fica na sala.</a:t>
+            </a:r>
+            <a:endParaRPr lang="en-US" sz="1400" dirty="0"/>
+          </a:p>
           <a:p>
             <a:pPr marL="342900" indent="-342900">
               <a:lnSpc>
-                <a:spcPct val="120000"/>
+                <a:spcPct val="135000"/>
               </a:lnSpc>
               <a:buSzPct val="100000"/>
               <a:buChar char="•"/>
             </a:pPr>
             <a:r>
-              <a:rPr lang="en-US" sz="1250" dirty="0">
+              <a:rPr lang="en-US" sz="1400" dirty="0">
                 <a:solidFill>
                   <a:srgbClr val="3A362E"/>
                 </a:solidFill>
@@ -6603,20 +6354,20 @@
                 <a:ea typeface="IBM Plex Sans" pitchFamily="34" charset="-122"/>
                 <a:cs typeface="IBM Plex Sans" pitchFamily="34" charset="-120"/>
               </a:rPr>
-              <a:t>Valoriza peça com história — pátina é narrativa, não defeito.</a:t>
-            </a:r>
-            <a:endParaRPr lang="en-US" sz="1250" dirty="0"/>
+              <a:t>Aceita pátina como história.</a:t>
+            </a:r>
+            <a:endParaRPr lang="en-US" sz="1400" dirty="0"/>
           </a:p>
           <a:p>
             <a:pPr marL="342900" indent="-342900">
               <a:lnSpc>
-                <a:spcPct val="120000"/>
+                <a:spcPct val="135000"/>
               </a:lnSpc>
               <a:buSzPct val="100000"/>
               <a:buChar char="•"/>
             </a:pPr>
             <a:r>
-              <a:rPr lang="en-US" sz="1250" dirty="0">
+              <a:rPr lang="en-US" sz="1400" dirty="0">
                 <a:solidFill>
                   <a:srgbClr val="3A362E"/>
                 </a:solidFill>
@@ -6624,114 +6375,15 @@
                 <a:ea typeface="IBM Plex Sans" pitchFamily="34" charset="-122"/>
                 <a:cs typeface="IBM Plex Sans" pitchFamily="34" charset="-120"/>
               </a:rPr>
-              <a:t>Quer um móvel que fica na sala, não um acessório que se esconde.</a:t>
-            </a:r>
-            <a:endParaRPr lang="en-US" sz="1250" dirty="0"/>
-          </a:p>
-          <a:p>
-            <a:pPr marL="342900" indent="-342900">
-              <a:lnSpc>
-                <a:spcPct val="120000"/>
-              </a:lnSpc>
-              <a:buSzPct val="100000"/>
-              <a:buChar char="•"/>
-            </a:pPr>
-            <a:r>
-              <a:rPr lang="en-US" sz="1250" dirty="0">
-                <a:solidFill>
-                  <a:srgbClr val="3A362E"/>
-                </a:solidFill>
-                <a:latin typeface="IBM Plex Sans" pitchFamily="34" charset="0"/>
-                <a:ea typeface="IBM Plex Sans" pitchFamily="34" charset="-122"/>
-                <a:cs typeface="IBM Plex Sans" pitchFamily="34" charset="-120"/>
-              </a:rPr>
-              <a:t>Paga por durabilidade, origem do material e reparo possível.</a:t>
-            </a:r>
-            <a:endParaRPr lang="en-US" sz="1250" dirty="0"/>
-          </a:p>
-        </p:txBody>
-      </p:sp>
-      <p:sp>
-        <p:nvSpPr>
-          <p:cNvPr id="14" name="Text 12"/>
-          <p:cNvSpPr/>
-          <p:nvPr/>
-        </p:nvSpPr>
-        <p:spPr>
-          <a:xfrm>
-            <a:off x="429768" y="4069080"/>
-            <a:ext cx="2743200" cy="237744"/>
-          </a:xfrm>
-          <a:prstGeom prst="rect">
-            <a:avLst/>
-          </a:prstGeom>
-          <a:noFill/>
-          <a:ln/>
-        </p:spPr>
-        <p:txBody>
-          <a:bodyPr wrap="square" rtlCol="0" anchor="ctr"/>
-          <a:lstStyle/>
-          <a:p>
-            <a:pPr indent="0" marL="0">
-              <a:buNone/>
-            </a:pPr>
-            <a:r>
-              <a:rPr lang="en-US" sz="950" spc="300" kern="0" dirty="0">
-                <a:solidFill>
-                  <a:srgbClr val="243D2C"/>
-                </a:solidFill>
-                <a:latin typeface="IBM Plex Mono" pitchFamily="34" charset="0"/>
-                <a:ea typeface="IBM Plex Mono" pitchFamily="34" charset="-122"/>
-                <a:cs typeface="IBM Plex Mono" pitchFamily="34" charset="-120"/>
-              </a:rPr>
-              <a:t>TAMBÉM ALCANÇA</a:t>
-            </a:r>
-            <a:endParaRPr lang="en-US" sz="950" dirty="0"/>
-          </a:p>
-        </p:txBody>
-      </p:sp>
-      <p:sp>
-        <p:nvSpPr>
-          <p:cNvPr id="15" name="Text 13"/>
-          <p:cNvSpPr/>
-          <p:nvPr/>
-        </p:nvSpPr>
-        <p:spPr>
-          <a:xfrm>
-            <a:off x="411480" y="4315968"/>
-            <a:ext cx="5029200" cy="457200"/>
-          </a:xfrm>
-          <a:prstGeom prst="rect">
-            <a:avLst/>
-          </a:prstGeom>
-          <a:noFill/>
-          <a:ln/>
-        </p:spPr>
-        <p:txBody>
-          <a:bodyPr wrap="square" rtlCol="0" anchor="ctr"/>
-          <a:lstStyle/>
-          <a:p>
-            <a:pPr indent="0" marL="0">
-              <a:buNone/>
-            </a:pPr>
-            <a:r>
-              <a:rPr lang="en-US" sz="1100" dirty="0">
-                <a:solidFill>
-                  <a:srgbClr val="3A362E"/>
-                </a:solidFill>
-                <a:latin typeface="IBM Plex Sans" pitchFamily="34" charset="0"/>
-                <a:ea typeface="IBM Plex Sans" pitchFamily="34" charset="-122"/>
-                <a:cs typeface="IBM Plex Sans" pitchFamily="34" charset="-120"/>
-              </a:rPr>
-              <a:t>Arquitetos e designers de interiores  ·  lojas e curadorias de design  ·  economia circular urbana (ecopontos, cooperativas)</a:t>
-            </a:r>
-            <a:endParaRPr lang="en-US" sz="1100" dirty="0"/>
+              <a:t>Paga por durar e reparar.</a:t>
+            </a:r>
+            <a:endParaRPr lang="en-US" sz="1400" dirty="0"/>
           </a:p>
         </p:txBody>
       </p:sp>
       <p:pic>
         <p:nvPicPr>
-          <p:cNvPr id="16" name="Image 0" descr="site/assets/dog-look.jpg">    </p:cNvPr>
+          <p:cNvPr id="13" name="Image 0" descr="site/assets/dog-look.jpg">    </p:cNvPr>
           <p:cNvPicPr>
             <a:picLocks noChangeAspect="1"/>
           </p:cNvPicPr>
@@ -6745,8 +6397,8 @@
         </p:blipFill>
         <p:spPr>
           <a:xfrm>
-            <a:off x="5806440" y="1417320"/>
-            <a:ext cx="2971800" cy="2971800"/>
+            <a:off x="5669280" y="1325880"/>
+            <a:ext cx="3154680" cy="3154680"/>
           </a:xfrm>
           <a:prstGeom prst="rect">
             <a:avLst/>
@@ -6755,14 +6407,14 @@
       </p:pic>
       <p:sp>
         <p:nvSpPr>
-          <p:cNvPr id="17" name="Shape 14"/>
-          <p:cNvSpPr/>
-          <p:nvPr/>
-        </p:nvSpPr>
-        <p:spPr>
-          <a:xfrm>
-            <a:off x="5806440" y="1417320"/>
-            <a:ext cx="2971800" cy="2971800"/>
+          <p:cNvPr id="14" name="Shape 11"/>
+          <p:cNvSpPr/>
+          <p:nvPr/>
+        </p:nvSpPr>
+        <p:spPr>
+          <a:xfrm>
+            <a:off x="5669280" y="1325880"/>
+            <a:ext cx="3154680" cy="3154680"/>
           </a:xfrm>
           <a:prstGeom prst="rect">
             <a:avLst/>
@@ -6782,14 +6434,14 @@
       </p:sp>
       <p:sp>
         <p:nvSpPr>
-          <p:cNvPr id="18" name="Text 15"/>
-          <p:cNvSpPr/>
-          <p:nvPr/>
-        </p:nvSpPr>
-        <p:spPr>
-          <a:xfrm>
-            <a:off x="5806440" y="4443984"/>
-            <a:ext cx="2971800" cy="219456"/>
+          <p:cNvPr id="15" name="Text 12"/>
+          <p:cNvSpPr/>
+          <p:nvPr/>
+        </p:nvSpPr>
+        <p:spPr>
+          <a:xfrm>
+            <a:off x="5669280" y="4535424"/>
+            <a:ext cx="3154680" cy="219456"/>
           </a:xfrm>
           <a:prstGeom prst="rect">
             <a:avLst/>
@@ -6813,7 +6465,7 @@
                 <a:ea typeface="IBM Plex Mono" pitchFamily="34" charset="-122"/>
                 <a:cs typeface="IBM Plex Mono" pitchFamily="34" charset="-120"/>
               </a:rPr>
-              <a:t>EM USO · CACHORRO DE VERDADE</a:t>
+              <a:t>CACHORRO DE VERDADE</a:t>
             </a:r>
             <a:endParaRPr lang="en-US" sz="850" dirty="0"/>
           </a:p>
@@ -6821,14 +6473,14 @@
       </p:sp>
       <p:sp>
         <p:nvSpPr>
-          <p:cNvPr id="19" name="Text 16"/>
-          <p:cNvSpPr/>
-          <p:nvPr/>
-        </p:nvSpPr>
-        <p:spPr>
-          <a:xfrm>
-            <a:off x="411480" y="4809744"/>
-            <a:ext cx="8321040" cy="274320"/>
+          <p:cNvPr id="16" name="Text 13"/>
+          <p:cNvSpPr/>
+          <p:nvPr/>
+        </p:nvSpPr>
+        <p:spPr>
+          <a:xfrm>
+            <a:off x="411480" y="4828032"/>
+            <a:ext cx="8321040" cy="256032"/>
           </a:xfrm>
           <a:prstGeom prst="rect">
             <a:avLst/>
@@ -6844,7 +6496,7 @@
               <a:buNone/>
             </a:pPr>
             <a:r>
-              <a:rPr lang="en-US" sz="850" spc="200" kern="0" dirty="0">
+              <a:rPr lang="en-US" sz="800" spc="200" kern="0" dirty="0">
                 <a:solidFill>
                   <a:srgbClr val="8A7B60"/>
                 </a:solidFill>
@@ -6854,7 +6506,7 @@
               </a:rPr>
               <a:t>Luiza Britto · Design Thinking e Prototipagem · Insper · 02 jul 2026</a:t>
             </a:r>
-            <a:endParaRPr lang="en-US" sz="850" dirty="0"/>
+            <a:endParaRPr lang="en-US" sz="800" dirty="0"/>
           </a:p>
         </p:txBody>
       </p:sp>
@@ -7018,8 +6670,8 @@
         </p:nvSpPr>
         <p:spPr>
           <a:xfrm>
-            <a:off x="411480" y="310896"/>
-            <a:ext cx="7315200" cy="274320"/>
+            <a:off x="411480" y="329184"/>
+            <a:ext cx="8229600" cy="274320"/>
           </a:xfrm>
           <a:prstGeom prst="rect">
             <a:avLst/>
@@ -7031,7 +6683,7 @@
           <a:bodyPr wrap="square" rtlCol="0" anchor="ctr"/>
           <a:lstStyle/>
           <a:p>
-            <a:pPr algn="l" indent="0" marL="0">
+            <a:pPr indent="0" marL="0">
               <a:buNone/>
             </a:pPr>
             <a:r>
@@ -7043,7 +6695,7 @@
                 <a:ea typeface="IBM Plex Mono" pitchFamily="34" charset="-122"/>
                 <a:cs typeface="IBM Plex Mono" pitchFamily="34" charset="-120"/>
               </a:rPr>
-              <a:t>1 · VIABILIDADE — VALIDAÇÃO EM CAMPO</a:t>
+              <a:t>VALIDAÇÃO · 6 CONVERSAS — TUTORES, MARCENEIROS, VETERINÁRIO, CATADORES</a:t>
             </a:r>
             <a:endParaRPr lang="en-US" sz="1050" dirty="0"/>
           </a:p>
@@ -7051,14 +6703,34 @@
       </p:sp>
       <p:sp>
         <p:nvSpPr>
-          <p:cNvPr id="9" name="Text 7"/>
-          <p:cNvSpPr/>
-          <p:nvPr/>
-        </p:nvSpPr>
-        <p:spPr>
-          <a:xfrm>
-            <a:off x="384048" y="603504"/>
-            <a:ext cx="6400800" cy="731520"/>
+          <p:cNvPr id="9" name="Shape 7"/>
+          <p:cNvSpPr/>
+          <p:nvPr/>
+        </p:nvSpPr>
+        <p:spPr>
+          <a:xfrm>
+            <a:off x="429768" y="1033272"/>
+            <a:ext cx="36576" cy="822960"/>
+          </a:xfrm>
+          <a:prstGeom prst="rect">
+            <a:avLst/>
+          </a:prstGeom>
+          <a:solidFill>
+            <a:srgbClr val="D65A2B"/>
+          </a:solidFill>
+          <a:ln/>
+        </p:spPr>
+      </p:sp>
+      <p:sp>
+        <p:nvSpPr>
+          <p:cNvPr id="10" name="Text 8"/>
+          <p:cNvSpPr/>
+          <p:nvPr/>
+        </p:nvSpPr>
+        <p:spPr>
+          <a:xfrm>
+            <a:off x="603504" y="960120"/>
+            <a:ext cx="8138160" cy="603504"/>
           </a:xfrm>
           <a:prstGeom prst="rect">
             <a:avLst/>
@@ -7070,57 +6742,34 @@
           <a:bodyPr wrap="square" rtlCol="0" anchor="t"/>
           <a:lstStyle/>
           <a:p>
-            <a:pPr algn="l" indent="0" marL="0">
-              <a:lnSpc>
-                <a:spcPts val="3440"/>
-              </a:lnSpc>
-              <a:buNone/>
-            </a:pPr>
-            <a:r>
-              <a:rPr lang="en-US" sz="4000" dirty="0">
+            <a:pPr indent="0" marL="0">
+              <a:buNone/>
+            </a:pPr>
+            <a:r>
+              <a:rPr lang="en-US" sz="2300" i="1" dirty="0">
                 <a:solidFill>
                   <a:srgbClr val="EFE7D6"/>
                 </a:solidFill>
-                <a:latin typeface="League Gothic" pitchFamily="34" charset="0"/>
-                <a:ea typeface="League Gothic" pitchFamily="34" charset="-122"/>
-                <a:cs typeface="League Gothic" pitchFamily="34" charset="-120"/>
-              </a:rPr>
-              <a:t>6 CONVERSAS.</a:t>
-            </a:r>
-            <a:endParaRPr lang="en-US" sz="4000" dirty="0"/>
-          </a:p>
-          <a:p>
-            <a:pPr algn="l" indent="0" marL="0">
-              <a:lnSpc>
-                <a:spcPts val="3440"/>
-              </a:lnSpc>
-              <a:buNone/>
-            </a:pPr>
-            <a:r>
-              <a:rPr lang="en-US" sz="4000" dirty="0">
-                <a:solidFill>
-                  <a:srgbClr val="EFE7D6"/>
-                </a:solidFill>
-                <a:latin typeface="League Gothic" pitchFamily="34" charset="0"/>
-                <a:ea typeface="League Gothic" pitchFamily="34" charset="-122"/>
-                <a:cs typeface="League Gothic" pitchFamily="34" charset="-120"/>
-              </a:rPr>
-              <a:t>3 FRASES DE OURO.</a:t>
-            </a:r>
-            <a:endParaRPr lang="en-US" sz="4000" dirty="0"/>
-          </a:p>
-        </p:txBody>
-      </p:sp>
-      <p:sp>
-        <p:nvSpPr>
-          <p:cNvPr id="10" name="Text 8"/>
-          <p:cNvSpPr/>
-          <p:nvPr/>
-        </p:nvSpPr>
-        <p:spPr>
-          <a:xfrm>
-            <a:off x="429768" y="1847088"/>
-            <a:ext cx="7315200" cy="237744"/>
+                <a:latin typeface="Instrument Serif" pitchFamily="34" charset="0"/>
+                <a:ea typeface="Instrument Serif" pitchFamily="34" charset="-122"/>
+                <a:cs typeface="Instrument Serif" pitchFamily="34" charset="-120"/>
+              </a:rPr>
+              <a:t>“Se parecer móvel, eu deixo na sala.”</a:t>
+            </a:r>
+            <a:endParaRPr lang="en-US" sz="2300" dirty="0"/>
+          </a:p>
+        </p:txBody>
+      </p:sp>
+      <p:sp>
+        <p:nvSpPr>
+          <p:cNvPr id="11" name="Text 9"/>
+          <p:cNvSpPr/>
+          <p:nvPr/>
+        </p:nvSpPr>
+        <p:spPr>
+          <a:xfrm>
+            <a:off x="603504" y="1545336"/>
+            <a:ext cx="8138160" cy="237744"/>
           </a:xfrm>
           <a:prstGeom prst="rect">
             <a:avLst/>
@@ -7136,30 +6785,89 @@
               <a:buNone/>
             </a:pPr>
             <a:r>
-              <a:rPr lang="en-US" sz="950" spc="200" kern="0" dirty="0">
-                <a:solidFill>
-                  <a:srgbClr val="BFB49E"/>
+              <a:rPr lang="en-US" sz="900" spc="200" kern="0" dirty="0">
+                <a:solidFill>
+                  <a:srgbClr val="C89B48"/>
                 </a:solidFill>
                 <a:latin typeface="IBM Plex Mono" pitchFamily="34" charset="0"/>
                 <a:ea typeface="IBM Plex Mono" pitchFamily="34" charset="-122"/>
                 <a:cs typeface="IBM Plex Mono" pitchFamily="34" charset="-120"/>
               </a:rPr>
-              <a:t>TUTORES · MARCENEIROS · VETERINÁRIO · CATADORES</a:t>
-            </a:r>
-            <a:endParaRPr lang="en-US" sz="950" dirty="0"/>
-          </a:p>
-        </p:txBody>
-      </p:sp>
-      <p:sp>
-        <p:nvSpPr>
-          <p:cNvPr id="11" name="Text 9"/>
-          <p:cNvSpPr/>
-          <p:nvPr/>
-        </p:nvSpPr>
-        <p:spPr>
-          <a:xfrm>
-            <a:off x="5623560" y="1847088"/>
-            <a:ext cx="3200400" cy="237744"/>
+              <a:t>TUTORA      →  VIROU: LINGUAGEM DE MÓVEL</a:t>
+            </a:r>
+            <a:endParaRPr lang="en-US" sz="900" dirty="0"/>
+          </a:p>
+        </p:txBody>
+      </p:sp>
+      <p:sp>
+        <p:nvSpPr>
+          <p:cNvPr id="12" name="Shape 10"/>
+          <p:cNvSpPr/>
+          <p:nvPr/>
+        </p:nvSpPr>
+        <p:spPr>
+          <a:xfrm>
+            <a:off x="429768" y="2221992"/>
+            <a:ext cx="36576" cy="822960"/>
+          </a:xfrm>
+          <a:prstGeom prst="rect">
+            <a:avLst/>
+          </a:prstGeom>
+          <a:solidFill>
+            <a:srgbClr val="D65A2B"/>
+          </a:solidFill>
+          <a:ln/>
+        </p:spPr>
+      </p:sp>
+      <p:sp>
+        <p:nvSpPr>
+          <p:cNvPr id="13" name="Text 11"/>
+          <p:cNvSpPr/>
+          <p:nvPr/>
+        </p:nvSpPr>
+        <p:spPr>
+          <a:xfrm>
+            <a:off x="603504" y="2148840"/>
+            <a:ext cx="8138160" cy="603504"/>
+          </a:xfrm>
+          <a:prstGeom prst="rect">
+            <a:avLst/>
+          </a:prstGeom>
+          <a:noFill/>
+          <a:ln/>
+        </p:spPr>
+        <p:txBody>
+          <a:bodyPr wrap="square" rtlCol="0" anchor="t"/>
+          <a:lstStyle/>
+          <a:p>
+            <a:pPr indent="0" marL="0">
+              <a:buNone/>
+            </a:pPr>
+            <a:r>
+              <a:rPr lang="en-US" sz="2300" i="1" dirty="0">
+                <a:solidFill>
+                  <a:srgbClr val="EFE7D6"/>
+                </a:solidFill>
+                <a:latin typeface="Instrument Serif" pitchFamily="34" charset="0"/>
+                <a:ea typeface="Instrument Serif" pitchFamily="34" charset="-122"/>
+                <a:cs typeface="Instrument Serif" pitchFamily="34" charset="-120"/>
+              </a:rPr>
+              <a:t>“Lavável não é diferencial. É requisito.”</a:t>
+            </a:r>
+            <a:endParaRPr lang="en-US" sz="2300" dirty="0"/>
+          </a:p>
+        </p:txBody>
+      </p:sp>
+      <p:sp>
+        <p:nvSpPr>
+          <p:cNvPr id="14" name="Text 12"/>
+          <p:cNvSpPr/>
+          <p:nvPr/>
+        </p:nvSpPr>
+        <p:spPr>
+          <a:xfrm>
+            <a:off x="603504" y="2734056"/>
+            <a:ext cx="8138160" cy="237744"/>
           </a:xfrm>
           <a:prstGeom prst="rect">
             <a:avLst/>
@@ -7175,7 +6883,7 @@
               <a:buNone/>
             </a:pPr>
             <a:r>
-              <a:rPr lang="en-US" sz="950" spc="200" kern="0" dirty="0">
+              <a:rPr lang="en-US" sz="900" spc="200" kern="0" dirty="0">
                 <a:solidFill>
                   <a:srgbClr val="C89B48"/>
                 </a:solidFill>
@@ -7183,22 +6891,22 @@
                 <a:ea typeface="IBM Plex Mono" pitchFamily="34" charset="-122"/>
                 <a:cs typeface="IBM Plex Mono" pitchFamily="34" charset="-120"/>
               </a:rPr>
-              <a:t>O QUE VIROU DECISÃO</a:t>
-            </a:r>
-            <a:endParaRPr lang="en-US" sz="950" dirty="0"/>
-          </a:p>
-        </p:txBody>
-      </p:sp>
-      <p:sp>
-        <p:nvSpPr>
-          <p:cNvPr id="12" name="Shape 10"/>
-          <p:cNvSpPr/>
-          <p:nvPr/>
-        </p:nvSpPr>
-        <p:spPr>
-          <a:xfrm>
-            <a:off x="429768" y="2267712"/>
-            <a:ext cx="32004" cy="713232"/>
+              <a:t>SÍNTESE      →  VIROU: CAPA LAVÁVEL NO ROADMAP</a:t>
+            </a:r>
+            <a:endParaRPr lang="en-US" sz="900" dirty="0"/>
+          </a:p>
+        </p:txBody>
+      </p:sp>
+      <p:sp>
+        <p:nvSpPr>
+          <p:cNvPr id="15" name="Shape 13"/>
+          <p:cNvSpPr/>
+          <p:nvPr/>
+        </p:nvSpPr>
+        <p:spPr>
+          <a:xfrm>
+            <a:off x="429768" y="3410712"/>
+            <a:ext cx="36576" cy="822960"/>
           </a:xfrm>
           <a:prstGeom prst="rect">
             <a:avLst/>
@@ -7211,14 +6919,14 @@
       </p:sp>
       <p:sp>
         <p:nvSpPr>
-          <p:cNvPr id="13" name="Text 11"/>
-          <p:cNvSpPr/>
-          <p:nvPr/>
-        </p:nvSpPr>
-        <p:spPr>
-          <a:xfrm>
-            <a:off x="566928" y="2212848"/>
-            <a:ext cx="4937760" cy="566928"/>
+          <p:cNvPr id="16" name="Text 14"/>
+          <p:cNvSpPr/>
+          <p:nvPr/>
+        </p:nvSpPr>
+        <p:spPr>
+          <a:xfrm>
+            <a:off x="603504" y="3337560"/>
+            <a:ext cx="8138160" cy="603504"/>
           </a:xfrm>
           <a:prstGeom prst="rect">
             <a:avLst/>
@@ -7234,7 +6942,7 @@
               <a:buNone/>
             </a:pPr>
             <a:r>
-              <a:rPr lang="en-US" sz="1650" i="1" dirty="0">
+              <a:rPr lang="en-US" sz="2300" i="1" dirty="0">
                 <a:solidFill>
                   <a:srgbClr val="EFE7D6"/>
                 </a:solidFill>
@@ -7242,22 +6950,22 @@
                 <a:ea typeface="Instrument Serif" pitchFamily="34" charset="-122"/>
                 <a:cs typeface="Instrument Serif" pitchFamily="34" charset="-120"/>
               </a:rPr>
-              <a:t>“Se parecer móvel, eu deixo na sala.”</a:t>
-            </a:r>
-            <a:endParaRPr lang="en-US" sz="1650" dirty="0"/>
-          </a:p>
-        </p:txBody>
-      </p:sp>
-      <p:sp>
-        <p:nvSpPr>
-          <p:cNvPr id="14" name="Text 12"/>
-          <p:cNvSpPr/>
-          <p:nvPr/>
-        </p:nvSpPr>
-        <p:spPr>
-          <a:xfrm>
-            <a:off x="566928" y="2724912"/>
-            <a:ext cx="4754880" cy="219456"/>
+              <a:t>“Madeira reaproveitada precisa vir com cuidado.”</a:t>
+            </a:r>
+            <a:endParaRPr lang="en-US" sz="2300" dirty="0"/>
+          </a:p>
+        </p:txBody>
+      </p:sp>
+      <p:sp>
+        <p:nvSpPr>
+          <p:cNvPr id="17" name="Text 15"/>
+          <p:cNvSpPr/>
+          <p:nvPr/>
+        </p:nvSpPr>
+        <p:spPr>
+          <a:xfrm>
+            <a:off x="603504" y="3922776"/>
+            <a:ext cx="8138160" cy="237744"/>
           </a:xfrm>
           <a:prstGeom prst="rect">
             <a:avLst/>
@@ -7273,7 +6981,7 @@
               <a:buNone/>
             </a:pPr>
             <a:r>
-              <a:rPr lang="en-US" sz="850" spc="200" kern="0" dirty="0">
+              <a:rPr lang="en-US" sz="900" spc="200" kern="0" dirty="0">
                 <a:solidFill>
                   <a:srgbClr val="C89B48"/>
                 </a:solidFill>
@@ -7281,361 +6989,48 @@
                 <a:ea typeface="IBM Plex Mono" pitchFamily="34" charset="-122"/>
                 <a:cs typeface="IBM Plex Mono" pitchFamily="34" charset="-120"/>
               </a:rPr>
-              <a:t>TUTORA</a:t>
-            </a:r>
-            <a:endParaRPr lang="en-US" sz="850" dirty="0"/>
-          </a:p>
-        </p:txBody>
-      </p:sp>
-      <p:sp>
-        <p:nvSpPr>
-          <p:cNvPr id="15" name="Text 13"/>
-          <p:cNvSpPr/>
-          <p:nvPr/>
-        </p:nvSpPr>
-        <p:spPr>
-          <a:xfrm>
-            <a:off x="5623560" y="2267712"/>
-            <a:ext cx="3200400" cy="731520"/>
-          </a:xfrm>
-          <a:prstGeom prst="rect">
-            <a:avLst/>
-          </a:prstGeom>
-          <a:noFill/>
-          <a:ln/>
-        </p:spPr>
-        <p:txBody>
-          <a:bodyPr wrap="square" rtlCol="0" anchor="t"/>
-          <a:lstStyle/>
-          <a:p>
-            <a:pPr indent="0" marL="0">
-              <a:buNone/>
-            </a:pPr>
-            <a:r>
-              <a:rPr lang="en-US" sz="1050" dirty="0">
+              <a:t>MARCENEIRO · VETERINÁRIO      →  VIROU: TRIAGEM + SANITIZAÇÃO</a:t>
+            </a:r>
+            <a:endParaRPr lang="en-US" sz="900" dirty="0"/>
+          </a:p>
+        </p:txBody>
+      </p:sp>
+      <p:sp>
+        <p:nvSpPr>
+          <p:cNvPr id="18" name="Text 16"/>
+          <p:cNvSpPr/>
+          <p:nvPr/>
+        </p:nvSpPr>
+        <p:spPr>
+          <a:xfrm>
+            <a:off x="411480" y="4828032"/>
+            <a:ext cx="8321040" cy="256032"/>
+          </a:xfrm>
+          <a:prstGeom prst="rect">
+            <a:avLst/>
+          </a:prstGeom>
+          <a:noFill/>
+          <a:ln/>
+        </p:spPr>
+        <p:txBody>
+          <a:bodyPr wrap="square" rtlCol="0" anchor="ctr"/>
+          <a:lstStyle/>
+          <a:p>
+            <a:pPr indent="0" marL="0">
+              <a:buNone/>
+            </a:pPr>
+            <a:r>
+              <a:rPr lang="en-US" sz="800" spc="200" kern="0" dirty="0">
                 <a:solidFill>
                   <a:srgbClr val="BFB49E"/>
-                </a:solidFill>
-                <a:latin typeface="IBM Plex Sans" pitchFamily="34" charset="0"/>
-                <a:ea typeface="IBM Plex Sans" pitchFamily="34" charset="-122"/>
-                <a:cs typeface="IBM Plex Sans" pitchFamily="34" charset="-120"/>
-              </a:rPr>
-              <a:t>→  Linguagem de cadeira, não de caminha: madeira, proporção baixa, presença de móvel.</a:t>
-            </a:r>
-            <a:endParaRPr lang="en-US" sz="1050" dirty="0"/>
-          </a:p>
-        </p:txBody>
-      </p:sp>
-      <p:sp>
-        <p:nvSpPr>
-          <p:cNvPr id="16" name="Shape 14"/>
-          <p:cNvSpPr/>
-          <p:nvPr/>
-        </p:nvSpPr>
-        <p:spPr>
-          <a:xfrm>
-            <a:off x="429768" y="3108960"/>
-            <a:ext cx="32004" cy="713232"/>
-          </a:xfrm>
-          <a:prstGeom prst="rect">
-            <a:avLst/>
-          </a:prstGeom>
-          <a:solidFill>
-            <a:srgbClr val="D65A2B"/>
-          </a:solidFill>
-          <a:ln/>
-        </p:spPr>
-      </p:sp>
-      <p:sp>
-        <p:nvSpPr>
-          <p:cNvPr id="17" name="Text 15"/>
-          <p:cNvSpPr/>
-          <p:nvPr/>
-        </p:nvSpPr>
-        <p:spPr>
-          <a:xfrm>
-            <a:off x="566928" y="3054096"/>
-            <a:ext cx="4937760" cy="566928"/>
-          </a:xfrm>
-          <a:prstGeom prst="rect">
-            <a:avLst/>
-          </a:prstGeom>
-          <a:noFill/>
-          <a:ln/>
-        </p:spPr>
-        <p:txBody>
-          <a:bodyPr wrap="square" rtlCol="0" anchor="t"/>
-          <a:lstStyle/>
-          <a:p>
-            <a:pPr indent="0" marL="0">
-              <a:buNone/>
-            </a:pPr>
-            <a:r>
-              <a:rPr lang="en-US" sz="1650" i="1" dirty="0">
-                <a:solidFill>
-                  <a:srgbClr val="EFE7D6"/>
-                </a:solidFill>
-                <a:latin typeface="Instrument Serif" pitchFamily="34" charset="0"/>
-                <a:ea typeface="Instrument Serif" pitchFamily="34" charset="-122"/>
-                <a:cs typeface="Instrument Serif" pitchFamily="34" charset="-120"/>
-              </a:rPr>
-              <a:t>“Lavável não é diferencial. É requisito.”</a:t>
-            </a:r>
-            <a:endParaRPr lang="en-US" sz="1650" dirty="0"/>
-          </a:p>
-        </p:txBody>
-      </p:sp>
-      <p:sp>
-        <p:nvSpPr>
-          <p:cNvPr id="18" name="Text 16"/>
-          <p:cNvSpPr/>
-          <p:nvPr/>
-        </p:nvSpPr>
-        <p:spPr>
-          <a:xfrm>
-            <a:off x="566928" y="3566160"/>
-            <a:ext cx="4754880" cy="219456"/>
-          </a:xfrm>
-          <a:prstGeom prst="rect">
-            <a:avLst/>
-          </a:prstGeom>
-          <a:noFill/>
-          <a:ln/>
-        </p:spPr>
-        <p:txBody>
-          <a:bodyPr wrap="square" rtlCol="0" anchor="ctr"/>
-          <a:lstStyle/>
-          <a:p>
-            <a:pPr indent="0" marL="0">
-              <a:buNone/>
-            </a:pPr>
-            <a:r>
-              <a:rPr lang="en-US" sz="850" spc="200" kern="0" dirty="0">
-                <a:solidFill>
-                  <a:srgbClr val="C89B48"/>
                 </a:solidFill>
                 <a:latin typeface="IBM Plex Mono" pitchFamily="34" charset="0"/>
                 <a:ea typeface="IBM Plex Mono" pitchFamily="34" charset="-122"/>
                 <a:cs typeface="IBM Plex Mono" pitchFamily="34" charset="-120"/>
               </a:rPr>
-              <a:t>SÍNTESE DAS ENTREVISTAS</a:t>
-            </a:r>
-            <a:endParaRPr lang="en-US" sz="850" dirty="0"/>
-          </a:p>
-        </p:txBody>
-      </p:sp>
-      <p:sp>
-        <p:nvSpPr>
-          <p:cNvPr id="19" name="Text 17"/>
-          <p:cNvSpPr/>
-          <p:nvPr/>
-        </p:nvSpPr>
-        <p:spPr>
-          <a:xfrm>
-            <a:off x="5623560" y="3108960"/>
-            <a:ext cx="3200400" cy="731520"/>
-          </a:xfrm>
-          <a:prstGeom prst="rect">
-            <a:avLst/>
-          </a:prstGeom>
-          <a:noFill/>
-          <a:ln/>
-        </p:spPr>
-        <p:txBody>
-          <a:bodyPr wrap="square" rtlCol="0" anchor="t"/>
-          <a:lstStyle/>
-          <a:p>
-            <a:pPr indent="0" marL="0">
-              <a:buNone/>
-            </a:pPr>
-            <a:r>
-              <a:rPr lang="en-US" sz="1050" dirty="0">
-                <a:solidFill>
-                  <a:srgbClr val="BFB49E"/>
-                </a:solidFill>
-                <a:latin typeface="IBM Plex Sans" pitchFamily="34" charset="0"/>
-                <a:ea typeface="IBM Plex Sans" pitchFamily="34" charset="-122"/>
-                <a:cs typeface="IBM Plex Sans" pitchFamily="34" charset="-120"/>
-              </a:rPr>
-              <a:t>→  Capa removível e lavável entrou como requisito — em desenho para a próxima leva.</a:t>
-            </a:r>
-            <a:endParaRPr lang="en-US" sz="1050" dirty="0"/>
-          </a:p>
-        </p:txBody>
-      </p:sp>
-      <p:sp>
-        <p:nvSpPr>
-          <p:cNvPr id="20" name="Shape 18"/>
-          <p:cNvSpPr/>
-          <p:nvPr/>
-        </p:nvSpPr>
-        <p:spPr>
-          <a:xfrm>
-            <a:off x="429768" y="3950208"/>
-            <a:ext cx="32004" cy="713232"/>
-          </a:xfrm>
-          <a:prstGeom prst="rect">
-            <a:avLst/>
-          </a:prstGeom>
-          <a:solidFill>
-            <a:srgbClr val="D65A2B"/>
-          </a:solidFill>
-          <a:ln/>
-        </p:spPr>
-      </p:sp>
-      <p:sp>
-        <p:nvSpPr>
-          <p:cNvPr id="21" name="Text 19"/>
-          <p:cNvSpPr/>
-          <p:nvPr/>
-        </p:nvSpPr>
-        <p:spPr>
-          <a:xfrm>
-            <a:off x="566928" y="3895344"/>
-            <a:ext cx="4937760" cy="566928"/>
-          </a:xfrm>
-          <a:prstGeom prst="rect">
-            <a:avLst/>
-          </a:prstGeom>
-          <a:noFill/>
-          <a:ln/>
-        </p:spPr>
-        <p:txBody>
-          <a:bodyPr wrap="square" rtlCol="0" anchor="t"/>
-          <a:lstStyle/>
-          <a:p>
-            <a:pPr indent="0" marL="0">
-              <a:buNone/>
-            </a:pPr>
-            <a:r>
-              <a:rPr lang="en-US" sz="1650" i="1" dirty="0">
-                <a:solidFill>
-                  <a:srgbClr val="EFE7D6"/>
-                </a:solidFill>
-                <a:latin typeface="Instrument Serif" pitchFamily="34" charset="0"/>
-                <a:ea typeface="Instrument Serif" pitchFamily="34" charset="-122"/>
-                <a:cs typeface="Instrument Serif" pitchFamily="34" charset="-120"/>
-              </a:rPr>
-              <a:t>“Madeira reaproveitada precisa vir com cuidado.”</a:t>
-            </a:r>
-            <a:endParaRPr lang="en-US" sz="1650" dirty="0"/>
-          </a:p>
-        </p:txBody>
-      </p:sp>
-      <p:sp>
-        <p:nvSpPr>
-          <p:cNvPr id="22" name="Text 20"/>
-          <p:cNvSpPr/>
-          <p:nvPr/>
-        </p:nvSpPr>
-        <p:spPr>
-          <a:xfrm>
-            <a:off x="566928" y="4407408"/>
-            <a:ext cx="4754880" cy="219456"/>
-          </a:xfrm>
-          <a:prstGeom prst="rect">
-            <a:avLst/>
-          </a:prstGeom>
-          <a:noFill/>
-          <a:ln/>
-        </p:spPr>
-        <p:txBody>
-          <a:bodyPr wrap="square" rtlCol="0" anchor="ctr"/>
-          <a:lstStyle/>
-          <a:p>
-            <a:pPr indent="0" marL="0">
-              <a:buNone/>
-            </a:pPr>
-            <a:r>
-              <a:rPr lang="en-US" sz="850" spc="200" kern="0" dirty="0">
-                <a:solidFill>
-                  <a:srgbClr val="C89B48"/>
-                </a:solidFill>
-                <a:latin typeface="IBM Plex Mono" pitchFamily="34" charset="0"/>
-                <a:ea typeface="IBM Plex Mono" pitchFamily="34" charset="-122"/>
-                <a:cs typeface="IBM Plex Mono" pitchFamily="34" charset="-120"/>
-              </a:rPr>
-              <a:t>MARCENEIRO · VETERINÁRIO</a:t>
-            </a:r>
-            <a:endParaRPr lang="en-US" sz="850" dirty="0"/>
-          </a:p>
-        </p:txBody>
-      </p:sp>
-      <p:sp>
-        <p:nvSpPr>
-          <p:cNvPr id="23" name="Text 21"/>
-          <p:cNvSpPr/>
-          <p:nvPr/>
-        </p:nvSpPr>
-        <p:spPr>
-          <a:xfrm>
-            <a:off x="5623560" y="3950208"/>
-            <a:ext cx="3200400" cy="731520"/>
-          </a:xfrm>
-          <a:prstGeom prst="rect">
-            <a:avLst/>
-          </a:prstGeom>
-          <a:noFill/>
-          <a:ln/>
-        </p:spPr>
-        <p:txBody>
-          <a:bodyPr wrap="square" rtlCol="0" anchor="t"/>
-          <a:lstStyle/>
-          <a:p>
-            <a:pPr indent="0" marL="0">
-              <a:buNone/>
-            </a:pPr>
-            <a:r>
-              <a:rPr lang="en-US" sz="1050" dirty="0">
-                <a:solidFill>
-                  <a:srgbClr val="BFB49E"/>
-                </a:solidFill>
-                <a:latin typeface="IBM Plex Sans" pitchFamily="34" charset="0"/>
-                <a:ea typeface="IBM Plex Sans" pitchFamily="34" charset="-122"/>
-                <a:cs typeface="IBM Plex Sans" pitchFamily="34" charset="-120"/>
-              </a:rPr>
-              <a:t>→  Triagem do lote + protocolo de sanitização no roadmap do protótipo.</a:t>
-            </a:r>
-            <a:endParaRPr lang="en-US" sz="1050" dirty="0"/>
-          </a:p>
-        </p:txBody>
-      </p:sp>
-      <p:sp>
-        <p:nvSpPr>
-          <p:cNvPr id="24" name="Text 22"/>
-          <p:cNvSpPr/>
-          <p:nvPr/>
-        </p:nvSpPr>
-        <p:spPr>
-          <a:xfrm>
-            <a:off x="411480" y="4809744"/>
-            <a:ext cx="8321040" cy="274320"/>
-          </a:xfrm>
-          <a:prstGeom prst="rect">
-            <a:avLst/>
-          </a:prstGeom>
-          <a:noFill/>
-          <a:ln/>
-        </p:spPr>
-        <p:txBody>
-          <a:bodyPr wrap="square" rtlCol="0" anchor="ctr"/>
-          <a:lstStyle/>
-          <a:p>
-            <a:pPr indent="0" marL="0">
-              <a:buNone/>
-            </a:pPr>
-            <a:r>
-              <a:rPr lang="en-US" sz="850" spc="200" kern="0" dirty="0">
-                <a:solidFill>
-                  <a:srgbClr val="BFB49E"/>
-                </a:solidFill>
-                <a:latin typeface="IBM Plex Mono" pitchFamily="34" charset="0"/>
-                <a:ea typeface="IBM Plex Mono" pitchFamily="34" charset="-122"/>
-                <a:cs typeface="IBM Plex Mono" pitchFamily="34" charset="-120"/>
-              </a:rPr>
               <a:t>Luiza Britto · Design Thinking e Prototipagem · Insper · 02 jul 2026</a:t>
             </a:r>
-            <a:endParaRPr lang="en-US" sz="850" dirty="0"/>
+            <a:endParaRPr lang="en-US" sz="800" dirty="0"/>
           </a:p>
         </p:txBody>
       </p:sp>
@@ -7799,8 +7194,8 @@
         </p:nvSpPr>
         <p:spPr>
           <a:xfrm>
-            <a:off x="411480" y="310896"/>
-            <a:ext cx="7315200" cy="274320"/>
+            <a:off x="411480" y="329184"/>
+            <a:ext cx="8229600" cy="274320"/>
           </a:xfrm>
           <a:prstGeom prst="rect">
             <a:avLst/>
@@ -7812,7 +7207,7 @@
           <a:bodyPr wrap="square" rtlCol="0" anchor="ctr"/>
           <a:lstStyle/>
           <a:p>
-            <a:pPr algn="l" indent="0" marL="0">
+            <a:pPr indent="0" marL="0">
               <a:buNone/>
             </a:pPr>
             <a:r>
@@ -7824,7 +7219,7 @@
                 <a:ea typeface="IBM Plex Mono" pitchFamily="34" charset="-122"/>
                 <a:cs typeface="IBM Plex Mono" pitchFamily="34" charset="-120"/>
               </a:rPr>
-              <a:t>1 · VIABILIDADE — PROPOSTA DE VALOR SISTÊMICA</a:t>
+              <a:t>PROPOSTA DE VALOR SISTÊMICA</a:t>
             </a:r>
             <a:endParaRPr lang="en-US" sz="1050" dirty="0"/>
           </a:p>
@@ -7838,8 +7233,8 @@
         </p:nvSpPr>
         <p:spPr>
           <a:xfrm>
-            <a:off x="384048" y="603504"/>
-            <a:ext cx="8412480" cy="694944"/>
+            <a:off x="384048" y="658368"/>
+            <a:ext cx="8412480" cy="834887"/>
           </a:xfrm>
           <a:prstGeom prst="rect">
             <a:avLst/>
@@ -7851,14 +7246,14 @@
           <a:bodyPr wrap="square" rtlCol="0" anchor="t"/>
           <a:lstStyle/>
           <a:p>
-            <a:pPr algn="l" indent="0" marL="0">
+            <a:pPr indent="0" marL="0">
               <a:lnSpc>
-                <a:spcPts val="3268"/>
+                <a:spcPts val="3612"/>
               </a:lnSpc>
               <a:buNone/>
             </a:pPr>
             <a:r>
-              <a:rPr lang="en-US" sz="3800" dirty="0">
+              <a:rPr lang="en-US" sz="4200" dirty="0">
                 <a:solidFill>
                   <a:srgbClr val="11100D"/>
                 </a:solidFill>
@@ -7868,17 +7263,17 @@
               </a:rPr>
               <a:t>NÃO É CAMINHA DESCARTÁVEL.</a:t>
             </a:r>
-            <a:endParaRPr lang="en-US" sz="3800" dirty="0"/>
-          </a:p>
-          <a:p>
-            <a:pPr algn="l" indent="0" marL="0">
+            <a:endParaRPr lang="en-US" sz="4200" dirty="0"/>
+          </a:p>
+          <a:p>
+            <a:pPr indent="0" marL="0">
               <a:lnSpc>
-                <a:spcPts val="3268"/>
+                <a:spcPts val="3612"/>
               </a:lnSpc>
               <a:buNone/>
             </a:pPr>
             <a:r>
-              <a:rPr lang="en-US" sz="3800" dirty="0">
+              <a:rPr lang="en-US" sz="4200" dirty="0">
                 <a:solidFill>
                   <a:srgbClr val="11100D"/>
                 </a:solidFill>
@@ -7888,7 +7283,7 @@
               </a:rPr>
               <a:t>É MOBILIÁRIO REPARÁVEL.</a:t>
             </a:r>
-            <a:endParaRPr lang="en-US" sz="3800" dirty="0"/>
+            <a:endParaRPr lang="en-US" sz="4200" dirty="0"/>
           </a:p>
         </p:txBody>
       </p:sp>
@@ -7900,8 +7295,8 @@
         </p:nvSpPr>
         <p:spPr>
           <a:xfrm>
-            <a:off x="411480" y="1847088"/>
-            <a:ext cx="3657600" cy="237744"/>
+            <a:off x="411480" y="2395728"/>
+            <a:ext cx="2743200" cy="237744"/>
           </a:xfrm>
           <a:prstGeom prst="rect">
             <a:avLst/>
@@ -7925,7 +7320,7 @@
                 <a:ea typeface="IBM Plex Mono" pitchFamily="34" charset="-122"/>
                 <a:cs typeface="IBM Plex Mono" pitchFamily="34" charset="-120"/>
               </a:rPr>
-              <a:t>CAMINHA CONVENCIONAL</a:t>
+              <a:t>CAMINHA</a:t>
             </a:r>
             <a:endParaRPr lang="en-US" sz="950" dirty="0"/>
           </a:p>
@@ -7939,7 +7334,7 @@
         </p:nvSpPr>
         <p:spPr>
           <a:xfrm>
-            <a:off x="4343400" y="1847088"/>
+            <a:off x="4572000" y="2395728"/>
             <a:ext cx="2743200" cy="237744"/>
           </a:xfrm>
           <a:prstGeom prst="rect">
@@ -7964,7 +7359,7 @@
                 <a:ea typeface="IBM Plex Mono" pitchFamily="34" charset="-122"/>
                 <a:cs typeface="IBM Plex Mono" pitchFamily="34" charset="-120"/>
               </a:rPr>
-              <a:t>CADEIRA BENI</a:t>
+              <a:t>BENI</a:t>
             </a:r>
             <a:endParaRPr lang="en-US" sz="950" dirty="0"/>
           </a:p>
@@ -7978,8 +7373,8 @@
         </p:nvSpPr>
         <p:spPr>
           <a:xfrm>
-            <a:off x="411480" y="2039112"/>
-            <a:ext cx="6583680" cy="10058"/>
+            <a:off x="411480" y="2633472"/>
+            <a:ext cx="6309360" cy="10058"/>
           </a:xfrm>
           <a:prstGeom prst="rect">
             <a:avLst/>
@@ -7998,24 +7393,24 @@
         </p:nvSpPr>
         <p:spPr>
           <a:xfrm>
-            <a:off x="411480" y="2121408"/>
-            <a:ext cx="3566160" cy="457200"/>
-          </a:xfrm>
-          <a:prstGeom prst="rect">
-            <a:avLst/>
-          </a:prstGeom>
-          <a:noFill/>
-          <a:ln/>
-        </p:spPr>
-        <p:txBody>
-          <a:bodyPr wrap="square" rtlCol="0" anchor="t"/>
-          <a:lstStyle/>
-          <a:p>
-            <a:pPr indent="0" marL="0">
-              <a:buNone/>
-            </a:pPr>
-            <a:r>
-              <a:rPr lang="en-US" sz="1150" dirty="0">
+            <a:off x="411480" y="2724912"/>
+            <a:ext cx="3840480" cy="384048"/>
+          </a:xfrm>
+          <a:prstGeom prst="rect">
+            <a:avLst/>
+          </a:prstGeom>
+          <a:noFill/>
+          <a:ln/>
+        </p:spPr>
+        <p:txBody>
+          <a:bodyPr wrap="square" rtlCol="0" anchor="ctr"/>
+          <a:lstStyle/>
+          <a:p>
+            <a:pPr indent="0" marL="0">
+              <a:buNone/>
+            </a:pPr>
+            <a:r>
+              <a:rPr lang="en-US" sz="1400" dirty="0">
                 <a:solidFill>
                   <a:srgbClr val="8A7B60"/>
                 </a:solidFill>
@@ -8025,7 +7420,7 @@
               </a:rPr>
               <a:t>Espuma + plástico virgem</a:t>
             </a:r>
-            <a:endParaRPr lang="en-US" sz="1150" dirty="0"/>
+            <a:endParaRPr lang="en-US" sz="1400" dirty="0"/>
           </a:p>
         </p:txBody>
       </p:sp>
@@ -8037,24 +7432,24 @@
         </p:nvSpPr>
         <p:spPr>
           <a:xfrm>
-            <a:off x="4343400" y="2121408"/>
-            <a:ext cx="2697480" cy="457200"/>
-          </a:xfrm>
-          <a:prstGeom prst="rect">
-            <a:avLst/>
-          </a:prstGeom>
-          <a:noFill/>
-          <a:ln/>
-        </p:spPr>
-        <p:txBody>
-          <a:bodyPr wrap="square" rtlCol="0" anchor="t"/>
-          <a:lstStyle/>
-          <a:p>
-            <a:pPr indent="0" marL="0">
-              <a:buNone/>
-            </a:pPr>
-            <a:r>
-              <a:rPr lang="en-US" sz="1150" b="1" dirty="0">
+            <a:off x="4572000" y="2724912"/>
+            <a:ext cx="2377440" cy="384048"/>
+          </a:xfrm>
+          <a:prstGeom prst="rect">
+            <a:avLst/>
+          </a:prstGeom>
+          <a:noFill/>
+          <a:ln/>
+        </p:spPr>
+        <p:txBody>
+          <a:bodyPr wrap="square" rtlCol="0" anchor="ctr"/>
+          <a:lstStyle/>
+          <a:p>
+            <a:pPr indent="0" marL="0">
+              <a:buNone/>
+            </a:pPr>
+            <a:r>
+              <a:rPr lang="en-US" sz="1400" b="1" dirty="0">
                 <a:solidFill>
                   <a:srgbClr val="11100D"/>
                 </a:solidFill>
@@ -8062,9 +7457,9 @@
                 <a:ea typeface="IBM Plex Sans" pitchFamily="34" charset="-122"/>
                 <a:cs typeface="IBM Plex Sans" pitchFamily="34" charset="-120"/>
               </a:rPr>
-              <a:t>Madeira que já existia + bambu</a:t>
-            </a:r>
-            <a:endParaRPr lang="en-US" sz="1150" dirty="0"/>
+              <a:t>Madeira que já existia</a:t>
+            </a:r>
+            <a:endParaRPr lang="en-US" sz="1400" dirty="0"/>
           </a:p>
         </p:txBody>
       </p:sp>
@@ -8076,8 +7471,8 @@
         </p:nvSpPr>
         <p:spPr>
           <a:xfrm>
-            <a:off x="411480" y="2587752"/>
-            <a:ext cx="6583680" cy="10058"/>
+            <a:off x="411480" y="3163824"/>
+            <a:ext cx="6309360" cy="10058"/>
           </a:xfrm>
           <a:prstGeom prst="rect">
             <a:avLst/>
@@ -8096,24 +7491,24 @@
         </p:nvSpPr>
         <p:spPr>
           <a:xfrm>
-            <a:off x="411480" y="2670048"/>
-            <a:ext cx="3566160" cy="457200"/>
-          </a:xfrm>
-          <a:prstGeom prst="rect">
-            <a:avLst/>
-          </a:prstGeom>
-          <a:noFill/>
-          <a:ln/>
-        </p:spPr>
-        <p:txBody>
-          <a:bodyPr wrap="square" rtlCol="0" anchor="t"/>
-          <a:lstStyle/>
-          <a:p>
-            <a:pPr indent="0" marL="0">
-              <a:buNone/>
-            </a:pPr>
-            <a:r>
-              <a:rPr lang="en-US" sz="1150" dirty="0">
+            <a:off x="411480" y="3255264"/>
+            <a:ext cx="3840480" cy="384048"/>
+          </a:xfrm>
+          <a:prstGeom prst="rect">
+            <a:avLst/>
+          </a:prstGeom>
+          <a:noFill/>
+          <a:ln/>
+        </p:spPr>
+        <p:txBody>
+          <a:bodyPr wrap="square" rtlCol="0" anchor="ctr"/>
+          <a:lstStyle/>
+          <a:p>
+            <a:pPr indent="0" marL="0">
+              <a:buNone/>
+            </a:pPr>
+            <a:r>
+              <a:rPr lang="en-US" sz="1400" dirty="0">
                 <a:solidFill>
                   <a:srgbClr val="8A7B60"/>
                 </a:solidFill>
@@ -8121,9 +7516,9 @@
                 <a:ea typeface="IBM Plex Sans" pitchFamily="34" charset="-122"/>
                 <a:cs typeface="IBM Plex Sans" pitchFamily="34" charset="-120"/>
               </a:rPr>
-              <a:t>Estragou uma parte, joga tudo fora</a:t>
-            </a:r>
-            <a:endParaRPr lang="en-US" sz="1150" dirty="0"/>
+              <a:t>Estragou? Joga tudo fora</a:t>
+            </a:r>
+            <a:endParaRPr lang="en-US" sz="1400" dirty="0"/>
           </a:p>
         </p:txBody>
       </p:sp>
@@ -8135,24 +7530,24 @@
         </p:nvSpPr>
         <p:spPr>
           <a:xfrm>
-            <a:off x="4343400" y="2670048"/>
-            <a:ext cx="2697480" cy="457200"/>
-          </a:xfrm>
-          <a:prstGeom prst="rect">
-            <a:avLst/>
-          </a:prstGeom>
-          <a:noFill/>
-          <a:ln/>
-        </p:spPr>
-        <p:txBody>
-          <a:bodyPr wrap="square" rtlCol="0" anchor="t"/>
-          <a:lstStyle/>
-          <a:p>
-            <a:pPr indent="0" marL="0">
-              <a:buNone/>
-            </a:pPr>
-            <a:r>
-              <a:rPr lang="en-US" sz="1150" b="1" dirty="0">
+            <a:off x="4572000" y="3255264"/>
+            <a:ext cx="2377440" cy="384048"/>
+          </a:xfrm>
+          <a:prstGeom prst="rect">
+            <a:avLst/>
+          </a:prstGeom>
+          <a:noFill/>
+          <a:ln/>
+        </p:spPr>
+        <p:txBody>
+          <a:bodyPr wrap="square" rtlCol="0" anchor="ctr"/>
+          <a:lstStyle/>
+          <a:p>
+            <a:pPr indent="0" marL="0">
+              <a:buNone/>
+            </a:pPr>
+            <a:r>
+              <a:rPr lang="en-US" sz="1400" b="1" dirty="0">
                 <a:solidFill>
                   <a:srgbClr val="11100D"/>
                 </a:solidFill>
@@ -8160,9 +7555,9 @@
                 <a:ea typeface="IBM Plex Sans" pitchFamily="34" charset="-122"/>
                 <a:cs typeface="IBM Plex Sans" pitchFamily="34" charset="-120"/>
               </a:rPr>
-              <a:t>Troca por componente: perna, acabamento</a:t>
-            </a:r>
-            <a:endParaRPr lang="en-US" sz="1150" dirty="0"/>
+              <a:t>Troca por componente</a:t>
+            </a:r>
+            <a:endParaRPr lang="en-US" sz="1400" dirty="0"/>
           </a:p>
         </p:txBody>
       </p:sp>
@@ -8174,8 +7569,8 @@
         </p:nvSpPr>
         <p:spPr>
           <a:xfrm>
-            <a:off x="411480" y="3136392"/>
-            <a:ext cx="6583680" cy="10058"/>
+            <a:off x="411480" y="3694176"/>
+            <a:ext cx="6309360" cy="10058"/>
           </a:xfrm>
           <a:prstGeom prst="rect">
             <a:avLst/>
@@ -8194,24 +7589,24 @@
         </p:nvSpPr>
         <p:spPr>
           <a:xfrm>
-            <a:off x="411480" y="3218688"/>
-            <a:ext cx="3566160" cy="457200"/>
-          </a:xfrm>
-          <a:prstGeom prst="rect">
-            <a:avLst/>
-          </a:prstGeom>
-          <a:noFill/>
-          <a:ln/>
-        </p:spPr>
-        <p:txBody>
-          <a:bodyPr wrap="square" rtlCol="0" anchor="t"/>
-          <a:lstStyle/>
-          <a:p>
-            <a:pPr indent="0" marL="0">
-              <a:buNone/>
-            </a:pPr>
-            <a:r>
-              <a:rPr lang="en-US" sz="1150" dirty="0">
+            <a:off x="411480" y="3785616"/>
+            <a:ext cx="3840480" cy="384048"/>
+          </a:xfrm>
+          <a:prstGeom prst="rect">
+            <a:avLst/>
+          </a:prstGeom>
+          <a:noFill/>
+          <a:ln/>
+        </p:spPr>
+        <p:txBody>
+          <a:bodyPr wrap="square" rtlCol="0" anchor="ctr"/>
+          <a:lstStyle/>
+          <a:p>
+            <a:pPr indent="0" marL="0">
+              <a:buNone/>
+            </a:pPr>
+            <a:r>
+              <a:rPr lang="en-US" sz="1400" dirty="0">
                 <a:solidFill>
                   <a:srgbClr val="8A7B60"/>
                 </a:solidFill>
@@ -8219,9 +7614,9 @@
                 <a:ea typeface="IBM Plex Sans" pitchFamily="34" charset="-122"/>
                 <a:cs typeface="IBM Plex Sans" pitchFamily="34" charset="-120"/>
               </a:rPr>
-              <a:t>Objeto escondido no canto</a:t>
-            </a:r>
-            <a:endParaRPr lang="en-US" sz="1150" dirty="0"/>
+              <a:t>Some no canto</a:t>
+            </a:r>
+            <a:endParaRPr lang="en-US" sz="1400" dirty="0"/>
           </a:p>
         </p:txBody>
       </p:sp>
@@ -8233,24 +7628,24 @@
         </p:nvSpPr>
         <p:spPr>
           <a:xfrm>
-            <a:off x="4343400" y="3218688"/>
-            <a:ext cx="2697480" cy="457200"/>
-          </a:xfrm>
-          <a:prstGeom prst="rect">
-            <a:avLst/>
-          </a:prstGeom>
-          <a:noFill/>
-          <a:ln/>
-        </p:spPr>
-        <p:txBody>
-          <a:bodyPr wrap="square" rtlCol="0" anchor="t"/>
-          <a:lstStyle/>
-          <a:p>
-            <a:pPr indent="0" marL="0">
-              <a:buNone/>
-            </a:pPr>
-            <a:r>
-              <a:rPr lang="en-US" sz="1150" b="1" dirty="0">
+            <a:off x="4572000" y="3785616"/>
+            <a:ext cx="2377440" cy="384048"/>
+          </a:xfrm>
+          <a:prstGeom prst="rect">
+            <a:avLst/>
+          </a:prstGeom>
+          <a:noFill/>
+          <a:ln/>
+        </p:spPr>
+        <p:txBody>
+          <a:bodyPr wrap="square" rtlCol="0" anchor="ctr"/>
+          <a:lstStyle/>
+          <a:p>
+            <a:pPr indent="0" marL="0">
+              <a:buNone/>
+            </a:pPr>
+            <a:r>
+              <a:rPr lang="en-US" sz="1400" b="1" dirty="0">
                 <a:solidFill>
                   <a:srgbClr val="11100D"/>
                 </a:solidFill>
@@ -8258,119 +7653,21 @@
                 <a:ea typeface="IBM Plex Sans" pitchFamily="34" charset="-122"/>
                 <a:cs typeface="IBM Plex Sans" pitchFamily="34" charset="-120"/>
               </a:rPr>
-              <a:t>Presença de móvel — fica na sala</a:t>
-            </a:r>
-            <a:endParaRPr lang="en-US" sz="1150" dirty="0"/>
-          </a:p>
-        </p:txBody>
-      </p:sp>
-      <p:sp>
-        <p:nvSpPr>
-          <p:cNvPr id="21" name="Shape 19"/>
-          <p:cNvSpPr/>
-          <p:nvPr/>
-        </p:nvSpPr>
-        <p:spPr>
-          <a:xfrm>
-            <a:off x="411480" y="3685032"/>
-            <a:ext cx="6583680" cy="10058"/>
-          </a:xfrm>
-          <a:prstGeom prst="rect">
-            <a:avLst/>
-          </a:prstGeom>
-          <a:solidFill>
-            <a:srgbClr val="3A362E"/>
-          </a:solidFill>
-          <a:ln/>
-        </p:spPr>
-      </p:sp>
-      <p:sp>
-        <p:nvSpPr>
-          <p:cNvPr id="22" name="Text 20"/>
-          <p:cNvSpPr/>
-          <p:nvPr/>
-        </p:nvSpPr>
-        <p:spPr>
-          <a:xfrm>
-            <a:off x="411480" y="3767328"/>
-            <a:ext cx="3566160" cy="457200"/>
-          </a:xfrm>
-          <a:prstGeom prst="rect">
-            <a:avLst/>
-          </a:prstGeom>
-          <a:noFill/>
-          <a:ln/>
-        </p:spPr>
-        <p:txBody>
-          <a:bodyPr wrap="square" rtlCol="0" anchor="t"/>
-          <a:lstStyle/>
-          <a:p>
-            <a:pPr indent="0" marL="0">
-              <a:buNone/>
-            </a:pPr>
-            <a:r>
-              <a:rPr lang="en-US" sz="1150" dirty="0">
-                <a:solidFill>
-                  <a:srgbClr val="8A7B60"/>
-                </a:solidFill>
-                <a:latin typeface="IBM Plex Sans" pitchFamily="34" charset="0"/>
-                <a:ea typeface="IBM Plex Sans" pitchFamily="34" charset="-122"/>
-                <a:cs typeface="IBM Plex Sans" pitchFamily="34" charset="-120"/>
-              </a:rPr>
-              <a:t>12–24 meses e aterro</a:t>
-            </a:r>
-            <a:endParaRPr lang="en-US" sz="1150" dirty="0"/>
-          </a:p>
-        </p:txBody>
-      </p:sp>
-      <p:sp>
-        <p:nvSpPr>
-          <p:cNvPr id="23" name="Text 21"/>
-          <p:cNvSpPr/>
-          <p:nvPr/>
-        </p:nvSpPr>
-        <p:spPr>
-          <a:xfrm>
-            <a:off x="4343400" y="3767328"/>
-            <a:ext cx="2697480" cy="457200"/>
-          </a:xfrm>
-          <a:prstGeom prst="rect">
-            <a:avLst/>
-          </a:prstGeom>
-          <a:noFill/>
-          <a:ln/>
-        </p:spPr>
-        <p:txBody>
-          <a:bodyPr wrap="square" rtlCol="0" anchor="t"/>
-          <a:lstStyle/>
-          <a:p>
-            <a:pPr indent="0" marL="0">
-              <a:buNone/>
-            </a:pPr>
-            <a:r>
-              <a:rPr lang="en-US" sz="1150" b="1" dirty="0">
-                <a:solidFill>
-                  <a:srgbClr val="11100D"/>
-                </a:solidFill>
-                <a:latin typeface="IBM Plex Sans" pitchFamily="34" charset="0"/>
-                <a:ea typeface="IBM Plex Sans" pitchFamily="34" charset="-122"/>
-                <a:cs typeface="IBM Plex Sans" pitchFamily="34" charset="-120"/>
-              </a:rPr>
-              <a:t>Feita pra durar, reparar e voltar ao ciclo</a:t>
-            </a:r>
-            <a:endParaRPr lang="en-US" sz="1150" dirty="0"/>
-          </a:p>
-        </p:txBody>
-      </p:sp>
-      <p:sp>
-        <p:nvSpPr>
-          <p:cNvPr id="24" name="Text 22"/>
-          <p:cNvSpPr/>
-          <p:nvPr/>
-        </p:nvSpPr>
-        <p:spPr>
-          <a:xfrm>
-            <a:off x="4343400" y="4315968"/>
+              <a:t>Fica na sala</a:t>
+            </a:r>
+            <a:endParaRPr lang="en-US" sz="1400" dirty="0"/>
+          </a:p>
+        </p:txBody>
+      </p:sp>
+      <p:sp>
+        <p:nvSpPr>
+          <p:cNvPr id="21" name="Text 19"/>
+          <p:cNvSpPr/>
+          <p:nvPr/>
+        </p:nvSpPr>
+        <p:spPr>
+          <a:xfrm>
+            <a:off x="4572000" y="4315968"/>
             <a:ext cx="1463040" cy="237744"/>
           </a:xfrm>
           <a:prstGeom prst="rect">
@@ -8407,7 +7704,7 @@
       </p:sp>
       <p:pic>
         <p:nvPicPr>
-          <p:cNvPr id="25" name="Image 0" descr="site/assets/product-hero.png">    </p:cNvPr>
+          <p:cNvPr id="22" name="Image 0" descr="site/assets/product-hero.png">    </p:cNvPr>
           <p:cNvPicPr>
             <a:picLocks noChangeAspect="1"/>
           </p:cNvPicPr>
@@ -8421,8 +7718,8 @@
         </p:blipFill>
         <p:spPr>
           <a:xfrm>
-            <a:off x="7178040" y="2011680"/>
-            <a:ext cx="1828800" cy="1649896"/>
+            <a:off x="7040880" y="2377440"/>
+            <a:ext cx="1920240" cy="1732390"/>
           </a:xfrm>
           <a:prstGeom prst="rect">
             <a:avLst/>
@@ -8431,14 +7728,14 @@
       </p:pic>
       <p:sp>
         <p:nvSpPr>
-          <p:cNvPr id="26" name="Text 23"/>
-          <p:cNvSpPr/>
-          <p:nvPr/>
-        </p:nvSpPr>
-        <p:spPr>
-          <a:xfrm>
-            <a:off x="7040880" y="3794760"/>
-            <a:ext cx="2103120" cy="457200"/>
+          <p:cNvPr id="23" name="Text 20"/>
+          <p:cNvSpPr/>
+          <p:nvPr/>
+        </p:nvSpPr>
+        <p:spPr>
+          <a:xfrm>
+            <a:off x="411480" y="4828032"/>
+            <a:ext cx="8321040" cy="256032"/>
           </a:xfrm>
           <a:prstGeom prst="rect">
             <a:avLst/>
@@ -8450,50 +7747,11 @@
           <a:bodyPr wrap="square" rtlCol="0" anchor="ctr"/>
           <a:lstStyle/>
           <a:p>
-            <a:pPr algn="ctr" indent="0" marL="0">
-              <a:buNone/>
-            </a:pPr>
-            <a:r>
-              <a:rPr lang="en-US" sz="1100" i="1" dirty="0">
-                <a:solidFill>
-                  <a:srgbClr val="8A4A22"/>
-                </a:solidFill>
-                <a:latin typeface="Instrument Serif" pitchFamily="34" charset="0"/>
-                <a:ea typeface="Instrument Serif" pitchFamily="34" charset="-122"/>
-                <a:cs typeface="Instrument Serif" pitchFamily="34" charset="-120"/>
-              </a:rPr>
-              <a:t>cada peça muda com o lote de madeira</a:t>
-            </a:r>
-            <a:endParaRPr lang="en-US" sz="1100" dirty="0"/>
-          </a:p>
-        </p:txBody>
-      </p:sp>
-      <p:sp>
-        <p:nvSpPr>
-          <p:cNvPr id="27" name="Text 24"/>
-          <p:cNvSpPr/>
-          <p:nvPr/>
-        </p:nvSpPr>
-        <p:spPr>
-          <a:xfrm>
-            <a:off x="411480" y="4809744"/>
-            <a:ext cx="8321040" cy="274320"/>
-          </a:xfrm>
-          <a:prstGeom prst="rect">
-            <a:avLst/>
-          </a:prstGeom>
-          <a:noFill/>
-          <a:ln/>
-        </p:spPr>
-        <p:txBody>
-          <a:bodyPr wrap="square" rtlCol="0" anchor="ctr"/>
-          <a:lstStyle/>
-          <a:p>
-            <a:pPr indent="0" marL="0">
-              <a:buNone/>
-            </a:pPr>
-            <a:r>
-              <a:rPr lang="en-US" sz="850" spc="200" kern="0" dirty="0">
+            <a:pPr indent="0" marL="0">
+              <a:buNone/>
+            </a:pPr>
+            <a:r>
+              <a:rPr lang="en-US" sz="800" spc="200" kern="0" dirty="0">
                 <a:solidFill>
                   <a:srgbClr val="8A7B60"/>
                 </a:solidFill>
@@ -8503,7 +7761,7 @@
               </a:rPr>
               <a:t>Luiza Britto · Design Thinking e Prototipagem · Insper · 02 jul 2026</a:t>
             </a:r>
-            <a:endParaRPr lang="en-US" sz="850" dirty="0"/>
+            <a:endParaRPr lang="en-US" sz="800" dirty="0"/>
           </a:p>
         </p:txBody>
       </p:sp>
@@ -8667,8 +7925,8 @@
         </p:nvSpPr>
         <p:spPr>
           <a:xfrm>
-            <a:off x="411480" y="310896"/>
-            <a:ext cx="7315200" cy="274320"/>
+            <a:off x="411480" y="329184"/>
+            <a:ext cx="8229600" cy="274320"/>
           </a:xfrm>
           <a:prstGeom prst="rect">
             <a:avLst/>
@@ -8680,7 +7938,7 @@
           <a:bodyPr wrap="square" rtlCol="0" anchor="ctr"/>
           <a:lstStyle/>
           <a:p>
-            <a:pPr algn="l" indent="0" marL="0">
+            <a:pPr indent="0" marL="0">
               <a:buNone/>
             </a:pPr>
             <a:r>
@@ -8692,7 +7950,7 @@
                 <a:ea typeface="IBM Plex Mono" pitchFamily="34" charset="-122"/>
                 <a:cs typeface="IBM Plex Mono" pitchFamily="34" charset="-120"/>
               </a:rPr>
-              <a:t>2 · PROTÓTIPO FÍSICO — DEMONSTRAÇÃO AO VIVO</a:t>
+              <a:t>PROTÓTIPO FÍSICO · DEMONSTRAÇÃO AO VIVO</a:t>
             </a:r>
             <a:endParaRPr lang="en-US" sz="1050" dirty="0"/>
           </a:p>
@@ -8706,8 +7964,8 @@
         </p:nvSpPr>
         <p:spPr>
           <a:xfrm>
-            <a:off x="384048" y="603504"/>
-            <a:ext cx="4114800" cy="768096"/>
+            <a:off x="384048" y="713232"/>
+            <a:ext cx="4023360" cy="914400"/>
           </a:xfrm>
           <a:prstGeom prst="rect">
             <a:avLst/>
@@ -8719,14 +7977,14 @@
           <a:bodyPr wrap="square" rtlCol="0" anchor="t"/>
           <a:lstStyle/>
           <a:p>
-            <a:pPr algn="l" indent="0" marL="0">
+            <a:pPr indent="0" marL="0">
               <a:lnSpc>
-                <a:spcPts val="3612"/>
+                <a:spcPts val="3956"/>
               </a:lnSpc>
               <a:buNone/>
             </a:pPr>
             <a:r>
-              <a:rPr lang="en-US" sz="4200" dirty="0">
+              <a:rPr lang="en-US" sz="4600" dirty="0">
                 <a:solidFill>
                   <a:srgbClr val="EFE7D6"/>
                 </a:solidFill>
@@ -8736,17 +7994,17 @@
               </a:rPr>
               <a:t>A CADEIRA,</a:t>
             </a:r>
-            <a:endParaRPr lang="en-US" sz="4200" dirty="0"/>
-          </a:p>
-          <a:p>
-            <a:pPr algn="l" indent="0" marL="0">
+            <a:endParaRPr lang="en-US" sz="4600" dirty="0"/>
+          </a:p>
+          <a:p>
+            <a:pPr indent="0" marL="0">
               <a:lnSpc>
-                <a:spcPts val="3612"/>
+                <a:spcPts val="3956"/>
               </a:lnSpc>
               <a:buNone/>
             </a:pPr>
             <a:r>
-              <a:rPr lang="en-US" sz="4200" dirty="0">
+              <a:rPr lang="en-US" sz="4600" dirty="0">
                 <a:solidFill>
                   <a:srgbClr val="EFE7D6"/>
                 </a:solidFill>
@@ -8756,7 +8014,7 @@
               </a:rPr>
               <a:t>POR PARTES.</a:t>
             </a:r>
-            <a:endParaRPr lang="en-US" sz="4200" dirty="0"/>
+            <a:endParaRPr lang="en-US" sz="4600" dirty="0"/>
           </a:p>
         </p:txBody>
       </p:sp>
@@ -8776,8 +8034,8 @@
         </p:blipFill>
         <p:spPr>
           <a:xfrm>
-            <a:off x="457200" y="1965960"/>
-            <a:ext cx="3383280" cy="3052307"/>
+            <a:off x="384048" y="2240280"/>
+            <a:ext cx="3291840" cy="2969812"/>
           </a:xfrm>
           <a:prstGeom prst="rect">
             <a:avLst/>
@@ -8786,14 +8044,34 @@
       </p:pic>
       <p:sp>
         <p:nvSpPr>
-          <p:cNvPr id="11" name="Text 8"/>
-          <p:cNvSpPr/>
-          <p:nvPr/>
-        </p:nvSpPr>
-        <p:spPr>
-          <a:xfrm>
-            <a:off x="4206240" y="1481328"/>
-            <a:ext cx="4572000" cy="201168"/>
+          <p:cNvPr id="11" name="Shape 8"/>
+          <p:cNvSpPr/>
+          <p:nvPr/>
+        </p:nvSpPr>
+        <p:spPr>
+          <a:xfrm>
+            <a:off x="4343400" y="1024128"/>
+            <a:ext cx="4690872" cy="8230"/>
+          </a:xfrm>
+          <a:prstGeom prst="rect">
+            <a:avLst/>
+          </a:prstGeom>
+          <a:solidFill>
+            <a:srgbClr val="4A4438"/>
+          </a:solidFill>
+          <a:ln/>
+        </p:spPr>
+      </p:sp>
+      <p:sp>
+        <p:nvSpPr>
+          <p:cNvPr id="12" name="Text 9"/>
+          <p:cNvSpPr/>
+          <p:nvPr/>
+        </p:nvSpPr>
+        <p:spPr>
+          <a:xfrm>
+            <a:off x="4343400" y="1097280"/>
+            <a:ext cx="1828800" cy="219456"/>
           </a:xfrm>
           <a:prstGeom prst="rect">
             <a:avLst/>
@@ -8825,14 +8103,14 @@
       </p:sp>
       <p:sp>
         <p:nvSpPr>
-          <p:cNvPr id="12" name="Text 9"/>
-          <p:cNvSpPr/>
-          <p:nvPr/>
-        </p:nvSpPr>
-        <p:spPr>
-          <a:xfrm>
-            <a:off x="4206240" y="1673352"/>
-            <a:ext cx="4114800" cy="274320"/>
+          <p:cNvPr id="13" name="Text 10"/>
+          <p:cNvSpPr/>
+          <p:nvPr/>
+        </p:nvSpPr>
+        <p:spPr>
+          <a:xfrm>
+            <a:off x="5806440" y="1069848"/>
+            <a:ext cx="2377440" cy="292608"/>
           </a:xfrm>
           <a:prstGeom prst="rect">
             <a:avLst/>
@@ -8848,7 +8126,7 @@
               <a:buNone/>
             </a:pPr>
             <a:r>
-              <a:rPr lang="en-US" sz="1250" b="1" dirty="0">
+              <a:rPr lang="en-US" sz="1300" b="1" dirty="0">
                 <a:solidFill>
                   <a:srgbClr val="EFE7D6"/>
                 </a:solidFill>
@@ -8856,21 +8134,21 @@
                 <a:ea typeface="IBM Plex Sans" pitchFamily="34" charset="-122"/>
                 <a:cs typeface="IBM Plex Sans" pitchFamily="34" charset="-120"/>
               </a:rPr>
-              <a:t>Madeira maciça reaproveitada</a:t>
-            </a:r>
-            <a:endParaRPr lang="en-US" sz="1250" dirty="0"/>
-          </a:p>
-        </p:txBody>
-      </p:sp>
-      <p:sp>
-        <p:nvSpPr>
-          <p:cNvPr id="13" name="Text 10"/>
-          <p:cNvSpPr/>
-          <p:nvPr/>
-        </p:nvSpPr>
-        <p:spPr>
-          <a:xfrm>
-            <a:off x="8247888" y="1536192"/>
+              <a:t>Madeira reaproveitada</a:t>
+            </a:r>
+            <a:endParaRPr lang="en-US" sz="1300" dirty="0"/>
+          </a:p>
+        </p:txBody>
+      </p:sp>
+      <p:sp>
+        <p:nvSpPr>
+          <p:cNvPr id="14" name="Text 11"/>
+          <p:cNvSpPr/>
+          <p:nvPr/>
+        </p:nvSpPr>
+        <p:spPr>
+          <a:xfrm>
+            <a:off x="8247888" y="1088136"/>
             <a:ext cx="777240" cy="237744"/>
           </a:xfrm>
           <a:prstGeom prst="rect">
@@ -8907,14 +8185,14 @@
       </p:sp>
       <p:sp>
         <p:nvSpPr>
-          <p:cNvPr id="14" name="Shape 11"/>
-          <p:cNvSpPr/>
-          <p:nvPr/>
-        </p:nvSpPr>
-        <p:spPr>
-          <a:xfrm>
-            <a:off x="4206240" y="1412748"/>
-            <a:ext cx="4828032" cy="8230"/>
+          <p:cNvPr id="15" name="Shape 12"/>
+          <p:cNvSpPr/>
+          <p:nvPr/>
+        </p:nvSpPr>
+        <p:spPr>
+          <a:xfrm>
+            <a:off x="4343400" y="1737360"/>
+            <a:ext cx="4690872" cy="8230"/>
           </a:xfrm>
           <a:prstGeom prst="rect">
             <a:avLst/>
@@ -8927,14 +8205,14 @@
       </p:sp>
       <p:sp>
         <p:nvSpPr>
-          <p:cNvPr id="15" name="Text 12"/>
-          <p:cNvSpPr/>
-          <p:nvPr/>
-        </p:nvSpPr>
-        <p:spPr>
-          <a:xfrm>
-            <a:off x="4206240" y="2139696"/>
-            <a:ext cx="4572000" cy="201168"/>
+          <p:cNvPr id="16" name="Text 13"/>
+          <p:cNvSpPr/>
+          <p:nvPr/>
+        </p:nvSpPr>
+        <p:spPr>
+          <a:xfrm>
+            <a:off x="4343400" y="1810512"/>
+            <a:ext cx="1828800" cy="219456"/>
           </a:xfrm>
           <a:prstGeom prst="rect">
             <a:avLst/>
@@ -8966,14 +8244,14 @@
       </p:sp>
       <p:sp>
         <p:nvSpPr>
-          <p:cNvPr id="16" name="Text 13"/>
-          <p:cNvSpPr/>
-          <p:nvPr/>
-        </p:nvSpPr>
-        <p:spPr>
-          <a:xfrm>
-            <a:off x="4206240" y="2331720"/>
-            <a:ext cx="4114800" cy="274320"/>
+          <p:cNvPr id="17" name="Text 14"/>
+          <p:cNvSpPr/>
+          <p:nvPr/>
+        </p:nvSpPr>
+        <p:spPr>
+          <a:xfrm>
+            <a:off x="5806440" y="1783080"/>
+            <a:ext cx="2377440" cy="292608"/>
           </a:xfrm>
           <a:prstGeom prst="rect">
             <a:avLst/>
@@ -8989,7 +8267,7 @@
               <a:buNone/>
             </a:pPr>
             <a:r>
-              <a:rPr lang="en-US" sz="1250" b="1" dirty="0">
+              <a:rPr lang="en-US" sz="1300" b="1" dirty="0">
                 <a:solidFill>
                   <a:srgbClr val="EFE7D6"/>
                 </a:solidFill>
@@ -8997,21 +8275,21 @@
                 <a:ea typeface="IBM Plex Sans" pitchFamily="34" charset="-122"/>
                 <a:cs typeface="IBM Plex Sans" pitchFamily="34" charset="-120"/>
               </a:rPr>
-              <a:t>Bambu substituível — 4 estacas</a:t>
-            </a:r>
-            <a:endParaRPr lang="en-US" sz="1250" dirty="0"/>
-          </a:p>
-        </p:txBody>
-      </p:sp>
-      <p:sp>
-        <p:nvSpPr>
-          <p:cNvPr id="17" name="Text 14"/>
-          <p:cNvSpPr/>
-          <p:nvPr/>
-        </p:nvSpPr>
-        <p:spPr>
-          <a:xfrm>
-            <a:off x="8247888" y="2194560"/>
+              <a:t>Bambu — 4 estacas</a:t>
+            </a:r>
+            <a:endParaRPr lang="en-US" sz="1300" dirty="0"/>
+          </a:p>
+        </p:txBody>
+      </p:sp>
+      <p:sp>
+        <p:nvSpPr>
+          <p:cNvPr id="18" name="Text 15"/>
+          <p:cNvSpPr/>
+          <p:nvPr/>
+        </p:nvSpPr>
+        <p:spPr>
+          <a:xfrm>
+            <a:off x="8247888" y="1801368"/>
             <a:ext cx="777240" cy="237744"/>
           </a:xfrm>
           <a:prstGeom prst="rect">
@@ -9048,14 +8326,14 @@
       </p:sp>
       <p:sp>
         <p:nvSpPr>
-          <p:cNvPr id="18" name="Shape 15"/>
-          <p:cNvSpPr/>
-          <p:nvPr/>
-        </p:nvSpPr>
-        <p:spPr>
-          <a:xfrm>
-            <a:off x="4206240" y="2071116"/>
-            <a:ext cx="4828032" cy="8230"/>
+          <p:cNvPr id="19" name="Shape 16"/>
+          <p:cNvSpPr/>
+          <p:nvPr/>
+        </p:nvSpPr>
+        <p:spPr>
+          <a:xfrm>
+            <a:off x="4343400" y="2450592"/>
+            <a:ext cx="4690872" cy="8230"/>
           </a:xfrm>
           <a:prstGeom prst="rect">
             <a:avLst/>
@@ -9068,14 +8346,14 @@
       </p:sp>
       <p:sp>
         <p:nvSpPr>
-          <p:cNvPr id="19" name="Text 16"/>
-          <p:cNvSpPr/>
-          <p:nvPr/>
-        </p:nvSpPr>
-        <p:spPr>
-          <a:xfrm>
-            <a:off x="4206240" y="2798064"/>
-            <a:ext cx="4572000" cy="201168"/>
+          <p:cNvPr id="20" name="Text 17"/>
+          <p:cNvSpPr/>
+          <p:nvPr/>
+        </p:nvSpPr>
+        <p:spPr>
+          <a:xfrm>
+            <a:off x="4343400" y="2523744"/>
+            <a:ext cx="1828800" cy="219456"/>
           </a:xfrm>
           <a:prstGeom prst="rect">
             <a:avLst/>
@@ -9107,14 +8385,14 @@
       </p:sp>
       <p:sp>
         <p:nvSpPr>
-          <p:cNvPr id="20" name="Text 17"/>
-          <p:cNvSpPr/>
-          <p:nvPr/>
-        </p:nvSpPr>
-        <p:spPr>
-          <a:xfrm>
-            <a:off x="4206240" y="2990088"/>
-            <a:ext cx="4114800" cy="274320"/>
+          <p:cNvPr id="21" name="Text 18"/>
+          <p:cNvSpPr/>
+          <p:nvPr/>
+        </p:nvSpPr>
+        <p:spPr>
+          <a:xfrm>
+            <a:off x="5806440" y="2496312"/>
+            <a:ext cx="2377440" cy="292608"/>
           </a:xfrm>
           <a:prstGeom prst="rect">
             <a:avLst/>
@@ -9130,7 +8408,7 @@
               <a:buNone/>
             </a:pPr>
             <a:r>
-              <a:rPr lang="en-US" sz="1250" b="1" dirty="0">
+              <a:rPr lang="en-US" sz="1300" b="1" dirty="0">
                 <a:solidFill>
                   <a:srgbClr val="EFE7D6"/>
                 </a:solidFill>
@@ -9138,21 +8416,21 @@
                 <a:ea typeface="IBM Plex Sans" pitchFamily="34" charset="-122"/>
                 <a:cs typeface="IBM Plex Sans" pitchFamily="34" charset="-120"/>
               </a:rPr>
-              <a:t>Encaixe cavilhado, sem cola estrutural</a:t>
-            </a:r>
-            <a:endParaRPr lang="en-US" sz="1250" dirty="0"/>
-          </a:p>
-        </p:txBody>
-      </p:sp>
-      <p:sp>
-        <p:nvSpPr>
-          <p:cNvPr id="21" name="Text 18"/>
-          <p:cNvSpPr/>
-          <p:nvPr/>
-        </p:nvSpPr>
-        <p:spPr>
-          <a:xfrm>
-            <a:off x="8247888" y="2852928"/>
+              <a:t>Encaixe, sem cola</a:t>
+            </a:r>
+            <a:endParaRPr lang="en-US" sz="1300" dirty="0"/>
+          </a:p>
+        </p:txBody>
+      </p:sp>
+      <p:sp>
+        <p:nvSpPr>
+          <p:cNvPr id="22" name="Text 19"/>
+          <p:cNvSpPr/>
+          <p:nvPr/>
+        </p:nvSpPr>
+        <p:spPr>
+          <a:xfrm>
+            <a:off x="8247888" y="2514600"/>
             <a:ext cx="777240" cy="237744"/>
           </a:xfrm>
           <a:prstGeom prst="rect">
@@ -9189,14 +8467,14 @@
       </p:sp>
       <p:sp>
         <p:nvSpPr>
-          <p:cNvPr id="22" name="Shape 19"/>
-          <p:cNvSpPr/>
-          <p:nvPr/>
-        </p:nvSpPr>
-        <p:spPr>
-          <a:xfrm>
-            <a:off x="4206240" y="2729484"/>
-            <a:ext cx="4828032" cy="8230"/>
+          <p:cNvPr id="23" name="Shape 20"/>
+          <p:cNvSpPr/>
+          <p:nvPr/>
+        </p:nvSpPr>
+        <p:spPr>
+          <a:xfrm>
+            <a:off x="4343400" y="3163824"/>
+            <a:ext cx="4690872" cy="8230"/>
           </a:xfrm>
           <a:prstGeom prst="rect">
             <a:avLst/>
@@ -9209,14 +8487,14 @@
       </p:sp>
       <p:sp>
         <p:nvSpPr>
-          <p:cNvPr id="23" name="Text 20"/>
-          <p:cNvSpPr/>
-          <p:nvPr/>
-        </p:nvSpPr>
-        <p:spPr>
-          <a:xfrm>
-            <a:off x="4206240" y="3456432"/>
-            <a:ext cx="4572000" cy="201168"/>
+          <p:cNvPr id="24" name="Text 21"/>
+          <p:cNvSpPr/>
+          <p:nvPr/>
+        </p:nvSpPr>
+        <p:spPr>
+          <a:xfrm>
+            <a:off x="4343400" y="3236976"/>
+            <a:ext cx="1828800" cy="219456"/>
           </a:xfrm>
           <a:prstGeom prst="rect">
             <a:avLst/>
@@ -9248,14 +8526,14 @@
       </p:sp>
       <p:sp>
         <p:nvSpPr>
-          <p:cNvPr id="24" name="Text 21"/>
-          <p:cNvSpPr/>
-          <p:nvPr/>
-        </p:nvSpPr>
-        <p:spPr>
-          <a:xfrm>
-            <a:off x="4206240" y="3648456"/>
-            <a:ext cx="4114800" cy="274320"/>
+          <p:cNvPr id="25" name="Text 22"/>
+          <p:cNvSpPr/>
+          <p:nvPr/>
+        </p:nvSpPr>
+        <p:spPr>
+          <a:xfrm>
+            <a:off x="5806440" y="3209544"/>
+            <a:ext cx="2377440" cy="292608"/>
           </a:xfrm>
           <a:prstGeom prst="rect">
             <a:avLst/>
@@ -9271,7 +8549,7 @@
               <a:buNone/>
             </a:pPr>
             <a:r>
-              <a:rPr lang="en-US" sz="1250" b="1" dirty="0">
+              <a:rPr lang="en-US" sz="1300" b="1" dirty="0">
                 <a:solidFill>
                   <a:srgbClr val="EFE7D6"/>
                 </a:solidFill>
@@ -9279,21 +8557,21 @@
                 <a:ea typeface="IBM Plex Sans" pitchFamily="34" charset="-122"/>
                 <a:cs typeface="IBM Plex Sans" pitchFamily="34" charset="-120"/>
               </a:rPr>
-              <a:t>Verniz + vinil: resiste a unha, xixi e mordida</a:t>
-            </a:r>
-            <a:endParaRPr lang="en-US" sz="1250" dirty="0"/>
-          </a:p>
-        </p:txBody>
-      </p:sp>
-      <p:sp>
-        <p:nvSpPr>
-          <p:cNvPr id="25" name="Text 22"/>
-          <p:cNvSpPr/>
-          <p:nvPr/>
-        </p:nvSpPr>
-        <p:spPr>
-          <a:xfrm>
-            <a:off x="8247888" y="3511296"/>
+              <a:t>Verniz + vinil</a:t>
+            </a:r>
+            <a:endParaRPr lang="en-US" sz="1300" dirty="0"/>
+          </a:p>
+        </p:txBody>
+      </p:sp>
+      <p:sp>
+        <p:nvSpPr>
+          <p:cNvPr id="26" name="Text 23"/>
+          <p:cNvSpPr/>
+          <p:nvPr/>
+        </p:nvSpPr>
+        <p:spPr>
+          <a:xfrm>
+            <a:off x="8247888" y="3227832"/>
             <a:ext cx="777240" cy="237744"/>
           </a:xfrm>
           <a:prstGeom prst="rect">
@@ -9330,14 +8608,14 @@
       </p:sp>
       <p:sp>
         <p:nvSpPr>
-          <p:cNvPr id="26" name="Shape 23"/>
-          <p:cNvSpPr/>
-          <p:nvPr/>
-        </p:nvSpPr>
-        <p:spPr>
-          <a:xfrm>
-            <a:off x="4206240" y="3387852"/>
-            <a:ext cx="4828032" cy="8230"/>
+          <p:cNvPr id="27" name="Shape 24"/>
+          <p:cNvSpPr/>
+          <p:nvPr/>
+        </p:nvSpPr>
+        <p:spPr>
+          <a:xfrm>
+            <a:off x="4343400" y="3877056"/>
+            <a:ext cx="4690872" cy="8230"/>
           </a:xfrm>
           <a:prstGeom prst="rect">
             <a:avLst/>
@@ -9350,14 +8628,14 @@
       </p:sp>
       <p:sp>
         <p:nvSpPr>
-          <p:cNvPr id="27" name="Text 24"/>
-          <p:cNvSpPr/>
-          <p:nvPr/>
-        </p:nvSpPr>
-        <p:spPr>
-          <a:xfrm>
-            <a:off x="4206240" y="4114800"/>
-            <a:ext cx="4572000" cy="201168"/>
+          <p:cNvPr id="28" name="Text 25"/>
+          <p:cNvSpPr/>
+          <p:nvPr/>
+        </p:nvSpPr>
+        <p:spPr>
+          <a:xfrm>
+            <a:off x="4343400" y="3950208"/>
+            <a:ext cx="1828800" cy="219456"/>
           </a:xfrm>
           <a:prstGeom prst="rect">
             <a:avLst/>
@@ -9389,14 +8667,14 @@
       </p:sp>
       <p:sp>
         <p:nvSpPr>
-          <p:cNvPr id="28" name="Text 25"/>
-          <p:cNvSpPr/>
-          <p:nvPr/>
-        </p:nvSpPr>
-        <p:spPr>
-          <a:xfrm>
-            <a:off x="4206240" y="4306824"/>
-            <a:ext cx="4114800" cy="274320"/>
+          <p:cNvPr id="29" name="Text 26"/>
+          <p:cNvSpPr/>
+          <p:nvPr/>
+        </p:nvSpPr>
+        <p:spPr>
+          <a:xfrm>
+            <a:off x="5806440" y="3922776"/>
+            <a:ext cx="2377440" cy="292608"/>
           </a:xfrm>
           <a:prstGeom prst="rect">
             <a:avLst/>
@@ -9412,7 +8690,7 @@
               <a:buNone/>
             </a:pPr>
             <a:r>
-              <a:rPr lang="en-US" sz="1250" b="1" dirty="0">
+              <a:rPr lang="en-US" sz="1300" b="1" dirty="0">
                 <a:solidFill>
                   <a:srgbClr val="EFE7D6"/>
                 </a:solidFill>
@@ -9420,21 +8698,21 @@
                 <a:ea typeface="IBM Plex Sans" pitchFamily="34" charset="-122"/>
                 <a:cs typeface="IBM Plex Sans" pitchFamily="34" charset="-120"/>
               </a:rPr>
-              <a:t>Tecidos — capa removível e lavável</a:t>
-            </a:r>
-            <a:endParaRPr lang="en-US" sz="1250" dirty="0"/>
-          </a:p>
-        </p:txBody>
-      </p:sp>
-      <p:sp>
-        <p:nvSpPr>
-          <p:cNvPr id="29" name="Text 26"/>
-          <p:cNvSpPr/>
-          <p:nvPr/>
-        </p:nvSpPr>
-        <p:spPr>
-          <a:xfrm>
-            <a:off x="8247888" y="4169664"/>
+              <a:t>Tecidos</a:t>
+            </a:r>
+            <a:endParaRPr lang="en-US" sz="1300" dirty="0"/>
+          </a:p>
+        </p:txBody>
+      </p:sp>
+      <p:sp>
+        <p:nvSpPr>
+          <p:cNvPr id="30" name="Text 27"/>
+          <p:cNvSpPr/>
+          <p:nvPr/>
+        </p:nvSpPr>
+        <p:spPr>
+          <a:xfrm>
+            <a:off x="8247888" y="3941064"/>
             <a:ext cx="777240" cy="237744"/>
           </a:xfrm>
           <a:prstGeom prst="rect">
@@ -9471,34 +8749,14 @@
       </p:sp>
       <p:sp>
         <p:nvSpPr>
-          <p:cNvPr id="30" name="Shape 27"/>
-          <p:cNvSpPr/>
-          <p:nvPr/>
-        </p:nvSpPr>
-        <p:spPr>
-          <a:xfrm>
-            <a:off x="4206240" y="4046220"/>
-            <a:ext cx="4828032" cy="8230"/>
-          </a:xfrm>
-          <a:prstGeom prst="rect">
-            <a:avLst/>
-          </a:prstGeom>
-          <a:solidFill>
-            <a:srgbClr val="4A4438"/>
-          </a:solidFill>
-          <a:ln/>
-        </p:spPr>
-      </p:sp>
-      <p:sp>
-        <p:nvSpPr>
           <p:cNvPr id="31" name="Text 28"/>
           <p:cNvSpPr/>
           <p:nvPr/>
         </p:nvSpPr>
         <p:spPr>
           <a:xfrm>
-            <a:off x="411480" y="4809744"/>
-            <a:ext cx="8321040" cy="274320"/>
+            <a:off x="5806440" y="3529584"/>
+            <a:ext cx="3017520" cy="237744"/>
           </a:xfrm>
           <a:prstGeom prst="rect">
             <a:avLst/>
@@ -9514,7 +8772,46 @@
               <a:buNone/>
             </a:pPr>
             <a:r>
-              <a:rPr lang="en-US" sz="850" spc="200" kern="0" dirty="0">
+              <a:rPr lang="en-US" sz="1100" i="1" dirty="0">
+                <a:solidFill>
+                  <a:srgbClr val="BFB49E"/>
+                </a:solidFill>
+                <a:latin typeface="Instrument Serif" pitchFamily="34" charset="0"/>
+                <a:ea typeface="Instrument Serif" pitchFamily="34" charset="-122"/>
+                <a:cs typeface="Instrument Serif" pitchFamily="34" charset="-120"/>
+              </a:rPr>
+              <a:t>resiste a unha, xixi e mordida</a:t>
+            </a:r>
+            <a:endParaRPr lang="en-US" sz="1100" dirty="0"/>
+          </a:p>
+        </p:txBody>
+      </p:sp>
+      <p:sp>
+        <p:nvSpPr>
+          <p:cNvPr id="32" name="Text 29"/>
+          <p:cNvSpPr/>
+          <p:nvPr/>
+        </p:nvSpPr>
+        <p:spPr>
+          <a:xfrm>
+            <a:off x="411480" y="4828032"/>
+            <a:ext cx="8321040" cy="256032"/>
+          </a:xfrm>
+          <a:prstGeom prst="rect">
+            <a:avLst/>
+          </a:prstGeom>
+          <a:noFill/>
+          <a:ln/>
+        </p:spPr>
+        <p:txBody>
+          <a:bodyPr wrap="square" rtlCol="0" anchor="ctr"/>
+          <a:lstStyle/>
+          <a:p>
+            <a:pPr indent="0" marL="0">
+              <a:buNone/>
+            </a:pPr>
+            <a:r>
+              <a:rPr lang="en-US" sz="800" spc="200" kern="0" dirty="0">
                 <a:solidFill>
                   <a:srgbClr val="BFB49E"/>
                 </a:solidFill>
@@ -9524,7 +8821,7 @@
               </a:rPr>
               <a:t>Luiza Britto · Design Thinking e Prototipagem · Insper · 02 jul 2026</a:t>
             </a:r>
-            <a:endParaRPr lang="en-US" sz="850" dirty="0"/>
+            <a:endParaRPr lang="en-US" sz="800" dirty="0"/>
           </a:p>
         </p:txBody>
       </p:sp>
@@ -9585,36 +8882,14 @@
       </p:pic>
       <p:sp>
         <p:nvSpPr>
-          <p:cNvPr id="3" name="Shape 0"/>
-          <p:cNvSpPr/>
-          <p:nvPr/>
-        </p:nvSpPr>
-        <p:spPr>
-          <a:xfrm>
-            <a:off x="5532120" y="0"/>
-            <a:ext cx="457200" cy="5143500"/>
-          </a:xfrm>
-          <a:prstGeom prst="rect">
-            <a:avLst/>
-          </a:prstGeom>
-          <a:solidFill>
-            <a:srgbClr val="11100D">
-              <a:alpha val="65000"/>
-            </a:srgbClr>
-          </a:solidFill>
-          <a:ln/>
-        </p:spPr>
-      </p:sp>
-      <p:sp>
-        <p:nvSpPr>
-          <p:cNvPr id="4" name="Text 1"/>
-          <p:cNvSpPr/>
-          <p:nvPr/>
-        </p:nvSpPr>
-        <p:spPr>
-          <a:xfrm>
-            <a:off x="6172200" y="457200"/>
-            <a:ext cx="2834640" cy="274320"/>
+          <p:cNvPr id="3" name="Text 0"/>
+          <p:cNvSpPr/>
+          <p:nvPr/>
+        </p:nvSpPr>
+        <p:spPr>
+          <a:xfrm>
+            <a:off x="6199632" y="502920"/>
+            <a:ext cx="8229600" cy="274320"/>
           </a:xfrm>
           <a:prstGeom prst="rect">
             <a:avLst/>
@@ -9626,7 +8901,7 @@
           <a:bodyPr wrap="square" rtlCol="0" anchor="ctr"/>
           <a:lstStyle/>
           <a:p>
-            <a:pPr algn="l" indent="0" marL="0">
+            <a:pPr indent="0" marL="0">
               <a:buNone/>
             </a:pPr>
             <a:r>
@@ -9638,7 +8913,7 @@
                 <a:ea typeface="IBM Plex Mono" pitchFamily="34" charset="-122"/>
                 <a:cs typeface="IBM Plex Mono" pitchFamily="34" charset="-120"/>
               </a:rPr>
-              <a:t>2 · PROTÓTIPO FÍSICO — TESTE EM USO REAL</a:t>
+              <a:t>TESTE EM USO REAL</a:t>
             </a:r>
             <a:endParaRPr lang="en-US" sz="1050" dirty="0"/>
           </a:p>
@@ -9646,14 +8921,14 @@
       </p:sp>
       <p:sp>
         <p:nvSpPr>
-          <p:cNvPr id="5" name="Text 2"/>
-          <p:cNvSpPr/>
-          <p:nvPr/>
-        </p:nvSpPr>
-        <p:spPr>
-          <a:xfrm>
-            <a:off x="6144768" y="786384"/>
-            <a:ext cx="2926080" cy="694944"/>
+          <p:cNvPr id="4" name="Text 1"/>
+          <p:cNvSpPr/>
+          <p:nvPr/>
+        </p:nvSpPr>
+        <p:spPr>
+          <a:xfrm>
+            <a:off x="6172200" y="841248"/>
+            <a:ext cx="2834640" cy="795130"/>
           </a:xfrm>
           <a:prstGeom prst="rect">
             <a:avLst/>
@@ -9665,14 +8940,14 @@
           <a:bodyPr wrap="square" rtlCol="0" anchor="t"/>
           <a:lstStyle/>
           <a:p>
-            <a:pPr algn="l" indent="0" marL="0">
+            <a:pPr indent="0" marL="0">
               <a:lnSpc>
-                <a:spcPts val="3268"/>
+                <a:spcPts val="3440"/>
               </a:lnSpc>
               <a:buNone/>
             </a:pPr>
             <a:r>
-              <a:rPr lang="en-US" sz="3800" dirty="0">
+              <a:rPr lang="en-US" sz="4000" dirty="0">
                 <a:solidFill>
                   <a:srgbClr val="EFE7D6"/>
                 </a:solidFill>
@@ -9682,17 +8957,17 @@
               </a:rPr>
               <a:t>NA SALA,</a:t>
             </a:r>
-            <a:endParaRPr lang="en-US" sz="3800" dirty="0"/>
-          </a:p>
-          <a:p>
-            <a:pPr algn="l" indent="0" marL="0">
+            <a:endParaRPr lang="en-US" sz="4000" dirty="0"/>
+          </a:p>
+          <a:p>
+            <a:pPr indent="0" marL="0">
               <a:lnSpc>
-                <a:spcPts val="3268"/>
+                <a:spcPts val="3440"/>
               </a:lnSpc>
               <a:buNone/>
             </a:pPr>
             <a:r>
-              <a:rPr lang="en-US" sz="3800" dirty="0">
+              <a:rPr lang="en-US" sz="4000" dirty="0">
                 <a:solidFill>
                   <a:srgbClr val="EFE7D6"/>
                 </a:solidFill>
@@ -9702,20 +8977,20 @@
               </a:rPr>
               <a:t>COM CACHORRO.</a:t>
             </a:r>
-            <a:endParaRPr lang="en-US" sz="3800" dirty="0"/>
-          </a:p>
-        </p:txBody>
-      </p:sp>
-      <p:sp>
-        <p:nvSpPr>
-          <p:cNvPr id="6" name="Text 3"/>
-          <p:cNvSpPr/>
-          <p:nvPr/>
-        </p:nvSpPr>
-        <p:spPr>
-          <a:xfrm>
-            <a:off x="6172200" y="2377440"/>
-            <a:ext cx="2743200" cy="1554480"/>
+            <a:endParaRPr lang="en-US" sz="4000" dirty="0"/>
+          </a:p>
+        </p:txBody>
+      </p:sp>
+      <p:sp>
+        <p:nvSpPr>
+          <p:cNvPr id="5" name="Text 2"/>
+          <p:cNvSpPr/>
+          <p:nvPr/>
+        </p:nvSpPr>
+        <p:spPr>
+          <a:xfrm>
+            <a:off x="6199632" y="2514600"/>
+            <a:ext cx="2743200" cy="1463040"/>
           </a:xfrm>
           <a:prstGeom prst="rect">
             <a:avLst/>
@@ -9729,13 +9004,13 @@
           <a:p>
             <a:pPr marL="342900" indent="-342900">
               <a:lnSpc>
-                <a:spcPct val="135000"/>
+                <a:spcPct val="150000"/>
               </a:lnSpc>
               <a:buSzPct val="100000"/>
               <a:buChar char="•"/>
             </a:pPr>
             <a:r>
-              <a:rPr lang="en-US" sz="1200" dirty="0">
+              <a:rPr lang="en-US" sz="1300" dirty="0">
                 <a:solidFill>
                   <a:srgbClr val="EFE7D6"/>
                 </a:solidFill>
@@ -9743,20 +9018,20 @@
                 <a:ea typeface="IBM Plex Sans" pitchFamily="34" charset="-122"/>
                 <a:cs typeface="IBM Plex Sans" pitchFamily="34" charset="-120"/>
               </a:rPr>
-              <a:t>Subiu sozinho no primeiro dia — altura pensada pra cão pequeno.</a:t>
-            </a:r>
-            <a:endParaRPr lang="en-US" sz="1200" dirty="0"/>
+              <a:t>Subiu sozinho no primeiro dia.</a:t>
+            </a:r>
+            <a:endParaRPr lang="en-US" sz="1300" dirty="0"/>
           </a:p>
           <a:p>
             <a:pPr marL="342900" indent="-342900">
               <a:lnSpc>
-                <a:spcPct val="135000"/>
+                <a:spcPct val="150000"/>
               </a:lnSpc>
               <a:buSzPct val="100000"/>
               <a:buChar char="•"/>
             </a:pPr>
             <a:r>
-              <a:rPr lang="en-US" sz="1200" dirty="0">
+              <a:rPr lang="en-US" sz="1300" dirty="0">
                 <a:solidFill>
                   <a:srgbClr val="EFE7D6"/>
                 </a:solidFill>
@@ -9764,20 +9039,20 @@
                 <a:ea typeface="IBM Plex Sans" pitchFamily="34" charset="-122"/>
                 <a:cs typeface="IBM Plex Sans" pitchFamily="34" charset="-120"/>
               </a:rPr>
-              <a:t>Aguentou pata, peso e soneca comprida.</a:t>
-            </a:r>
-            <a:endParaRPr lang="en-US" sz="1200" dirty="0"/>
+              <a:t>Aguentou pata, peso e soneca.</a:t>
+            </a:r>
+            <a:endParaRPr lang="en-US" sz="1300" dirty="0"/>
           </a:p>
           <a:p>
             <a:pPr marL="342900" indent="-342900">
               <a:lnSpc>
-                <a:spcPct val="135000"/>
+                <a:spcPct val="150000"/>
               </a:lnSpc>
               <a:buSzPct val="100000"/>
               <a:buChar char="•"/>
             </a:pPr>
             <a:r>
-              <a:rPr lang="en-US" sz="1200" dirty="0">
+              <a:rPr lang="en-US" sz="1300" dirty="0">
                 <a:solidFill>
                   <a:srgbClr val="EFE7D6"/>
                 </a:solidFill>
@@ -9787,19 +9062,19 @@
               </a:rPr>
               <a:t>Ficou na sala. Não no canto.</a:t>
             </a:r>
-            <a:endParaRPr lang="en-US" sz="1200" dirty="0"/>
-          </a:p>
-        </p:txBody>
-      </p:sp>
-      <p:sp>
-        <p:nvSpPr>
-          <p:cNvPr id="7" name="Text 4"/>
+            <a:endParaRPr lang="en-US" sz="1300" dirty="0"/>
+          </a:p>
+        </p:txBody>
+      </p:sp>
+      <p:sp>
+        <p:nvSpPr>
+          <p:cNvPr id="6" name="Text 3"/>
           <p:cNvSpPr/>
           <p:nvPr/>
         </p:nvSpPr>
         <p:spPr>
           <a:xfrm rot="-240000">
-            <a:off x="6172200" y="4114800"/>
+            <a:off x="6199632" y="4114800"/>
             <a:ext cx="2194560" cy="320040"/>
           </a:xfrm>
           <a:prstGeom prst="rect">
@@ -9832,14 +9107,14 @@
       </p:sp>
       <p:sp>
         <p:nvSpPr>
-          <p:cNvPr id="8" name="Text 5"/>
-          <p:cNvSpPr/>
-          <p:nvPr/>
-        </p:nvSpPr>
-        <p:spPr>
-          <a:xfrm>
-            <a:off x="411480" y="4809744"/>
-            <a:ext cx="8321040" cy="274320"/>
+          <p:cNvPr id="7" name="Text 4"/>
+          <p:cNvSpPr/>
+          <p:nvPr/>
+        </p:nvSpPr>
+        <p:spPr>
+          <a:xfrm>
+            <a:off x="411480" y="4828032"/>
+            <a:ext cx="8321040" cy="256032"/>
           </a:xfrm>
           <a:prstGeom prst="rect">
             <a:avLst/>
@@ -9855,7 +9130,7 @@
               <a:buNone/>
             </a:pPr>
             <a:r>
-              <a:rPr lang="en-US" sz="850" spc="200" kern="0" dirty="0">
+              <a:rPr lang="en-US" sz="800" spc="200" kern="0" dirty="0">
                 <a:solidFill>
                   <a:srgbClr val="BFB49E"/>
                 </a:solidFill>
@@ -9865,7 +9140,7 @@
               </a:rPr>
               <a:t>Luiza Britto · Design Thinking e Prototipagem · Insper · 02 jul 2026</a:t>
             </a:r>
-            <a:endParaRPr lang="en-US" sz="850" dirty="0"/>
+            <a:endParaRPr lang="en-US" sz="800" dirty="0"/>
           </a:p>
         </p:txBody>
       </p:sp>
@@ -10029,8 +9304,8 @@
         </p:nvSpPr>
         <p:spPr>
           <a:xfrm>
-            <a:off x="411480" y="310896"/>
-            <a:ext cx="7315200" cy="274320"/>
+            <a:off x="411480" y="329184"/>
+            <a:ext cx="8229600" cy="274320"/>
           </a:xfrm>
           <a:prstGeom prst="rect">
             <a:avLst/>
@@ -10042,7 +9317,7 @@
           <a:bodyPr wrap="square" rtlCol="0" anchor="ctr"/>
           <a:lstStyle/>
           <a:p>
-            <a:pPr algn="l" indent="0" marL="0">
+            <a:pPr indent="0" marL="0">
               <a:buNone/>
             </a:pPr>
             <a:r>
@@ -10054,7 +9329,7 @@
                 <a:ea typeface="IBM Plex Mono" pitchFamily="34" charset="-122"/>
                 <a:cs typeface="IBM Plex Mono" pitchFamily="34" charset="-120"/>
               </a:rPr>
-              <a:t>2 · PROTÓTIPO DIGITAL — DOCUMENTAÇÃO NAVEGÁVEL</a:t>
+              <a:t>PROTÓTIPO DIGITAL</a:t>
             </a:r>
             <a:endParaRPr lang="en-US" sz="1050" dirty="0"/>
           </a:p>
@@ -10068,8 +9343,8 @@
         </p:nvSpPr>
         <p:spPr>
           <a:xfrm>
-            <a:off x="384048" y="603504"/>
-            <a:ext cx="8229600" cy="731520"/>
+            <a:off x="384048" y="658368"/>
+            <a:ext cx="8229600" cy="874643"/>
           </a:xfrm>
           <a:prstGeom prst="rect">
             <a:avLst/>
@@ -10081,14 +9356,14 @@
           <a:bodyPr wrap="square" rtlCol="0" anchor="t"/>
           <a:lstStyle/>
           <a:p>
-            <a:pPr algn="l" indent="0" marL="0">
+            <a:pPr indent="0" marL="0">
               <a:lnSpc>
-                <a:spcPts val="3440"/>
+                <a:spcPts val="3784"/>
               </a:lnSpc>
               <a:buNone/>
             </a:pPr>
             <a:r>
-              <a:rPr lang="en-US" sz="4000" dirty="0">
+              <a:rPr lang="en-US" sz="4400" dirty="0">
                 <a:solidFill>
                   <a:srgbClr val="11100D"/>
                 </a:solidFill>
@@ -10098,7 +9373,7 @@
               </a:rPr>
               <a:t>DO OBJETO AO SISTEMA.</a:t>
             </a:r>
-            <a:endParaRPr lang="en-US" sz="4000" dirty="0"/>
+            <a:endParaRPr lang="en-US" sz="4400" dirty="0"/>
           </a:p>
         </p:txBody>
       </p:sp>
@@ -10118,7 +9393,7 @@
         </p:blipFill>
         <p:spPr>
           <a:xfrm>
-            <a:off x="411480" y="1627632"/>
+            <a:off x="411480" y="1828800"/>
             <a:ext cx="2697480" cy="1812369"/>
           </a:xfrm>
           <a:prstGeom prst="rect">
@@ -10134,7 +9409,7 @@
         </p:nvSpPr>
         <p:spPr>
           <a:xfrm>
-            <a:off x="411480" y="1627632"/>
+            <a:off x="411480" y="1828800"/>
             <a:ext cx="2697480" cy="1812369"/>
           </a:xfrm>
           <a:prstGeom prst="rect">
@@ -10161,7 +9436,7 @@
         </p:nvSpPr>
         <p:spPr>
           <a:xfrm>
-            <a:off x="411480" y="3493008"/>
+            <a:off x="411480" y="3694176"/>
             <a:ext cx="2697480" cy="219456"/>
           </a:xfrm>
           <a:prstGeom prst="rect">
@@ -10186,7 +9461,7 @@
                 <a:ea typeface="IBM Plex Mono" pitchFamily="34" charset="-122"/>
                 <a:cs typeface="IBM Plex Mono" pitchFamily="34" charset="-120"/>
               </a:rPr>
-              <a:t>CAPA · A PEÇA</a:t>
+              <a:t>A PEÇA</a:t>
             </a:r>
             <a:endParaRPr lang="en-US" sz="850" dirty="0"/>
           </a:p>
@@ -10208,7 +9483,7 @@
         </p:blipFill>
         <p:spPr>
           <a:xfrm>
-            <a:off x="3246120" y="1627632"/>
+            <a:off x="3246120" y="1828800"/>
             <a:ext cx="2697480" cy="1812369"/>
           </a:xfrm>
           <a:prstGeom prst="rect">
@@ -10224,7 +9499,7 @@
         </p:nvSpPr>
         <p:spPr>
           <a:xfrm>
-            <a:off x="3246120" y="1627632"/>
+            <a:off x="3246120" y="1828800"/>
             <a:ext cx="2697480" cy="1812369"/>
           </a:xfrm>
           <a:prstGeom prst="rect">
@@ -10251,7 +9526,7 @@
         </p:nvSpPr>
         <p:spPr>
           <a:xfrm>
-            <a:off x="3246120" y="3493008"/>
+            <a:off x="3246120" y="3694176"/>
             <a:ext cx="2697480" cy="219456"/>
           </a:xfrm>
           <a:prstGeom prst="rect">
@@ -10298,7 +9573,7 @@
         </p:blipFill>
         <p:spPr>
           <a:xfrm>
-            <a:off x="6080760" y="1627632"/>
+            <a:off x="6080760" y="1828800"/>
             <a:ext cx="2697480" cy="1812369"/>
           </a:xfrm>
           <a:prstGeom prst="rect">
@@ -10314,7 +9589,7 @@
         </p:nvSpPr>
         <p:spPr>
           <a:xfrm>
-            <a:off x="6080760" y="1627632"/>
+            <a:off x="6080760" y="1828800"/>
             <a:ext cx="2697480" cy="1812369"/>
           </a:xfrm>
           <a:prstGeom prst="rect">
@@ -10341,7 +9616,7 @@
         </p:nvSpPr>
         <p:spPr>
           <a:xfrm>
-            <a:off x="6080760" y="3493008"/>
+            <a:off x="6080760" y="3694176"/>
             <a:ext cx="2697480" cy="219456"/>
           </a:xfrm>
           <a:prstGeom prst="rect">
@@ -10380,8 +9655,8 @@
         </p:nvSpPr>
         <p:spPr>
           <a:xfrm>
-            <a:off x="411480" y="3977640"/>
-            <a:ext cx="8321040" cy="548640"/>
+            <a:off x="411480" y="4160520"/>
+            <a:ext cx="8321040" cy="365760"/>
           </a:xfrm>
           <a:prstGeom prst="rect">
             <a:avLst/>
@@ -10397,17 +9672,17 @@
               <a:buNone/>
             </a:pPr>
             <a:r>
-              <a:rPr lang="en-US" sz="1200" dirty="0">
-                <a:solidFill>
-                  <a:srgbClr val="3A362E"/>
-                </a:solidFill>
-                <a:latin typeface="IBM Plex Sans" pitchFamily="34" charset="0"/>
-                <a:ea typeface="IBM Plex Sans" pitchFamily="34" charset="-122"/>
-                <a:cs typeface="IBM Plex Sans" pitchFamily="34" charset="-120"/>
-              </a:rPr>
-              <a:t>Site-documentação com a história do projeto: peça, materiais, processo V1→V2, teste na casa, ciclo e suporte circular. Entregue em HTML + PDF junto com estes slides.</a:t>
-            </a:r>
-            <a:endParaRPr lang="en-US" sz="1200" dirty="0"/>
+              <a:rPr lang="en-US" sz="1500" i="1" dirty="0">
+                <a:solidFill>
+                  <a:srgbClr val="8A4A22"/>
+                </a:solidFill>
+                <a:latin typeface="Instrument Serif" pitchFamily="34" charset="0"/>
+                <a:ea typeface="Instrument Serif" pitchFamily="34" charset="-122"/>
+                <a:cs typeface="Instrument Serif" pitchFamily="34" charset="-120"/>
+              </a:rPr>
+              <a:t>Documentação navegável do projeto — entregue em HTML + PDF.</a:t>
+            </a:r>
+            <a:endParaRPr lang="en-US" sz="1500" dirty="0"/>
           </a:p>
         </p:txBody>
       </p:sp>
@@ -10419,8 +9694,8 @@
         </p:nvSpPr>
         <p:spPr>
           <a:xfrm>
-            <a:off x="411480" y="4809744"/>
-            <a:ext cx="8321040" cy="274320"/>
+            <a:off x="411480" y="4828032"/>
+            <a:ext cx="8321040" cy="256032"/>
           </a:xfrm>
           <a:prstGeom prst="rect">
             <a:avLst/>
@@ -10436,7 +9711,7 @@
               <a:buNone/>
             </a:pPr>
             <a:r>
-              <a:rPr lang="en-US" sz="850" spc="200" kern="0" dirty="0">
+              <a:rPr lang="en-US" sz="800" spc="200" kern="0" dirty="0">
                 <a:solidFill>
                   <a:srgbClr val="8A7B60"/>
                 </a:solidFill>
@@ -10446,7 +9721,7 @@
               </a:rPr>
               <a:t>Luiza Britto · Design Thinking e Prototipagem · Insper · 02 jul 2026</a:t>
             </a:r>
-            <a:endParaRPr lang="en-US" sz="850" dirty="0"/>
+            <a:endParaRPr lang="en-US" sz="800" dirty="0"/>
           </a:p>
         </p:txBody>
       </p:sp>
@@ -10610,8 +9885,8 @@
         </p:nvSpPr>
         <p:spPr>
           <a:xfrm>
-            <a:off x="411480" y="310896"/>
-            <a:ext cx="7315200" cy="274320"/>
+            <a:off x="411480" y="329184"/>
+            <a:ext cx="8229600" cy="274320"/>
           </a:xfrm>
           <a:prstGeom prst="rect">
             <a:avLst/>
@@ -10623,7 +9898,7 @@
           <a:bodyPr wrap="square" rtlCol="0" anchor="ctr"/>
           <a:lstStyle/>
           <a:p>
-            <a:pPr algn="l" indent="0" marL="0">
+            <a:pPr indent="0" marL="0">
               <a:buNone/>
             </a:pPr>
             <a:r>
@@ -10635,7 +9910,7 @@
                 <a:ea typeface="IBM Plex Mono" pitchFamily="34" charset="-122"/>
                 <a:cs typeface="IBM Plex Mono" pitchFamily="34" charset="-120"/>
               </a:rPr>
-              <a:t>3 · PROCESSO SISTÊMICO — ECONOMIA CIRCULAR</a:t>
+              <a:t>ECONOMIA CIRCULAR · CICLO DE VIDA</a:t>
             </a:r>
             <a:endParaRPr lang="en-US" sz="1050" dirty="0"/>
           </a:p>
@@ -10649,8 +9924,8 @@
         </p:nvSpPr>
         <p:spPr>
           <a:xfrm>
-            <a:off x="384048" y="603504"/>
-            <a:ext cx="8412480" cy="658368"/>
+            <a:off x="384048" y="713232"/>
+            <a:ext cx="8229600" cy="874643"/>
           </a:xfrm>
           <a:prstGeom prst="rect">
             <a:avLst/>
@@ -10662,14 +9937,14 @@
           <a:bodyPr wrap="square" rtlCol="0" anchor="t"/>
           <a:lstStyle/>
           <a:p>
-            <a:pPr algn="l" indent="0" marL="0">
+            <a:pPr indent="0" marL="0">
               <a:lnSpc>
-                <a:spcPts val="3096"/>
+                <a:spcPts val="3784"/>
               </a:lnSpc>
               <a:buNone/>
             </a:pPr>
             <a:r>
-              <a:rPr lang="en-US" sz="3600" dirty="0">
+              <a:rPr lang="en-US" sz="4400" dirty="0">
                 <a:solidFill>
                   <a:srgbClr val="EFE7D6"/>
                 </a:solidFill>
@@ -10677,38 +9952,19 @@
                 <a:ea typeface="League Gothic" pitchFamily="34" charset="-122"/>
                 <a:cs typeface="League Gothic" pitchFamily="34" charset="-120"/>
               </a:rPr>
-              <a:t>O CICLO NÃO TERMINA NA VENDA.</a:t>
-            </a:r>
-            <a:endParaRPr lang="en-US" sz="3600" dirty="0"/>
-          </a:p>
-        </p:txBody>
-      </p:sp>
-      <p:sp>
-        <p:nvSpPr>
-          <p:cNvPr id="10" name="Text 8"/>
-          <p:cNvSpPr/>
-          <p:nvPr/>
-        </p:nvSpPr>
-        <p:spPr>
-          <a:xfrm>
-            <a:off x="411480" y="1572768"/>
-            <a:ext cx="8412480" cy="502920"/>
-          </a:xfrm>
-          <a:prstGeom prst="rect">
-            <a:avLst/>
-          </a:prstGeom>
-          <a:noFill/>
-          <a:ln/>
-        </p:spPr>
-        <p:txBody>
-          <a:bodyPr wrap="square" rtlCol="0" anchor="ctr"/>
-          <a:lstStyle/>
-          <a:p>
-            <a:pPr algn="l" indent="0" marL="0">
-              <a:buNone/>
-            </a:pPr>
-            <a:r>
-              <a:rPr lang="en-US" sz="2900" dirty="0">
+              <a:t>O CICLO NÃO TERMINA</a:t>
+            </a:r>
+            <a:endParaRPr lang="en-US" sz="4400" dirty="0"/>
+          </a:p>
+          <a:p>
+            <a:pPr indent="0" marL="0">
+              <a:lnSpc>
+                <a:spcPts val="3784"/>
+              </a:lnSpc>
+              <a:buNone/>
+            </a:pPr>
+            <a:r>
+              <a:rPr lang="en-US" sz="4400" dirty="0">
                 <a:solidFill>
                   <a:srgbClr val="EFE7D6"/>
                 </a:solidFill>
@@ -10716,159 +9972,173 @@
                 <a:ea typeface="League Gothic" pitchFamily="34" charset="-122"/>
                 <a:cs typeface="League Gothic" pitchFamily="34" charset="-120"/>
               </a:rPr>
-              <a:t>COMPROU</a:t>
-            </a:r>
-            <a:pPr algn="l" indent="0" marL="0">
-              <a:buNone/>
-            </a:pPr>
-            <a:r>
-              <a:rPr lang="en-US" sz="2900" dirty="0">
-                <a:solidFill>
-                  <a:srgbClr val="D65A2B"/>
+              <a:t>NA VENDA.</a:t>
+            </a:r>
+            <a:endParaRPr lang="en-US" sz="4400" dirty="0"/>
+          </a:p>
+        </p:txBody>
+      </p:sp>
+      <p:sp>
+        <p:nvSpPr>
+          <p:cNvPr id="10" name="Text 8"/>
+          <p:cNvSpPr/>
+          <p:nvPr/>
+        </p:nvSpPr>
+        <p:spPr>
+          <a:xfrm>
+            <a:off x="411480" y="2468880"/>
+            <a:ext cx="8412480" cy="566928"/>
+          </a:xfrm>
+          <a:prstGeom prst="rect">
+            <a:avLst/>
+          </a:prstGeom>
+          <a:noFill/>
+          <a:ln/>
+        </p:spPr>
+        <p:txBody>
+          <a:bodyPr wrap="square" rtlCol="0" anchor="ctr"/>
+          <a:lstStyle/>
+          <a:p>
+            <a:pPr indent="0" marL="0">
+              <a:buNone/>
+            </a:pPr>
+            <a:r>
+              <a:rPr lang="en-US" sz="3300" dirty="0">
+                <a:solidFill>
+                  <a:srgbClr val="EFE7D6"/>
                 </a:solidFill>
                 <a:latin typeface="League Gothic" pitchFamily="34" charset="0"/>
                 <a:ea typeface="League Gothic" pitchFamily="34" charset="-122"/>
                 <a:cs typeface="League Gothic" pitchFamily="34" charset="-120"/>
               </a:rPr>
-              <a:t>  →  </a:t>
-            </a:r>
-            <a:pPr algn="l" indent="0" marL="0">
-              <a:buNone/>
-            </a:pPr>
-            <a:r>
-              <a:rPr lang="en-US" sz="2900" dirty="0">
-                <a:solidFill>
-                  <a:srgbClr val="EFE7D6"/>
+              <a:t>COMPROU</a:t>
+            </a:r>
+            <a:pPr indent="0" marL="0">
+              <a:buNone/>
+            </a:pPr>
+            <a:r>
+              <a:rPr lang="en-US" sz="3300" dirty="0">
+                <a:solidFill>
+                  <a:srgbClr val="D65A2B"/>
                 </a:solidFill>
                 <a:latin typeface="League Gothic" pitchFamily="34" charset="0"/>
                 <a:ea typeface="League Gothic" pitchFamily="34" charset="-122"/>
                 <a:cs typeface="League Gothic" pitchFamily="34" charset="-120"/>
               </a:rPr>
-              <a:t>USOU</a:t>
-            </a:r>
-            <a:pPr algn="l" indent="0" marL="0">
-              <a:buNone/>
-            </a:pPr>
-            <a:r>
-              <a:rPr lang="en-US" sz="2900" dirty="0">
-                <a:solidFill>
-                  <a:srgbClr val="D65A2B"/>
+              <a:t>  →  </a:t>
+            </a:r>
+            <a:pPr indent="0" marL="0">
+              <a:buNone/>
+            </a:pPr>
+            <a:r>
+              <a:rPr lang="en-US" sz="3300" dirty="0">
+                <a:solidFill>
+                  <a:srgbClr val="EFE7D6"/>
                 </a:solidFill>
                 <a:latin typeface="League Gothic" pitchFamily="34" charset="0"/>
                 <a:ea typeface="League Gothic" pitchFamily="34" charset="-122"/>
                 <a:cs typeface="League Gothic" pitchFamily="34" charset="-120"/>
               </a:rPr>
-              <a:t>  →  </a:t>
-            </a:r>
-            <a:pPr algn="l" indent="0" marL="0">
-              <a:buNone/>
-            </a:pPr>
-            <a:r>
-              <a:rPr lang="en-US" sz="2900" dirty="0">
-                <a:solidFill>
-                  <a:srgbClr val="EFE7D6"/>
+              <a:t>USOU</a:t>
+            </a:r>
+            <a:pPr indent="0" marL="0">
+              <a:buNone/>
+            </a:pPr>
+            <a:r>
+              <a:rPr lang="en-US" sz="3300" dirty="0">
+                <a:solidFill>
+                  <a:srgbClr val="D65A2B"/>
                 </a:solidFill>
                 <a:latin typeface="League Gothic" pitchFamily="34" charset="0"/>
                 <a:ea typeface="League Gothic" pitchFamily="34" charset="-122"/>
                 <a:cs typeface="League Gothic" pitchFamily="34" charset="-120"/>
               </a:rPr>
-              <a:t>REPAROU</a:t>
-            </a:r>
-            <a:pPr algn="l" indent="0" marL="0">
-              <a:buNone/>
-            </a:pPr>
-            <a:r>
-              <a:rPr lang="en-US" sz="2900" dirty="0">
-                <a:solidFill>
-                  <a:srgbClr val="D65A2B"/>
+              <a:t>  →  </a:t>
+            </a:r>
+            <a:pPr indent="0" marL="0">
+              <a:buNone/>
+            </a:pPr>
+            <a:r>
+              <a:rPr lang="en-US" sz="3300" dirty="0">
+                <a:solidFill>
+                  <a:srgbClr val="EFE7D6"/>
                 </a:solidFill>
                 <a:latin typeface="League Gothic" pitchFamily="34" charset="0"/>
                 <a:ea typeface="League Gothic" pitchFamily="34" charset="-122"/>
                 <a:cs typeface="League Gothic" pitchFamily="34" charset="-120"/>
               </a:rPr>
-              <a:t>  →  </a:t>
-            </a:r>
-            <a:pPr algn="l" indent="0" marL="0">
-              <a:buNone/>
-            </a:pPr>
-            <a:r>
-              <a:rPr lang="en-US" sz="2900" dirty="0">
-                <a:solidFill>
-                  <a:srgbClr val="EFE7D6"/>
+              <a:t>REPAROU</a:t>
+            </a:r>
+            <a:pPr indent="0" marL="0">
+              <a:buNone/>
+            </a:pPr>
+            <a:r>
+              <a:rPr lang="en-US" sz="3300" dirty="0">
+                <a:solidFill>
+                  <a:srgbClr val="D65A2B"/>
                 </a:solidFill>
                 <a:latin typeface="League Gothic" pitchFamily="34" charset="0"/>
                 <a:ea typeface="League Gothic" pitchFamily="34" charset="-122"/>
                 <a:cs typeface="League Gothic" pitchFamily="34" charset="-120"/>
               </a:rPr>
-              <a:t>DEVOLVEU</a:t>
-            </a:r>
-            <a:pPr algn="l" indent="0" marL="0">
-              <a:buNone/>
-            </a:pPr>
-            <a:r>
-              <a:rPr lang="en-US" sz="2900" dirty="0">
-                <a:solidFill>
-                  <a:srgbClr val="D65A2B"/>
+              <a:t>  →  </a:t>
+            </a:r>
+            <a:pPr indent="0" marL="0">
+              <a:buNone/>
+            </a:pPr>
+            <a:r>
+              <a:rPr lang="en-US" sz="3300" dirty="0">
+                <a:solidFill>
+                  <a:srgbClr val="EFE7D6"/>
                 </a:solidFill>
                 <a:latin typeface="League Gothic" pitchFamily="34" charset="0"/>
                 <a:ea typeface="League Gothic" pitchFamily="34" charset="-122"/>
                 <a:cs typeface="League Gothic" pitchFamily="34" charset="-120"/>
               </a:rPr>
-              <a:t>  →  </a:t>
-            </a:r>
-            <a:pPr algn="l" indent="0" marL="0">
-              <a:buNone/>
-            </a:pPr>
-            <a:r>
-              <a:rPr lang="en-US" sz="2900" dirty="0">
-                <a:solidFill>
-                  <a:srgbClr val="C89B48"/>
+              <a:t>DEVOLVEU</a:t>
+            </a:r>
+            <a:pPr indent="0" marL="0">
+              <a:buNone/>
+            </a:pPr>
+            <a:r>
+              <a:rPr lang="en-US" sz="3300" dirty="0">
+                <a:solidFill>
+                  <a:srgbClr val="D65A2B"/>
                 </a:solidFill>
                 <a:latin typeface="League Gothic" pitchFamily="34" charset="0"/>
                 <a:ea typeface="League Gothic" pitchFamily="34" charset="-122"/>
                 <a:cs typeface="League Gothic" pitchFamily="34" charset="-120"/>
               </a:rPr>
+              <a:t>  →  </a:t>
+            </a:r>
+            <a:pPr indent="0" marL="0">
+              <a:buNone/>
+            </a:pPr>
+            <a:r>
+              <a:rPr lang="en-US" sz="3300" dirty="0">
+                <a:solidFill>
+                  <a:srgbClr val="C89B48"/>
+                </a:solidFill>
+                <a:latin typeface="League Gothic" pitchFamily="34" charset="0"/>
+                <a:ea typeface="League Gothic" pitchFamily="34" charset="-122"/>
+                <a:cs typeface="League Gothic" pitchFamily="34" charset="-120"/>
+              </a:rPr>
               <a:t>REAPROVEITOU</a:t>
             </a:r>
-            <a:endParaRPr lang="en-US" sz="2900" dirty="0"/>
-          </a:p>
-        </p:txBody>
-      </p:sp>
-      <p:sp>
-        <p:nvSpPr>
-          <p:cNvPr id="11" name="Shape 9"/>
-          <p:cNvSpPr/>
-          <p:nvPr/>
-        </p:nvSpPr>
-        <p:spPr>
-          <a:xfrm>
-            <a:off x="411480" y="2395728"/>
-            <a:ext cx="2029968" cy="1627632"/>
-          </a:xfrm>
-          <a:prstGeom prst="rect">
-            <a:avLst/>
-          </a:prstGeom>
-          <a:solidFill>
-            <a:srgbClr val="1A1712"/>
-          </a:solidFill>
-          <a:ln w="9525">
-            <a:solidFill>
-              <a:srgbClr val="4A4438"/>
-            </a:solidFill>
-            <a:prstDash val="solid"/>
-          </a:ln>
-        </p:spPr>
-      </p:sp>
-      <p:sp>
-        <p:nvSpPr>
-          <p:cNvPr id="12" name="Text 10"/>
-          <p:cNvSpPr/>
-          <p:nvPr/>
-        </p:nvSpPr>
-        <p:spPr>
-          <a:xfrm>
-            <a:off x="521208" y="2505456"/>
-            <a:ext cx="1828800" cy="219456"/>
+            <a:endParaRPr lang="en-US" sz="3300" dirty="0"/>
+          </a:p>
+        </p:txBody>
+      </p:sp>
+      <p:sp>
+        <p:nvSpPr>
+          <p:cNvPr id="11" name="Text 9"/>
+          <p:cNvSpPr/>
+          <p:nvPr/>
+        </p:nvSpPr>
+        <p:spPr>
+          <a:xfrm>
+            <a:off x="411480" y="3310128"/>
+            <a:ext cx="2011680" cy="219456"/>
           </a:xfrm>
           <a:prstGeom prst="rect">
             <a:avLst/>
@@ -10900,14 +10170,14 @@
       </p:sp>
       <p:sp>
         <p:nvSpPr>
-          <p:cNvPr id="13" name="Text 11"/>
-          <p:cNvSpPr/>
-          <p:nvPr/>
-        </p:nvSpPr>
-        <p:spPr>
-          <a:xfrm>
-            <a:off x="521208" y="2743200"/>
-            <a:ext cx="1828800" cy="1005840"/>
+          <p:cNvPr id="12" name="Text 10"/>
+          <p:cNvSpPr/>
+          <p:nvPr/>
+        </p:nvSpPr>
+        <p:spPr>
+          <a:xfrm>
+            <a:off x="411480" y="3547872"/>
+            <a:ext cx="1965960" cy="566928"/>
           </a:xfrm>
           <a:prstGeom prst="rect">
             <a:avLst/>
@@ -10923,7 +10193,7 @@
               <a:buNone/>
             </a:pPr>
             <a:r>
-              <a:rPr lang="en-US" sz="1000" dirty="0">
+              <a:rPr lang="en-US" sz="1050" dirty="0">
                 <a:solidFill>
                   <a:srgbClr val="BFB49E"/>
                 </a:solidFill>
@@ -10931,22 +10201,22 @@
                 <a:ea typeface="IBM Plex Sans" pitchFamily="34" charset="-122"/>
                 <a:cs typeface="IBM Plex Sans" pitchFamily="34" charset="-120"/>
               </a:rPr>
-              <a:t>Madeira de reuso como intenção de design: o lote define a peça.</a:t>
-            </a:r>
-            <a:endParaRPr lang="en-US" sz="1000" dirty="0"/>
-          </a:p>
-        </p:txBody>
-      </p:sp>
-      <p:sp>
-        <p:nvSpPr>
-          <p:cNvPr id="14" name="Text 12"/>
-          <p:cNvSpPr/>
-          <p:nvPr/>
-        </p:nvSpPr>
-        <p:spPr>
-          <a:xfrm>
-            <a:off x="521208" y="3730752"/>
-            <a:ext cx="1828800" cy="201168"/>
+              <a:t>O lote de madeira define a peça.</a:t>
+            </a:r>
+            <a:endParaRPr lang="en-US" sz="1050" dirty="0"/>
+          </a:p>
+        </p:txBody>
+      </p:sp>
+      <p:sp>
+        <p:nvSpPr>
+          <p:cNvPr id="13" name="Text 11"/>
+          <p:cNvSpPr/>
+          <p:nvPr/>
+        </p:nvSpPr>
+        <p:spPr>
+          <a:xfrm>
+            <a:off x="2551176" y="3310128"/>
+            <a:ext cx="2011680" cy="219456"/>
           </a:xfrm>
           <a:prstGeom prst="rect">
             <a:avLst/>
@@ -10962,7 +10232,7 @@
               <a:buNone/>
             </a:pPr>
             <a:r>
-              <a:rPr lang="en-US" sz="750" spc="100" kern="0" dirty="0">
+              <a:rPr lang="en-US" sz="850" spc="200" kern="0" dirty="0">
                 <a:solidFill>
                   <a:srgbClr val="C89B48"/>
                 </a:solidFill>
@@ -10970,47 +10240,61 @@
                 <a:ea typeface="IBM Plex Mono" pitchFamily="34" charset="-122"/>
                 <a:cs typeface="IBM Plex Mono" pitchFamily="34" charset="-120"/>
               </a:rPr>
-              <a:t>PROTÓTIPO</a:t>
-            </a:r>
-            <a:endParaRPr lang="en-US" sz="750" dirty="0"/>
-          </a:p>
-        </p:txBody>
-      </p:sp>
-      <p:sp>
-        <p:nvSpPr>
-          <p:cNvPr id="15" name="Shape 13"/>
-          <p:cNvSpPr/>
-          <p:nvPr/>
-        </p:nvSpPr>
-        <p:spPr>
-          <a:xfrm>
-            <a:off x="2551176" y="2395728"/>
-            <a:ext cx="2029968" cy="1627632"/>
-          </a:xfrm>
-          <a:prstGeom prst="rect">
-            <a:avLst/>
-          </a:prstGeom>
-          <a:solidFill>
-            <a:srgbClr val="1A1712"/>
-          </a:solidFill>
-          <a:ln w="9525">
-            <a:solidFill>
-              <a:srgbClr val="4A4438"/>
-            </a:solidFill>
-            <a:prstDash val="solid"/>
-          </a:ln>
-        </p:spPr>
-      </p:sp>
-      <p:sp>
-        <p:nvSpPr>
-          <p:cNvPr id="16" name="Text 14"/>
-          <p:cNvSpPr/>
-          <p:nvPr/>
-        </p:nvSpPr>
-        <p:spPr>
-          <a:xfrm>
-            <a:off x="2660904" y="2505456"/>
-            <a:ext cx="1828800" cy="219456"/>
+              <a:t>MANUTENÇÃO</a:t>
+            </a:r>
+            <a:endParaRPr lang="en-US" sz="850" dirty="0"/>
+          </a:p>
+        </p:txBody>
+      </p:sp>
+      <p:sp>
+        <p:nvSpPr>
+          <p:cNvPr id="14" name="Text 12"/>
+          <p:cNvSpPr/>
+          <p:nvPr/>
+        </p:nvSpPr>
+        <p:spPr>
+          <a:xfrm>
+            <a:off x="2551176" y="3547872"/>
+            <a:ext cx="1965960" cy="566928"/>
+          </a:xfrm>
+          <a:prstGeom prst="rect">
+            <a:avLst/>
+          </a:prstGeom>
+          <a:noFill/>
+          <a:ln/>
+        </p:spPr>
+        <p:txBody>
+          <a:bodyPr wrap="square" rtlCol="0" anchor="t"/>
+          <a:lstStyle/>
+          <a:p>
+            <a:pPr indent="0" marL="0">
+              <a:buNone/>
+            </a:pPr>
+            <a:r>
+              <a:rPr lang="en-US" sz="1050" dirty="0">
+                <a:solidFill>
+                  <a:srgbClr val="BFB49E"/>
+                </a:solidFill>
+                <a:latin typeface="IBM Plex Sans" pitchFamily="34" charset="0"/>
+                <a:ea typeface="IBM Plex Sans" pitchFamily="34" charset="-122"/>
+                <a:cs typeface="IBM Plex Sans" pitchFamily="34" charset="-120"/>
+              </a:rPr>
+              <a:t>Risco se lixa; verniz reaplica.</a:t>
+            </a:r>
+            <a:endParaRPr lang="en-US" sz="1050" dirty="0"/>
+          </a:p>
+        </p:txBody>
+      </p:sp>
+      <p:sp>
+        <p:nvSpPr>
+          <p:cNvPr id="15" name="Text 13"/>
+          <p:cNvSpPr/>
+          <p:nvPr/>
+        </p:nvSpPr>
+        <p:spPr>
+          <a:xfrm>
+            <a:off x="4690872" y="3310128"/>
+            <a:ext cx="2011680" cy="219456"/>
           </a:xfrm>
           <a:prstGeom prst="rect">
             <a:avLst/>
@@ -11034,7 +10318,7 @@
                 <a:ea typeface="IBM Plex Mono" pitchFamily="34" charset="-122"/>
                 <a:cs typeface="IBM Plex Mono" pitchFamily="34" charset="-120"/>
               </a:rPr>
-              <a:t>MANUTENÇÃO</a:t>
+              <a:t>REPARO</a:t>
             </a:r>
             <a:endParaRPr lang="en-US" sz="850" dirty="0"/>
           </a:p>
@@ -11042,14 +10326,14 @@
       </p:sp>
       <p:sp>
         <p:nvSpPr>
-          <p:cNvPr id="17" name="Text 15"/>
-          <p:cNvSpPr/>
-          <p:nvPr/>
-        </p:nvSpPr>
-        <p:spPr>
-          <a:xfrm>
-            <a:off x="2660904" y="2743200"/>
-            <a:ext cx="1828800" cy="1005840"/>
+          <p:cNvPr id="16" name="Text 14"/>
+          <p:cNvSpPr/>
+          <p:nvPr/>
+        </p:nvSpPr>
+        <p:spPr>
+          <a:xfrm>
+            <a:off x="4690872" y="3547872"/>
+            <a:ext cx="1965960" cy="566928"/>
           </a:xfrm>
           <a:prstGeom prst="rect">
             <a:avLst/>
@@ -11065,7 +10349,7 @@
               <a:buNone/>
             </a:pPr>
             <a:r>
-              <a:rPr lang="en-US" sz="1000" dirty="0">
+              <a:rPr lang="en-US" sz="1050" dirty="0">
                 <a:solidFill>
                   <a:srgbClr val="BFB49E"/>
                 </a:solidFill>
@@ -11073,22 +10357,22 @@
                 <a:ea typeface="IBM Plex Sans" pitchFamily="34" charset="-122"/>
                 <a:cs typeface="IBM Plex Sans" pitchFamily="34" charset="-120"/>
               </a:rPr>
-              <a:t>Risco e marca se lixa; acabamento reaplicável. Capa lavável em desenho.</a:t>
-            </a:r>
-            <a:endParaRPr lang="en-US" sz="1000" dirty="0"/>
-          </a:p>
-        </p:txBody>
-      </p:sp>
-      <p:sp>
-        <p:nvSpPr>
-          <p:cNvPr id="18" name="Text 16"/>
-          <p:cNvSpPr/>
-          <p:nvPr/>
-        </p:nvSpPr>
-        <p:spPr>
-          <a:xfrm>
-            <a:off x="2660904" y="3730752"/>
-            <a:ext cx="1828800" cy="201168"/>
+              <a:t>Estaca sai, estaca entra.</a:t>
+            </a:r>
+            <a:endParaRPr lang="en-US" sz="1050" dirty="0"/>
+          </a:p>
+        </p:txBody>
+      </p:sp>
+      <p:sp>
+        <p:nvSpPr>
+          <p:cNvPr id="17" name="Text 15"/>
+          <p:cNvSpPr/>
+          <p:nvPr/>
+        </p:nvSpPr>
+        <p:spPr>
+          <a:xfrm>
+            <a:off x="6830568" y="3310128"/>
+            <a:ext cx="2011680" cy="219456"/>
           </a:xfrm>
           <a:prstGeom prst="rect">
             <a:avLst/>
@@ -11104,7 +10388,7 @@
               <a:buNone/>
             </a:pPr>
             <a:r>
-              <a:rPr lang="en-US" sz="750" spc="100" kern="0" dirty="0">
+              <a:rPr lang="en-US" sz="850" spc="200" kern="0" dirty="0">
                 <a:solidFill>
                   <a:srgbClr val="C89B48"/>
                 </a:solidFill>
@@ -11112,36 +10396,89 @@
                 <a:ea typeface="IBM Plex Mono" pitchFamily="34" charset="-122"/>
                 <a:cs typeface="IBM Plex Mono" pitchFamily="34" charset="-120"/>
               </a:rPr>
-              <a:t>PROTÓTIPO</a:t>
-            </a:r>
-            <a:endParaRPr lang="en-US" sz="750" dirty="0"/>
-          </a:p>
-        </p:txBody>
-      </p:sp>
-      <p:sp>
-        <p:nvSpPr>
-          <p:cNvPr id="19" name="Shape 17"/>
-          <p:cNvSpPr/>
-          <p:nvPr/>
-        </p:nvSpPr>
-        <p:spPr>
-          <a:xfrm>
-            <a:off x="4690872" y="2395728"/>
-            <a:ext cx="2029968" cy="1627632"/>
-          </a:xfrm>
-          <a:prstGeom prst="rect">
-            <a:avLst/>
-          </a:prstGeom>
-          <a:solidFill>
-            <a:srgbClr val="1A1712"/>
-          </a:solidFill>
-          <a:ln w="9525">
-            <a:solidFill>
-              <a:srgbClr val="4A4438"/>
-            </a:solidFill>
-            <a:prstDash val="solid"/>
-          </a:ln>
-        </p:spPr>
+              <a:t>FIM DE VIDA</a:t>
+            </a:r>
+            <a:endParaRPr lang="en-US" sz="850" dirty="0"/>
+          </a:p>
+        </p:txBody>
+      </p:sp>
+      <p:sp>
+        <p:nvSpPr>
+          <p:cNvPr id="18" name="Text 16"/>
+          <p:cNvSpPr/>
+          <p:nvPr/>
+        </p:nvSpPr>
+        <p:spPr>
+          <a:xfrm>
+            <a:off x="6830568" y="3547872"/>
+            <a:ext cx="1965960" cy="566928"/>
+          </a:xfrm>
+          <a:prstGeom prst="rect">
+            <a:avLst/>
+          </a:prstGeom>
+          <a:noFill/>
+          <a:ln/>
+        </p:spPr>
+        <p:txBody>
+          <a:bodyPr wrap="square" rtlCol="0" anchor="t"/>
+          <a:lstStyle/>
+          <a:p>
+            <a:pPr indent="0" marL="0">
+              <a:buNone/>
+            </a:pPr>
+            <a:r>
+              <a:rPr lang="en-US" sz="1050" dirty="0">
+                <a:solidFill>
+                  <a:srgbClr val="BFB49E"/>
+                </a:solidFill>
+                <a:latin typeface="IBM Plex Sans" pitchFamily="34" charset="0"/>
+                <a:ea typeface="IBM Plex Sans" pitchFamily="34" charset="-122"/>
+                <a:cs typeface="IBM Plex Sans" pitchFamily="34" charset="-120"/>
+              </a:rPr>
+              <a:t>Devolve → triagem → reuso.</a:t>
+            </a:r>
+            <a:endParaRPr lang="en-US" sz="1050" dirty="0"/>
+          </a:p>
+        </p:txBody>
+      </p:sp>
+      <p:sp>
+        <p:nvSpPr>
+          <p:cNvPr id="19" name="Text 17"/>
+          <p:cNvSpPr/>
+          <p:nvPr/>
+        </p:nvSpPr>
+        <p:spPr>
+          <a:xfrm>
+            <a:off x="411480" y="4224528"/>
+            <a:ext cx="8229600" cy="411480"/>
+          </a:xfrm>
+          <a:prstGeom prst="rect">
+            <a:avLst/>
+          </a:prstGeom>
+          <a:noFill/>
+          <a:ln/>
+        </p:spPr>
+        <p:txBody>
+          <a:bodyPr wrap="square" rtlCol="0" anchor="ctr"/>
+          <a:lstStyle/>
+          <a:p>
+            <a:pPr indent="0" marL="0">
+              <a:buNone/>
+            </a:pPr>
+            <a:r>
+              <a:rPr lang="en-US" sz="1900" i="1" dirty="0">
+                <a:solidFill>
+                  <a:srgbClr val="EFE7D6"/>
+                </a:solidFill>
+                <a:latin typeface="Instrument Serif" pitchFamily="34" charset="0"/>
+                <a:ea typeface="Instrument Serif" pitchFamily="34" charset="-122"/>
+                <a:cs typeface="Instrument Serif" pitchFamily="34" charset="-120"/>
+              </a:rPr>
+              <a:t>“Não jogue a Beni fora.”</a:t>
+            </a:r>
+            <a:endParaRPr lang="en-US" sz="1900" dirty="0"/>
+          </a:p>
+        </p:txBody>
       </p:sp>
       <p:sp>
         <p:nvSpPr>
@@ -11151,8 +10488,8 @@
         </p:nvSpPr>
         <p:spPr>
           <a:xfrm>
-            <a:off x="4800600" y="2505456"/>
-            <a:ext cx="1828800" cy="219456"/>
+            <a:off x="411480" y="4828032"/>
+            <a:ext cx="8321040" cy="256032"/>
           </a:xfrm>
           <a:prstGeom prst="rect">
             <a:avLst/>
@@ -11168,315 +10505,17 @@
               <a:buNone/>
             </a:pPr>
             <a:r>
-              <a:rPr lang="en-US" sz="850" spc="200" kern="0" dirty="0">
-                <a:solidFill>
-                  <a:srgbClr val="C89B48"/>
+              <a:rPr lang="en-US" sz="800" spc="200" kern="0" dirty="0">
+                <a:solidFill>
+                  <a:srgbClr val="BFB49E"/>
                 </a:solidFill>
                 <a:latin typeface="IBM Plex Mono" pitchFamily="34" charset="0"/>
                 <a:ea typeface="IBM Plex Mono" pitchFamily="34" charset="-122"/>
                 <a:cs typeface="IBM Plex Mono" pitchFamily="34" charset="-120"/>
               </a:rPr>
-              <a:t>REPARO</a:t>
-            </a:r>
-            <a:endParaRPr lang="en-US" sz="850" dirty="0"/>
-          </a:p>
-        </p:txBody>
-      </p:sp>
-      <p:sp>
-        <p:nvSpPr>
-          <p:cNvPr id="21" name="Text 19"/>
-          <p:cNvSpPr/>
-          <p:nvPr/>
-        </p:nvSpPr>
-        <p:spPr>
-          <a:xfrm>
-            <a:off x="4800600" y="2743200"/>
-            <a:ext cx="1828800" cy="1005840"/>
-          </a:xfrm>
-          <a:prstGeom prst="rect">
-            <a:avLst/>
-          </a:prstGeom>
-          <a:noFill/>
-          <a:ln/>
-        </p:spPr>
-        <p:txBody>
-          <a:bodyPr wrap="square" rtlCol="0" anchor="t"/>
-          <a:lstStyle/>
-          <a:p>
-            <a:pPr indent="0" marL="0">
-              <a:buNone/>
-            </a:pPr>
-            <a:r>
-              <a:rPr lang="en-US" sz="1000" dirty="0">
-                <a:solidFill>
-                  <a:srgbClr val="BFB49E"/>
-                </a:solidFill>
-                <a:latin typeface="IBM Plex Sans" pitchFamily="34" charset="0"/>
-                <a:ea typeface="IBM Plex Sans" pitchFamily="34" charset="-122"/>
-                <a:cs typeface="IBM Plex Sans" pitchFamily="34" charset="-120"/>
-              </a:rPr>
-              <a:t>A estaca de bambu sai uma, entra outra — sem desmontar o resto.</a:t>
-            </a:r>
-            <a:endParaRPr lang="en-US" sz="1000" dirty="0"/>
-          </a:p>
-        </p:txBody>
-      </p:sp>
-      <p:sp>
-        <p:nvSpPr>
-          <p:cNvPr id="22" name="Text 20"/>
-          <p:cNvSpPr/>
-          <p:nvPr/>
-        </p:nvSpPr>
-        <p:spPr>
-          <a:xfrm>
-            <a:off x="4800600" y="3730752"/>
-            <a:ext cx="1828800" cy="201168"/>
-          </a:xfrm>
-          <a:prstGeom prst="rect">
-            <a:avLst/>
-          </a:prstGeom>
-          <a:noFill/>
-          <a:ln/>
-        </p:spPr>
-        <p:txBody>
-          <a:bodyPr wrap="square" rtlCol="0" anchor="ctr"/>
-          <a:lstStyle/>
-          <a:p>
-            <a:pPr indent="0" marL="0">
-              <a:buNone/>
-            </a:pPr>
-            <a:r>
-              <a:rPr lang="en-US" sz="750" spc="100" kern="0" dirty="0">
-                <a:solidFill>
-                  <a:srgbClr val="C89B48"/>
-                </a:solidFill>
-                <a:latin typeface="IBM Plex Mono" pitchFamily="34" charset="0"/>
-                <a:ea typeface="IBM Plex Mono" pitchFamily="34" charset="-122"/>
-                <a:cs typeface="IBM Plex Mono" pitchFamily="34" charset="-120"/>
-              </a:rPr>
-              <a:t>PROTÓTIPO</a:t>
-            </a:r>
-            <a:endParaRPr lang="en-US" sz="750" dirty="0"/>
-          </a:p>
-        </p:txBody>
-      </p:sp>
-      <p:sp>
-        <p:nvSpPr>
-          <p:cNvPr id="23" name="Shape 21"/>
-          <p:cNvSpPr/>
-          <p:nvPr/>
-        </p:nvSpPr>
-        <p:spPr>
-          <a:xfrm>
-            <a:off x="6830568" y="2395728"/>
-            <a:ext cx="2029968" cy="1627632"/>
-          </a:xfrm>
-          <a:prstGeom prst="rect">
-            <a:avLst/>
-          </a:prstGeom>
-          <a:solidFill>
-            <a:srgbClr val="1A1712"/>
-          </a:solidFill>
-          <a:ln w="9525">
-            <a:solidFill>
-              <a:srgbClr val="4A4438"/>
-            </a:solidFill>
-            <a:prstDash val="dash"/>
-          </a:ln>
-        </p:spPr>
-      </p:sp>
-      <p:sp>
-        <p:nvSpPr>
-          <p:cNvPr id="24" name="Text 22"/>
-          <p:cNvSpPr/>
-          <p:nvPr/>
-        </p:nvSpPr>
-        <p:spPr>
-          <a:xfrm>
-            <a:off x="6940296" y="2505456"/>
-            <a:ext cx="1828800" cy="219456"/>
-          </a:xfrm>
-          <a:prstGeom prst="rect">
-            <a:avLst/>
-          </a:prstGeom>
-          <a:noFill/>
-          <a:ln/>
-        </p:spPr>
-        <p:txBody>
-          <a:bodyPr wrap="square" rtlCol="0" anchor="ctr"/>
-          <a:lstStyle/>
-          <a:p>
-            <a:pPr indent="0" marL="0">
-              <a:buNone/>
-            </a:pPr>
-            <a:r>
-              <a:rPr lang="en-US" sz="850" spc="200" kern="0" dirty="0">
-                <a:solidFill>
-                  <a:srgbClr val="9FB4BD"/>
-                </a:solidFill>
-                <a:latin typeface="IBM Plex Mono" pitchFamily="34" charset="0"/>
-                <a:ea typeface="IBM Plex Mono" pitchFamily="34" charset="-122"/>
-                <a:cs typeface="IBM Plex Mono" pitchFamily="34" charset="-120"/>
-              </a:rPr>
-              <a:t>FIM DE VIDA</a:t>
-            </a:r>
-            <a:endParaRPr lang="en-US" sz="850" dirty="0"/>
-          </a:p>
-        </p:txBody>
-      </p:sp>
-      <p:sp>
-        <p:nvSpPr>
-          <p:cNvPr id="25" name="Text 23"/>
-          <p:cNvSpPr/>
-          <p:nvPr/>
-        </p:nvSpPr>
-        <p:spPr>
-          <a:xfrm>
-            <a:off x="6940296" y="2743200"/>
-            <a:ext cx="1828800" cy="1005840"/>
-          </a:xfrm>
-          <a:prstGeom prst="rect">
-            <a:avLst/>
-          </a:prstGeom>
-          <a:noFill/>
-          <a:ln/>
-        </p:spPr>
-        <p:txBody>
-          <a:bodyPr wrap="square" rtlCol="0" anchor="t"/>
-          <a:lstStyle/>
-          <a:p>
-            <a:pPr indent="0" marL="0">
-              <a:buNone/>
-            </a:pPr>
-            <a:r>
-              <a:rPr lang="en-US" sz="1000" dirty="0">
-                <a:solidFill>
-                  <a:srgbClr val="BFB49E"/>
-                </a:solidFill>
-                <a:latin typeface="IBM Plex Sans" pitchFamily="34" charset="0"/>
-                <a:ea typeface="IBM Plex Sans" pitchFamily="34" charset="-122"/>
-                <a:cs typeface="IBM Plex Sans" pitchFamily="34" charset="-120"/>
-              </a:rPr>
-              <a:t>Devolve → triagem: reuso, novos produtos, protótipos ou descarte responsável.</a:t>
-            </a:r>
-            <a:endParaRPr lang="en-US" sz="1000" dirty="0"/>
-          </a:p>
-        </p:txBody>
-      </p:sp>
-      <p:sp>
-        <p:nvSpPr>
-          <p:cNvPr id="26" name="Text 24"/>
-          <p:cNvSpPr/>
-          <p:nvPr/>
-        </p:nvSpPr>
-        <p:spPr>
-          <a:xfrm>
-            <a:off x="6940296" y="3730752"/>
-            <a:ext cx="1828800" cy="201168"/>
-          </a:xfrm>
-          <a:prstGeom prst="rect">
-            <a:avLst/>
-          </a:prstGeom>
-          <a:noFill/>
-          <a:ln/>
-        </p:spPr>
-        <p:txBody>
-          <a:bodyPr wrap="square" rtlCol="0" anchor="ctr"/>
-          <a:lstStyle/>
-          <a:p>
-            <a:pPr indent="0" marL="0">
-              <a:buNone/>
-            </a:pPr>
-            <a:r>
-              <a:rPr lang="en-US" sz="750" spc="100" kern="0" dirty="0">
-                <a:solidFill>
-                  <a:srgbClr val="9FB4BD"/>
-                </a:solidFill>
-                <a:latin typeface="IBM Plex Mono" pitchFamily="34" charset="0"/>
-                <a:ea typeface="IBM Plex Mono" pitchFamily="34" charset="-122"/>
-                <a:cs typeface="IBM Plex Mono" pitchFamily="34" charset="-120"/>
-              </a:rPr>
-              <a:t>EVOLUÇÃO</a:t>
-            </a:r>
-            <a:endParaRPr lang="en-US" sz="750" dirty="0"/>
-          </a:p>
-        </p:txBody>
-      </p:sp>
-      <p:sp>
-        <p:nvSpPr>
-          <p:cNvPr id="27" name="Text 25"/>
-          <p:cNvSpPr/>
-          <p:nvPr/>
-        </p:nvSpPr>
-        <p:spPr>
-          <a:xfrm>
-            <a:off x="411480" y="4279392"/>
-            <a:ext cx="8321040" cy="365760"/>
-          </a:xfrm>
-          <a:prstGeom prst="rect">
-            <a:avLst/>
-          </a:prstGeom>
-          <a:noFill/>
-          <a:ln/>
-        </p:spPr>
-        <p:txBody>
-          <a:bodyPr wrap="square" rtlCol="0" anchor="ctr"/>
-          <a:lstStyle/>
-          <a:p>
-            <a:pPr indent="0" marL="0">
-              <a:buNone/>
-            </a:pPr>
-            <a:r>
-              <a:rPr lang="en-US" sz="1400" i="1" dirty="0">
-                <a:solidFill>
-                  <a:srgbClr val="EFE7D6"/>
-                </a:solidFill>
-                <a:latin typeface="Instrument Serif" pitchFamily="34" charset="0"/>
-                <a:ea typeface="Instrument Serif" pitchFamily="34" charset="-122"/>
-                <a:cs typeface="Instrument Serif" pitchFamily="34" charset="-120"/>
-              </a:rPr>
-              <a:t>“Não jogue a Beni fora.”  —  suporte circular: troca, reparo e devolução orientados pós-venda.</a:t>
-            </a:r>
-            <a:endParaRPr lang="en-US" sz="1400" dirty="0"/>
-          </a:p>
-        </p:txBody>
-      </p:sp>
-      <p:sp>
-        <p:nvSpPr>
-          <p:cNvPr id="28" name="Text 26"/>
-          <p:cNvSpPr/>
-          <p:nvPr/>
-        </p:nvSpPr>
-        <p:spPr>
-          <a:xfrm>
-            <a:off x="411480" y="4809744"/>
-            <a:ext cx="8321040" cy="274320"/>
-          </a:xfrm>
-          <a:prstGeom prst="rect">
-            <a:avLst/>
-          </a:prstGeom>
-          <a:noFill/>
-          <a:ln/>
-        </p:spPr>
-        <p:txBody>
-          <a:bodyPr wrap="square" rtlCol="0" anchor="ctr"/>
-          <a:lstStyle/>
-          <a:p>
-            <a:pPr indent="0" marL="0">
-              <a:buNone/>
-            </a:pPr>
-            <a:r>
-              <a:rPr lang="en-US" sz="850" spc="200" kern="0" dirty="0">
-                <a:solidFill>
-                  <a:srgbClr val="BFB49E"/>
-                </a:solidFill>
-                <a:latin typeface="IBM Plex Mono" pitchFamily="34" charset="0"/>
-                <a:ea typeface="IBM Plex Mono" pitchFamily="34" charset="-122"/>
-                <a:cs typeface="IBM Plex Mono" pitchFamily="34" charset="-120"/>
-              </a:rPr>
               <a:t>Luiza Britto · Design Thinking e Prototipagem · Insper · 02 jul 2026</a:t>
             </a:r>
-            <a:endParaRPr lang="en-US" sz="850" dirty="0"/>
+            <a:endParaRPr lang="en-US" sz="800" dirty="0"/>
           </a:p>
         </p:txBody>
       </p:sp>

--- a/entrega/CadeiraBeni_pitch.pptx
+++ b/entrega/CadeiraBeni_pitch.pptx
@@ -2456,7 +2456,7 @@
                 <a:ea typeface="IBM Plex Mono" pitchFamily="34" charset="-122"/>
                 <a:cs typeface="IBM Plex Mono" pitchFamily="34" charset="-120"/>
               </a:rPr>
-              <a:t>Luiza Britto · Design Thinking e Prototipagem · Insper · 02 jul 2026</a:t>
+              <a:t>Luiza Britto · PAS — Projeto Aplicado em Sustentabilidade · Insper · 02 jul 2026</a:t>
             </a:r>
             <a:endParaRPr lang="en-US" sz="800" dirty="0"/>
           </a:p>
@@ -3125,7 +3125,7 @@
                 <a:ea typeface="IBM Plex Mono" pitchFamily="34" charset="-122"/>
                 <a:cs typeface="IBM Plex Mono" pitchFamily="34" charset="-120"/>
               </a:rPr>
-              <a:t>Luiza Britto · Design Thinking e Prototipagem · Insper · 02 jul 2026</a:t>
+              <a:t>Luiza Britto · PAS — Projeto Aplicado em Sustentabilidade · Insper · 02 jul 2026</a:t>
             </a:r>
             <a:endParaRPr lang="en-US" sz="800" dirty="0"/>
           </a:p>
@@ -3907,7 +3907,7 @@
                 <a:ea typeface="IBM Plex Mono" pitchFamily="34" charset="-122"/>
                 <a:cs typeface="IBM Plex Mono" pitchFamily="34" charset="-120"/>
               </a:rPr>
-              <a:t>Luiza Britto · Design Thinking e Prototipagem · Insper · 02 jul 2026</a:t>
+              <a:t>Luiza Britto · PAS — Projeto Aplicado em Sustentabilidade · Insper · 02 jul 2026</a:t>
             </a:r>
             <a:endParaRPr lang="en-US" sz="800" dirty="0"/>
           </a:p>
@@ -4489,7 +4489,7 @@
                 <a:ea typeface="IBM Plex Mono" pitchFamily="34" charset="-122"/>
                 <a:cs typeface="IBM Plex Mono" pitchFamily="34" charset="-120"/>
               </a:rPr>
-              <a:t>Luiza Britto · Design Thinking e Prototipagem · Insper · 02 jul 2026</a:t>
+              <a:t>Luiza Britto · PAS — Projeto Aplicado em Sustentabilidade · Insper · 02 jul 2026</a:t>
             </a:r>
             <a:endParaRPr lang="en-US" sz="800" dirty="0"/>
           </a:p>
@@ -5686,7 +5686,7 @@
                 <a:ea typeface="IBM Plex Sans" pitchFamily="34" charset="-122"/>
                 <a:cs typeface="IBM Plex Sans" pitchFamily="34" charset="-120"/>
               </a:rPr>
-              <a:t>Madeira urbana de qualidade vira descarte volumoso; o setor roda em espuma e plástico virgem.</a:t>
+              <a:t>Madeira maciça de móveis antigos vira descarte volumoso — e cada peça reusada substitui madeira nova.</a:t>
             </a:r>
             <a:endParaRPr lang="en-US" sz="1400" dirty="0"/>
           </a:p>
@@ -5959,7 +5959,7 @@
                 <a:ea typeface="IBM Plex Mono" pitchFamily="34" charset="-122"/>
                 <a:cs typeface="IBM Plex Mono" pitchFamily="34" charset="-120"/>
               </a:rPr>
-              <a:t>Luiza Britto · Design Thinking e Prototipagem · Insper · 02 jul 2026</a:t>
+              <a:t>Luiza Britto · PAS — Projeto Aplicado em Sustentabilidade · Insper · 02 jul 2026</a:t>
             </a:r>
             <a:endParaRPr lang="en-US" sz="800" dirty="0"/>
           </a:p>
@@ -6504,7 +6504,7 @@
                 <a:ea typeface="IBM Plex Mono" pitchFamily="34" charset="-122"/>
                 <a:cs typeface="IBM Plex Mono" pitchFamily="34" charset="-120"/>
               </a:rPr>
-              <a:t>Luiza Britto · Design Thinking e Prototipagem · Insper · 02 jul 2026</a:t>
+              <a:t>Luiza Britto · PAS — Projeto Aplicado em Sustentabilidade · Insper · 02 jul 2026</a:t>
             </a:r>
             <a:endParaRPr lang="en-US" sz="800" dirty="0"/>
           </a:p>
@@ -6695,7 +6695,7 @@
                 <a:ea typeface="IBM Plex Mono" pitchFamily="34" charset="-122"/>
                 <a:cs typeface="IBM Plex Mono" pitchFamily="34" charset="-120"/>
               </a:rPr>
-              <a:t>VALIDAÇÃO · 6 CONVERSAS — TUTORES, MARCENEIROS, VETERINÁRIO, CATADORES</a:t>
+              <a:t>VALIDAÇÃO · CERTEZAS &amp; SUPOSIÇÕES DA PESQUISA · 6 ENTREVISTAS — TUTORES, MARCENEIRO, VETERINÁRIO, CATADOR</a:t>
             </a:r>
             <a:endParaRPr lang="en-US" sz="1050" dirty="0"/>
           </a:p>
@@ -6754,7 +6754,7 @@
                 <a:ea typeface="Instrument Serif" pitchFamily="34" charset="-122"/>
                 <a:cs typeface="Instrument Serif" pitchFamily="34" charset="-120"/>
               </a:rPr>
-              <a:t>“Se parecer móvel, eu deixo na sala.”</a:t>
+              <a:t>“Higiene — urina, pelos, ácaros — é fator obrigatório de aceitação.”</a:t>
             </a:r>
             <a:endParaRPr lang="en-US" sz="2300" dirty="0"/>
           </a:p>
@@ -6793,7 +6793,7 @@
                 <a:ea typeface="IBM Plex Mono" pitchFamily="34" charset="-122"/>
                 <a:cs typeface="IBM Plex Mono" pitchFamily="34" charset="-120"/>
               </a:rPr>
-              <a:t>TUTORA      →  VIROU: LINGUAGEM DE MÓVEL</a:t>
+              <a:t>CERTEZA · PESQUISA      →  VIROU: VERNIZ LAVÁVEL AGORA, CAPA REMOVÍVEL NO ROADMAP</a:t>
             </a:r>
             <a:endParaRPr lang="en-US" sz="900" dirty="0"/>
           </a:p>
@@ -6852,7 +6852,7 @@
                 <a:ea typeface="Instrument Serif" pitchFamily="34" charset="-122"/>
                 <a:cs typeface="Instrument Serif" pitchFamily="34" charset="-120"/>
               </a:rPr>
-              <a:t>“Lavável não é diferencial. É requisito.”</a:t>
+              <a:t>“Só confio no reaproveitado com protocolo claro de sanitização.”</a:t>
             </a:r>
             <a:endParaRPr lang="en-US" sz="2300" dirty="0"/>
           </a:p>
@@ -6891,7 +6891,7 @@
                 <a:ea typeface="IBM Plex Mono" pitchFamily="34" charset="-122"/>
                 <a:cs typeface="IBM Plex Mono" pitchFamily="34" charset="-120"/>
               </a:rPr>
-              <a:t>SÍNTESE      →  VIROU: CAPA LAVÁVEL NO ROADMAP</a:t>
+              <a:t>SUPOSIÇÃO · CONSUMIDORES      →  VIROU: TRIAGEM, TRATAMENTO E VERNIZ NO PROCESSO</a:t>
             </a:r>
             <a:endParaRPr lang="en-US" sz="900" dirty="0"/>
           </a:p>
@@ -6950,7 +6950,7 @@
                 <a:ea typeface="Instrument Serif" pitchFamily="34" charset="-122"/>
                 <a:cs typeface="Instrument Serif" pitchFamily="34" charset="-120"/>
               </a:rPr>
-              <a:t>“Madeira reaproveitada precisa vir com cuidado.”</a:t>
+              <a:t>“Peroba e jacarandá, hoje, só se obtêm por reuso.”</a:t>
             </a:r>
             <a:endParaRPr lang="en-US" sz="2300" dirty="0"/>
           </a:p>
@@ -6989,7 +6989,7 @@
                 <a:ea typeface="IBM Plex Mono" pitchFamily="34" charset="-122"/>
                 <a:cs typeface="IBM Plex Mono" pitchFamily="34" charset="-120"/>
               </a:rPr>
-              <a:t>MARCENEIRO · VETERINÁRIO      →  VIROU: TRIAGEM + SANITIZAÇÃO</a:t>
+              <a:t>CERTEZA · MADEIRA-FONTE      →  VIROU: MINERAÇÃO URBANA COMO VALOR</a:t>
             </a:r>
             <a:endParaRPr lang="en-US" sz="900" dirty="0"/>
           </a:p>
@@ -7028,7 +7028,7 @@
                 <a:ea typeface="IBM Plex Mono" pitchFamily="34" charset="-122"/>
                 <a:cs typeface="IBM Plex Mono" pitchFamily="34" charset="-120"/>
               </a:rPr>
-              <a:t>Luiza Britto · Design Thinking e Prototipagem · Insper · 02 jul 2026</a:t>
+              <a:t>Luiza Britto · PAS — Projeto Aplicado em Sustentabilidade · Insper · 02 jul 2026</a:t>
             </a:r>
             <a:endParaRPr lang="en-US" sz="800" dirty="0"/>
           </a:p>
@@ -7418,7 +7418,7 @@
                 <a:ea typeface="IBM Plex Sans" pitchFamily="34" charset="-122"/>
                 <a:cs typeface="IBM Plex Sans" pitchFamily="34" charset="-120"/>
               </a:rPr>
-              <a:t>Espuma + plástico virgem</a:t>
+              <a:t>Madeira nova, insumo virgem</a:t>
             </a:r>
             <a:endParaRPr lang="en-US" sz="1400" dirty="0"/>
           </a:p>
@@ -7759,7 +7759,7 @@
                 <a:ea typeface="IBM Plex Mono" pitchFamily="34" charset="-122"/>
                 <a:cs typeface="IBM Plex Mono" pitchFamily="34" charset="-120"/>
               </a:rPr>
-              <a:t>Luiza Britto · Design Thinking e Prototipagem · Insper · 02 jul 2026</a:t>
+              <a:t>Luiza Britto · PAS — Projeto Aplicado em Sustentabilidade · Insper · 02 jul 2026</a:t>
             </a:r>
             <a:endParaRPr lang="en-US" sz="800" dirty="0"/>
           </a:p>
@@ -8819,7 +8819,7 @@
                 <a:ea typeface="IBM Plex Mono" pitchFamily="34" charset="-122"/>
                 <a:cs typeface="IBM Plex Mono" pitchFamily="34" charset="-120"/>
               </a:rPr>
-              <a:t>Luiza Britto · Design Thinking e Prototipagem · Insper · 02 jul 2026</a:t>
+              <a:t>Luiza Britto · PAS — Projeto Aplicado em Sustentabilidade · Insper · 02 jul 2026</a:t>
             </a:r>
             <a:endParaRPr lang="en-US" sz="800" dirty="0"/>
           </a:p>
@@ -9138,7 +9138,7 @@
                 <a:ea typeface="IBM Plex Mono" pitchFamily="34" charset="-122"/>
                 <a:cs typeface="IBM Plex Mono" pitchFamily="34" charset="-120"/>
               </a:rPr>
-              <a:t>Luiza Britto · Design Thinking e Prototipagem · Insper · 02 jul 2026</a:t>
+              <a:t>Luiza Britto · PAS — Projeto Aplicado em Sustentabilidade · Insper · 02 jul 2026</a:t>
             </a:r>
             <a:endParaRPr lang="en-US" sz="800" dirty="0"/>
           </a:p>
@@ -9719,7 +9719,7 @@
                 <a:ea typeface="IBM Plex Mono" pitchFamily="34" charset="-122"/>
                 <a:cs typeface="IBM Plex Mono" pitchFamily="34" charset="-120"/>
               </a:rPr>
-              <a:t>Luiza Britto · Design Thinking e Prototipagem · Insper · 02 jul 2026</a:t>
+              <a:t>Luiza Britto · PAS — Projeto Aplicado em Sustentabilidade · Insper · 02 jul 2026</a:t>
             </a:r>
             <a:endParaRPr lang="en-US" sz="800" dirty="0"/>
           </a:p>
@@ -10513,7 +10513,7 @@
                 <a:ea typeface="IBM Plex Mono" pitchFamily="34" charset="-122"/>
                 <a:cs typeface="IBM Plex Mono" pitchFamily="34" charset="-120"/>
               </a:rPr>
-              <a:t>Luiza Britto · Design Thinking e Prototipagem · Insper · 02 jul 2026</a:t>
+              <a:t>Luiza Britto · PAS — Projeto Aplicado em Sustentabilidade · Insper · 02 jul 2026</a:t>
             </a:r>
             <a:endParaRPr lang="en-US" sz="800" dirty="0"/>
           </a:p>

--- a/entrega/CadeiraBeni_pitch.pptx
+++ b/entrega/CadeiraBeni_pitch.pptx
@@ -2456,7 +2456,7 @@
                 <a:ea typeface="IBM Plex Mono" pitchFamily="34" charset="-122"/>
                 <a:cs typeface="IBM Plex Mono" pitchFamily="34" charset="-120"/>
               </a:rPr>
-              <a:t>Luiza Britto · PAS — Projeto Aplicado em Sustentabilidade · Insper · 02 jul 2026</a:t>
+              <a:t>Luiza Britto · PAS — Programa Avançado de Sustentabilidade · Insper · 02 jul 2026</a:t>
             </a:r>
             <a:endParaRPr lang="en-US" sz="800" dirty="0"/>
           </a:p>
@@ -3125,7 +3125,7 @@
                 <a:ea typeface="IBM Plex Mono" pitchFamily="34" charset="-122"/>
                 <a:cs typeface="IBM Plex Mono" pitchFamily="34" charset="-120"/>
               </a:rPr>
-              <a:t>Luiza Britto · PAS — Projeto Aplicado em Sustentabilidade · Insper · 02 jul 2026</a:t>
+              <a:t>Luiza Britto · PAS — Programa Avançado de Sustentabilidade · Insper · 02 jul 2026</a:t>
             </a:r>
             <a:endParaRPr lang="en-US" sz="800" dirty="0"/>
           </a:p>
@@ -3907,7 +3907,7 @@
                 <a:ea typeface="IBM Plex Mono" pitchFamily="34" charset="-122"/>
                 <a:cs typeface="IBM Plex Mono" pitchFamily="34" charset="-120"/>
               </a:rPr>
-              <a:t>Luiza Britto · PAS — Projeto Aplicado em Sustentabilidade · Insper · 02 jul 2026</a:t>
+              <a:t>Luiza Britto · PAS — Programa Avançado de Sustentabilidade · Insper · 02 jul 2026</a:t>
             </a:r>
             <a:endParaRPr lang="en-US" sz="800" dirty="0"/>
           </a:p>
@@ -4489,7 +4489,7 @@
                 <a:ea typeface="IBM Plex Mono" pitchFamily="34" charset="-122"/>
                 <a:cs typeface="IBM Plex Mono" pitchFamily="34" charset="-120"/>
               </a:rPr>
-              <a:t>Luiza Britto · PAS — Projeto Aplicado em Sustentabilidade · Insper · 02 jul 2026</a:t>
+              <a:t>Luiza Britto · PAS — Programa Avançado de Sustentabilidade · Insper · 02 jul 2026</a:t>
             </a:r>
             <a:endParaRPr lang="en-US" sz="800" dirty="0"/>
           </a:p>
@@ -5959,7 +5959,7 @@
                 <a:ea typeface="IBM Plex Mono" pitchFamily="34" charset="-122"/>
                 <a:cs typeface="IBM Plex Mono" pitchFamily="34" charset="-120"/>
               </a:rPr>
-              <a:t>Luiza Britto · PAS — Projeto Aplicado em Sustentabilidade · Insper · 02 jul 2026</a:t>
+              <a:t>Luiza Britto · PAS — Programa Avançado de Sustentabilidade · Insper · 02 jul 2026</a:t>
             </a:r>
             <a:endParaRPr lang="en-US" sz="800" dirty="0"/>
           </a:p>
@@ -6504,7 +6504,7 @@
                 <a:ea typeface="IBM Plex Mono" pitchFamily="34" charset="-122"/>
                 <a:cs typeface="IBM Plex Mono" pitchFamily="34" charset="-120"/>
               </a:rPr>
-              <a:t>Luiza Britto · PAS — Projeto Aplicado em Sustentabilidade · Insper · 02 jul 2026</a:t>
+              <a:t>Luiza Britto · PAS — Programa Avançado de Sustentabilidade · Insper · 02 jul 2026</a:t>
             </a:r>
             <a:endParaRPr lang="en-US" sz="800" dirty="0"/>
           </a:p>
@@ -7028,7 +7028,7 @@
                 <a:ea typeface="IBM Plex Mono" pitchFamily="34" charset="-122"/>
                 <a:cs typeface="IBM Plex Mono" pitchFamily="34" charset="-120"/>
               </a:rPr>
-              <a:t>Luiza Britto · PAS — Projeto Aplicado em Sustentabilidade · Insper · 02 jul 2026</a:t>
+              <a:t>Luiza Britto · PAS — Programa Avançado de Sustentabilidade · Insper · 02 jul 2026</a:t>
             </a:r>
             <a:endParaRPr lang="en-US" sz="800" dirty="0"/>
           </a:p>
@@ -7759,7 +7759,7 @@
                 <a:ea typeface="IBM Plex Mono" pitchFamily="34" charset="-122"/>
                 <a:cs typeface="IBM Plex Mono" pitchFamily="34" charset="-120"/>
               </a:rPr>
-              <a:t>Luiza Britto · PAS — Projeto Aplicado em Sustentabilidade · Insper · 02 jul 2026</a:t>
+              <a:t>Luiza Britto · PAS — Programa Avançado de Sustentabilidade · Insper · 02 jul 2026</a:t>
             </a:r>
             <a:endParaRPr lang="en-US" sz="800" dirty="0"/>
           </a:p>
@@ -8819,7 +8819,7 @@
                 <a:ea typeface="IBM Plex Mono" pitchFamily="34" charset="-122"/>
                 <a:cs typeface="IBM Plex Mono" pitchFamily="34" charset="-120"/>
               </a:rPr>
-              <a:t>Luiza Britto · PAS — Projeto Aplicado em Sustentabilidade · Insper · 02 jul 2026</a:t>
+              <a:t>Luiza Britto · PAS — Programa Avançado de Sustentabilidade · Insper · 02 jul 2026</a:t>
             </a:r>
             <a:endParaRPr lang="en-US" sz="800" dirty="0"/>
           </a:p>
@@ -9138,7 +9138,7 @@
                 <a:ea typeface="IBM Plex Mono" pitchFamily="34" charset="-122"/>
                 <a:cs typeface="IBM Plex Mono" pitchFamily="34" charset="-120"/>
               </a:rPr>
-              <a:t>Luiza Britto · PAS — Projeto Aplicado em Sustentabilidade · Insper · 02 jul 2026</a:t>
+              <a:t>Luiza Britto · PAS — Programa Avançado de Sustentabilidade · Insper · 02 jul 2026</a:t>
             </a:r>
             <a:endParaRPr lang="en-US" sz="800" dirty="0"/>
           </a:p>
@@ -9719,7 +9719,7 @@
                 <a:ea typeface="IBM Plex Mono" pitchFamily="34" charset="-122"/>
                 <a:cs typeface="IBM Plex Mono" pitchFamily="34" charset="-120"/>
               </a:rPr>
-              <a:t>Luiza Britto · PAS — Projeto Aplicado em Sustentabilidade · Insper · 02 jul 2026</a:t>
+              <a:t>Luiza Britto · PAS — Programa Avançado de Sustentabilidade · Insper · 02 jul 2026</a:t>
             </a:r>
             <a:endParaRPr lang="en-US" sz="800" dirty="0"/>
           </a:p>
@@ -10513,7 +10513,7 @@
                 <a:ea typeface="IBM Plex Mono" pitchFamily="34" charset="-122"/>
                 <a:cs typeface="IBM Plex Mono" pitchFamily="34" charset="-120"/>
               </a:rPr>
-              <a:t>Luiza Britto · PAS — Projeto Aplicado em Sustentabilidade · Insper · 02 jul 2026</a:t>
+              <a:t>Luiza Britto · PAS — Programa Avançado de Sustentabilidade · Insper · 02 jul 2026</a:t>
             </a:r>
             <a:endParaRPr lang="en-US" sz="800" dirty="0"/>
           </a:p>
